--- a/ucbl_report/figures/for gricey.pptx
+++ b/ucbl_report/figures/for gricey.pptx
@@ -264,7 +264,7 @@
           <a:p>
             <a:fld id="{D11B9758-4519-47D1-A8BB-8492636F1346}" type="datetimeFigureOut">
               <a:rPr lang="en-GB" smtClean="0"/>
-              <a:t>11/06/2026</a:t>
+              <a:t>26/06/2026</a:t>
             </a:fld>
             <a:endParaRPr lang="en-GB"/>
           </a:p>
@@ -464,7 +464,7 @@
           <a:p>
             <a:fld id="{D11B9758-4519-47D1-A8BB-8492636F1346}" type="datetimeFigureOut">
               <a:rPr lang="en-GB" smtClean="0"/>
-              <a:t>11/06/2026</a:t>
+              <a:t>26/06/2026</a:t>
             </a:fld>
             <a:endParaRPr lang="en-GB"/>
           </a:p>
@@ -674,7 +674,7 @@
           <a:p>
             <a:fld id="{D11B9758-4519-47D1-A8BB-8492636F1346}" type="datetimeFigureOut">
               <a:rPr lang="en-GB" smtClean="0"/>
-              <a:t>11/06/2026</a:t>
+              <a:t>26/06/2026</a:t>
             </a:fld>
             <a:endParaRPr lang="en-GB"/>
           </a:p>
@@ -874,7 +874,7 @@
           <a:p>
             <a:fld id="{D11B9758-4519-47D1-A8BB-8492636F1346}" type="datetimeFigureOut">
               <a:rPr lang="en-GB" smtClean="0"/>
-              <a:t>11/06/2026</a:t>
+              <a:t>26/06/2026</a:t>
             </a:fld>
             <a:endParaRPr lang="en-GB"/>
           </a:p>
@@ -1150,7 +1150,7 @@
           <a:p>
             <a:fld id="{D11B9758-4519-47D1-A8BB-8492636F1346}" type="datetimeFigureOut">
               <a:rPr lang="en-GB" smtClean="0"/>
-              <a:t>11/06/2026</a:t>
+              <a:t>26/06/2026</a:t>
             </a:fld>
             <a:endParaRPr lang="en-GB"/>
           </a:p>
@@ -1418,7 +1418,7 @@
           <a:p>
             <a:fld id="{D11B9758-4519-47D1-A8BB-8492636F1346}" type="datetimeFigureOut">
               <a:rPr lang="en-GB" smtClean="0"/>
-              <a:t>11/06/2026</a:t>
+              <a:t>26/06/2026</a:t>
             </a:fld>
             <a:endParaRPr lang="en-GB"/>
           </a:p>
@@ -1833,7 +1833,7 @@
           <a:p>
             <a:fld id="{D11B9758-4519-47D1-A8BB-8492636F1346}" type="datetimeFigureOut">
               <a:rPr lang="en-GB" smtClean="0"/>
-              <a:t>11/06/2026</a:t>
+              <a:t>26/06/2026</a:t>
             </a:fld>
             <a:endParaRPr lang="en-GB"/>
           </a:p>
@@ -1975,7 +1975,7 @@
           <a:p>
             <a:fld id="{D11B9758-4519-47D1-A8BB-8492636F1346}" type="datetimeFigureOut">
               <a:rPr lang="en-GB" smtClean="0"/>
-              <a:t>11/06/2026</a:t>
+              <a:t>26/06/2026</a:t>
             </a:fld>
             <a:endParaRPr lang="en-GB"/>
           </a:p>
@@ -2088,7 +2088,7 @@
           <a:p>
             <a:fld id="{D11B9758-4519-47D1-A8BB-8492636F1346}" type="datetimeFigureOut">
               <a:rPr lang="en-GB" smtClean="0"/>
-              <a:t>11/06/2026</a:t>
+              <a:t>26/06/2026</a:t>
             </a:fld>
             <a:endParaRPr lang="en-GB"/>
           </a:p>
@@ -2401,7 +2401,7 @@
           <a:p>
             <a:fld id="{D11B9758-4519-47D1-A8BB-8492636F1346}" type="datetimeFigureOut">
               <a:rPr lang="en-GB" smtClean="0"/>
-              <a:t>11/06/2026</a:t>
+              <a:t>26/06/2026</a:t>
             </a:fld>
             <a:endParaRPr lang="en-GB"/>
           </a:p>
@@ -2690,7 +2690,7 @@
           <a:p>
             <a:fld id="{D11B9758-4519-47D1-A8BB-8492636F1346}" type="datetimeFigureOut">
               <a:rPr lang="en-GB" smtClean="0"/>
-              <a:t>11/06/2026</a:t>
+              <a:t>26/06/2026</a:t>
             </a:fld>
             <a:endParaRPr lang="en-GB"/>
           </a:p>
@@ -2933,7 +2933,7 @@
           <a:p>
             <a:fld id="{D11B9758-4519-47D1-A8BB-8492636F1346}" type="datetimeFigureOut">
               <a:rPr lang="en-GB" smtClean="0"/>
-              <a:t>11/06/2026</a:t>
+              <a:t>26/06/2026</a:t>
             </a:fld>
             <a:endParaRPr lang="en-GB"/>
           </a:p>
@@ -5992,958 +5992,6 @@
       </p:sp>
       <p:sp>
         <p:nvSpPr>
-          <p:cNvPr id="5" name="ZoneTexte 4">
-            <a:extLst>
-              <a:ext uri="{FF2B5EF4-FFF2-40B4-BE49-F238E27FC236}">
-                <a16:creationId xmlns:a16="http://schemas.microsoft.com/office/drawing/2014/main" id="{8E3A4C2A-D5AE-491D-BA47-A9AA6ED25459}"/>
-              </a:ext>
-            </a:extLst>
-          </p:cNvPr>
-          <p:cNvSpPr txBox="1"/>
-          <p:nvPr/>
-        </p:nvSpPr>
-        <p:spPr>
-          <a:xfrm>
-            <a:off x="5530963" y="4409533"/>
-            <a:ext cx="979139" cy="276999"/>
-          </a:xfrm>
-          <a:prstGeom prst="rect">
-            <a:avLst/>
-          </a:prstGeom>
-          <a:noFill/>
-        </p:spPr>
-        <p:txBody>
-          <a:bodyPr wrap="square" rtlCol="0">
-            <a:spAutoFit/>
-          </a:bodyPr>
-          <a:lstStyle/>
-          <a:p>
-            <a:pPr algn="ctr"/>
-            <a:r>
-              <a:rPr lang="en-GB" sz="1200" b="1" dirty="0">
-                <a:latin typeface="Arial" panose="020B0604020202020204" pitchFamily="34" charset="0"/>
-                <a:cs typeface="Arial" panose="020B0604020202020204" pitchFamily="34" charset="0"/>
-              </a:rPr>
-              <a:t>Alignment</a:t>
-            </a:r>
-            <a:endParaRPr lang="en-GB" sz="1400" b="1" dirty="0">
-              <a:latin typeface="Arial" panose="020B0604020202020204" pitchFamily="34" charset="0"/>
-              <a:cs typeface="Arial" panose="020B0604020202020204" pitchFamily="34" charset="0"/>
-            </a:endParaRPr>
-          </a:p>
-        </p:txBody>
-      </p:sp>
-      <p:sp>
-        <p:nvSpPr>
-          <p:cNvPr id="6" name="ZoneTexte 5">
-            <a:extLst>
-              <a:ext uri="{FF2B5EF4-FFF2-40B4-BE49-F238E27FC236}">
-                <a16:creationId xmlns:a16="http://schemas.microsoft.com/office/drawing/2014/main" id="{12F16074-8783-459C-962D-29B32C377A5B}"/>
-              </a:ext>
-            </a:extLst>
-          </p:cNvPr>
-          <p:cNvSpPr txBox="1"/>
-          <p:nvPr/>
-        </p:nvSpPr>
-        <p:spPr>
-          <a:xfrm>
-            <a:off x="5454961" y="2758406"/>
-            <a:ext cx="1098374" cy="276999"/>
-          </a:xfrm>
-          <a:prstGeom prst="rect">
-            <a:avLst/>
-          </a:prstGeom>
-          <a:noFill/>
-        </p:spPr>
-        <p:txBody>
-          <a:bodyPr wrap="square" rtlCol="0">
-            <a:spAutoFit/>
-          </a:bodyPr>
-          <a:lstStyle/>
-          <a:p>
-            <a:r>
-              <a:rPr lang="en-GB" sz="1200" b="1" dirty="0">
-                <a:latin typeface="Arial" panose="020B0604020202020204" pitchFamily="34" charset="0"/>
-                <a:cs typeface="Arial" panose="020B0604020202020204" pitchFamily="34" charset="0"/>
-              </a:rPr>
-              <a:t>Base-calling</a:t>
-            </a:r>
-          </a:p>
-        </p:txBody>
-      </p:sp>
-      <p:pic>
-        <p:nvPicPr>
-          <p:cNvPr id="7" name="Image 6">
-            <a:extLst>
-              <a:ext uri="{FF2B5EF4-FFF2-40B4-BE49-F238E27FC236}">
-                <a16:creationId xmlns:a16="http://schemas.microsoft.com/office/drawing/2014/main" id="{3215F999-1692-4BD0-A589-60EA65645381}"/>
-              </a:ext>
-            </a:extLst>
-          </p:cNvPr>
-          <p:cNvPicPr>
-            <a:picLocks noChangeAspect="1"/>
-          </p:cNvPicPr>
-          <p:nvPr/>
-        </p:nvPicPr>
-        <p:blipFill>
-          <a:blip r:embed="rId2">
-            <a:clrChange>
-              <a:clrFrom>
-                <a:srgbClr val="FFFFFF"/>
-              </a:clrFrom>
-              <a:clrTo>
-                <a:srgbClr val="FFFFFF">
-                  <a:alpha val="0"/>
-                </a:srgbClr>
-              </a:clrTo>
-            </a:clrChange>
-            <a:extLst>
-              <a:ext uri="{28A0092B-C50C-407E-A947-70E740481C1C}">
-                <a14:useLocalDpi xmlns:a14="http://schemas.microsoft.com/office/drawing/2010/main" val="0"/>
-              </a:ext>
-            </a:extLst>
-          </a:blip>
-          <a:stretch>
-            <a:fillRect/>
-          </a:stretch>
-        </p:blipFill>
-        <p:spPr>
-          <a:xfrm>
-            <a:off x="4043878" y="2745923"/>
-            <a:ext cx="1481478" cy="336515"/>
-          </a:xfrm>
-          <a:prstGeom prst="rect">
-            <a:avLst/>
-          </a:prstGeom>
-        </p:spPr>
-      </p:pic>
-      <p:sp>
-        <p:nvSpPr>
-          <p:cNvPr id="8" name="ZoneTexte 7">
-            <a:extLst>
-              <a:ext uri="{FF2B5EF4-FFF2-40B4-BE49-F238E27FC236}">
-                <a16:creationId xmlns:a16="http://schemas.microsoft.com/office/drawing/2014/main" id="{5938F217-DD2A-456B-B81F-A362C7613D68}"/>
-              </a:ext>
-            </a:extLst>
-          </p:cNvPr>
-          <p:cNvSpPr txBox="1"/>
-          <p:nvPr/>
-        </p:nvSpPr>
-        <p:spPr>
-          <a:xfrm>
-            <a:off x="3834578" y="3063985"/>
-            <a:ext cx="1889184" cy="261610"/>
-          </a:xfrm>
-          <a:prstGeom prst="rect">
-            <a:avLst/>
-          </a:prstGeom>
-          <a:noFill/>
-        </p:spPr>
-        <p:txBody>
-          <a:bodyPr wrap="square" rtlCol="0">
-            <a:spAutoFit/>
-          </a:bodyPr>
-          <a:lstStyle/>
-          <a:p>
-            <a:r>
-              <a:rPr lang="en-GB" sz="1100" dirty="0">
-                <a:solidFill>
-                  <a:schemeClr val="accent5">
-                    <a:lumMod val="75000"/>
-                  </a:schemeClr>
-                </a:solidFill>
-                <a:latin typeface="Arial" panose="020B0604020202020204" pitchFamily="34" charset="0"/>
-                <a:cs typeface="Arial" panose="020B0604020202020204" pitchFamily="34" charset="0"/>
-              </a:rPr>
-              <a:t>CGTTGATTTGCTGGGGG</a:t>
-            </a:r>
-            <a:endParaRPr lang="en-GB" sz="1050" dirty="0">
-              <a:solidFill>
-                <a:schemeClr val="accent5">
-                  <a:lumMod val="75000"/>
-                </a:schemeClr>
-              </a:solidFill>
-              <a:latin typeface="Arial" panose="020B0604020202020204" pitchFamily="34" charset="0"/>
-              <a:cs typeface="Arial" panose="020B0604020202020204" pitchFamily="34" charset="0"/>
-            </a:endParaRPr>
-          </a:p>
-        </p:txBody>
-      </p:sp>
-      <p:pic>
-        <p:nvPicPr>
-          <p:cNvPr id="9" name="Image 8">
-            <a:extLst>
-              <a:ext uri="{FF2B5EF4-FFF2-40B4-BE49-F238E27FC236}">
-                <a16:creationId xmlns:a16="http://schemas.microsoft.com/office/drawing/2014/main" id="{3873F93B-8839-47B6-916D-F41FB6885E38}"/>
-              </a:ext>
-            </a:extLst>
-          </p:cNvPr>
-          <p:cNvPicPr>
-            <a:picLocks noChangeAspect="1"/>
-          </p:cNvPicPr>
-          <p:nvPr/>
-        </p:nvPicPr>
-        <p:blipFill rotWithShape="1">
-          <a:blip r:embed="rId3">
-            <a:clrChange>
-              <a:clrFrom>
-                <a:srgbClr val="FFFFFF"/>
-              </a:clrFrom>
-              <a:clrTo>
-                <a:srgbClr val="FFFFFF">
-                  <a:alpha val="0"/>
-                </a:srgbClr>
-              </a:clrTo>
-            </a:clrChange>
-            <a:extLst>
-              <a:ext uri="{28A0092B-C50C-407E-A947-70E740481C1C}">
-                <a14:useLocalDpi xmlns:a14="http://schemas.microsoft.com/office/drawing/2010/main" val="0"/>
-              </a:ext>
-            </a:extLst>
-          </a:blip>
-          <a:srcRect l="49515" t="58816" r="9961" b="16490"/>
-          <a:stretch/>
-        </p:blipFill>
-        <p:spPr>
-          <a:xfrm>
-            <a:off x="3628347" y="3618725"/>
-            <a:ext cx="1715854" cy="554156"/>
-          </a:xfrm>
-          <a:prstGeom prst="rect">
-            <a:avLst/>
-          </a:prstGeom>
-        </p:spPr>
-      </p:pic>
-      <p:sp>
-        <p:nvSpPr>
-          <p:cNvPr id="10" name="ZoneTexte 9">
-            <a:extLst>
-              <a:ext uri="{FF2B5EF4-FFF2-40B4-BE49-F238E27FC236}">
-                <a16:creationId xmlns:a16="http://schemas.microsoft.com/office/drawing/2014/main" id="{C3B1006E-A883-4137-AECA-7DE1FC69E407}"/>
-              </a:ext>
-            </a:extLst>
-          </p:cNvPr>
-          <p:cNvSpPr txBox="1"/>
-          <p:nvPr/>
-        </p:nvSpPr>
-        <p:spPr>
-          <a:xfrm>
-            <a:off x="5025020" y="5168074"/>
-            <a:ext cx="1852165" cy="276999"/>
-          </a:xfrm>
-          <a:prstGeom prst="rect">
-            <a:avLst/>
-          </a:prstGeom>
-          <a:noFill/>
-        </p:spPr>
-        <p:txBody>
-          <a:bodyPr wrap="square" rtlCol="0">
-            <a:spAutoFit/>
-          </a:bodyPr>
-          <a:lstStyle/>
-          <a:p>
-            <a:pPr algn="ctr"/>
-            <a:r>
-              <a:rPr lang="en-GB" sz="1200" b="1" dirty="0">
-                <a:latin typeface="Arial" panose="020B0604020202020204" pitchFamily="34" charset="0"/>
-                <a:cs typeface="Arial" panose="020B0604020202020204" pitchFamily="34" charset="0"/>
-              </a:rPr>
-              <a:t>Downstream analyses</a:t>
-            </a:r>
-          </a:p>
-        </p:txBody>
-      </p:sp>
-      <p:sp>
-        <p:nvSpPr>
-          <p:cNvPr id="11" name="ZoneTexte 10">
-            <a:extLst>
-              <a:ext uri="{FF2B5EF4-FFF2-40B4-BE49-F238E27FC236}">
-                <a16:creationId xmlns:a16="http://schemas.microsoft.com/office/drawing/2014/main" id="{015FE71E-2601-46DA-AE4D-E74A77E3E648}"/>
-              </a:ext>
-            </a:extLst>
-          </p:cNvPr>
-          <p:cNvSpPr txBox="1"/>
-          <p:nvPr/>
-        </p:nvSpPr>
-        <p:spPr>
-          <a:xfrm>
-            <a:off x="5507554" y="2097039"/>
-            <a:ext cx="1123418" cy="276999"/>
-          </a:xfrm>
-          <a:prstGeom prst="rect">
-            <a:avLst/>
-          </a:prstGeom>
-          <a:noFill/>
-        </p:spPr>
-        <p:txBody>
-          <a:bodyPr wrap="square" rtlCol="0">
-            <a:spAutoFit/>
-          </a:bodyPr>
-          <a:lstStyle/>
-          <a:p>
-            <a:r>
-              <a:rPr lang="en-GB" sz="1200" b="1" dirty="0">
-                <a:latin typeface="Arial" panose="020B0604020202020204" pitchFamily="34" charset="0"/>
-                <a:cs typeface="Arial" panose="020B0604020202020204" pitchFamily="34" charset="0"/>
-              </a:rPr>
-              <a:t>Sequencing</a:t>
-            </a:r>
-            <a:endParaRPr lang="en-GB" sz="1400" b="1" dirty="0">
-              <a:latin typeface="Arial" panose="020B0604020202020204" pitchFamily="34" charset="0"/>
-              <a:cs typeface="Arial" panose="020B0604020202020204" pitchFamily="34" charset="0"/>
-            </a:endParaRPr>
-          </a:p>
-        </p:txBody>
-      </p:sp>
-      <p:cxnSp>
-        <p:nvCxnSpPr>
-          <p:cNvPr id="12" name="Connecteur droit avec flèche 11">
-            <a:extLst>
-              <a:ext uri="{FF2B5EF4-FFF2-40B4-BE49-F238E27FC236}">
-                <a16:creationId xmlns:a16="http://schemas.microsoft.com/office/drawing/2014/main" id="{1DEC4F06-BBD6-44F9-9E1A-A336DF9D9CD3}"/>
-              </a:ext>
-            </a:extLst>
-          </p:cNvPr>
-          <p:cNvCxnSpPr>
-            <a:cxnSpLocks/>
-          </p:cNvCxnSpPr>
-          <p:nvPr/>
-        </p:nvCxnSpPr>
-        <p:spPr>
-          <a:xfrm>
-            <a:off x="5959417" y="2339867"/>
-            <a:ext cx="0" cy="449730"/>
-          </a:xfrm>
-          <a:prstGeom prst="straightConnector1">
-            <a:avLst/>
-          </a:prstGeom>
-          <a:ln>
-            <a:solidFill>
-              <a:schemeClr val="bg1">
-                <a:lumMod val="75000"/>
-              </a:schemeClr>
-            </a:solidFill>
-            <a:tailEnd type="triangle"/>
-          </a:ln>
-        </p:spPr>
-        <p:style>
-          <a:lnRef idx="1">
-            <a:schemeClr val="accent1"/>
-          </a:lnRef>
-          <a:fillRef idx="0">
-            <a:schemeClr val="accent1"/>
-          </a:fillRef>
-          <a:effectRef idx="0">
-            <a:schemeClr val="accent1"/>
-          </a:effectRef>
-          <a:fontRef idx="minor">
-            <a:schemeClr val="tx1"/>
-          </a:fontRef>
-        </p:style>
-      </p:cxnSp>
-      <p:cxnSp>
-        <p:nvCxnSpPr>
-          <p:cNvPr id="13" name="Connecteur droit avec flèche 12">
-            <a:extLst>
-              <a:ext uri="{FF2B5EF4-FFF2-40B4-BE49-F238E27FC236}">
-                <a16:creationId xmlns:a16="http://schemas.microsoft.com/office/drawing/2014/main" id="{7E408328-4911-4F20-8E4B-F8E1327FFD77}"/>
-              </a:ext>
-            </a:extLst>
-          </p:cNvPr>
-          <p:cNvCxnSpPr>
-            <a:cxnSpLocks/>
-          </p:cNvCxnSpPr>
-          <p:nvPr/>
-        </p:nvCxnSpPr>
-        <p:spPr>
-          <a:xfrm>
-            <a:off x="5942163" y="3077199"/>
-            <a:ext cx="0" cy="1320137"/>
-          </a:xfrm>
-          <a:prstGeom prst="straightConnector1">
-            <a:avLst/>
-          </a:prstGeom>
-          <a:ln>
-            <a:solidFill>
-              <a:schemeClr val="bg1">
-                <a:lumMod val="75000"/>
-              </a:schemeClr>
-            </a:solidFill>
-            <a:tailEnd type="triangle"/>
-          </a:ln>
-        </p:spPr>
-        <p:style>
-          <a:lnRef idx="1">
-            <a:schemeClr val="accent1"/>
-          </a:lnRef>
-          <a:fillRef idx="0">
-            <a:schemeClr val="accent1"/>
-          </a:fillRef>
-          <a:effectRef idx="0">
-            <a:schemeClr val="accent1"/>
-          </a:effectRef>
-          <a:fontRef idx="minor">
-            <a:schemeClr val="tx1"/>
-          </a:fontRef>
-        </p:style>
-      </p:cxnSp>
-      <p:cxnSp>
-        <p:nvCxnSpPr>
-          <p:cNvPr id="14" name="Connecteur droit avec flèche 13">
-            <a:extLst>
-              <a:ext uri="{FF2B5EF4-FFF2-40B4-BE49-F238E27FC236}">
-                <a16:creationId xmlns:a16="http://schemas.microsoft.com/office/drawing/2014/main" id="{11B5980B-52AA-4D5C-9069-617EF03BC8A2}"/>
-              </a:ext>
-            </a:extLst>
-          </p:cNvPr>
-          <p:cNvCxnSpPr>
-            <a:cxnSpLocks/>
-          </p:cNvCxnSpPr>
-          <p:nvPr/>
-        </p:nvCxnSpPr>
-        <p:spPr>
-          <a:xfrm>
-            <a:off x="5950753" y="4626966"/>
-            <a:ext cx="0" cy="212295"/>
-          </a:xfrm>
-          <a:prstGeom prst="straightConnector1">
-            <a:avLst/>
-          </a:prstGeom>
-          <a:ln>
-            <a:solidFill>
-              <a:schemeClr val="bg1">
-                <a:lumMod val="75000"/>
-              </a:schemeClr>
-            </a:solidFill>
-            <a:tailEnd type="triangle"/>
-          </a:ln>
-        </p:spPr>
-        <p:style>
-          <a:lnRef idx="1">
-            <a:schemeClr val="accent1"/>
-          </a:lnRef>
-          <a:fillRef idx="0">
-            <a:schemeClr val="accent1"/>
-          </a:fillRef>
-          <a:effectRef idx="0">
-            <a:schemeClr val="accent1"/>
-          </a:effectRef>
-          <a:fontRef idx="minor">
-            <a:schemeClr val="tx1"/>
-          </a:fontRef>
-        </p:style>
-      </p:cxnSp>
-      <p:cxnSp>
-        <p:nvCxnSpPr>
-          <p:cNvPr id="15" name="Connecteur droit avec flèche 14">
-            <a:extLst>
-              <a:ext uri="{FF2B5EF4-FFF2-40B4-BE49-F238E27FC236}">
-                <a16:creationId xmlns:a16="http://schemas.microsoft.com/office/drawing/2014/main" id="{EDD2184E-B4F2-4DEA-A0C5-24AF3BDFC3C3}"/>
-              </a:ext>
-            </a:extLst>
-          </p:cNvPr>
-          <p:cNvCxnSpPr>
-            <a:cxnSpLocks/>
-          </p:cNvCxnSpPr>
-          <p:nvPr/>
-        </p:nvCxnSpPr>
-        <p:spPr>
-          <a:xfrm>
-            <a:off x="5950754" y="4811526"/>
-            <a:ext cx="0" cy="224719"/>
-          </a:xfrm>
-          <a:prstGeom prst="straightConnector1">
-            <a:avLst/>
-          </a:prstGeom>
-          <a:ln>
-            <a:solidFill>
-              <a:schemeClr val="bg1">
-                <a:lumMod val="75000"/>
-              </a:schemeClr>
-            </a:solidFill>
-            <a:tailEnd type="triangle"/>
-          </a:ln>
-        </p:spPr>
-        <p:style>
-          <a:lnRef idx="1">
-            <a:schemeClr val="accent1"/>
-          </a:lnRef>
-          <a:fillRef idx="0">
-            <a:schemeClr val="accent1"/>
-          </a:fillRef>
-          <a:effectRef idx="0">
-            <a:schemeClr val="accent1"/>
-          </a:effectRef>
-          <a:fontRef idx="minor">
-            <a:schemeClr val="tx1"/>
-          </a:fontRef>
-        </p:style>
-      </p:cxnSp>
-      <p:cxnSp>
-        <p:nvCxnSpPr>
-          <p:cNvPr id="16" name="Connecteur droit avec flèche 15">
-            <a:extLst>
-              <a:ext uri="{FF2B5EF4-FFF2-40B4-BE49-F238E27FC236}">
-                <a16:creationId xmlns:a16="http://schemas.microsoft.com/office/drawing/2014/main" id="{0DE69C60-5268-495B-A368-4F710184B615}"/>
-              </a:ext>
-            </a:extLst>
-          </p:cNvPr>
-          <p:cNvCxnSpPr>
-            <a:cxnSpLocks/>
-          </p:cNvCxnSpPr>
-          <p:nvPr/>
-        </p:nvCxnSpPr>
-        <p:spPr>
-          <a:xfrm>
-            <a:off x="5950754" y="4992265"/>
-            <a:ext cx="0" cy="200679"/>
-          </a:xfrm>
-          <a:prstGeom prst="straightConnector1">
-            <a:avLst/>
-          </a:prstGeom>
-          <a:ln>
-            <a:solidFill>
-              <a:schemeClr val="bg1">
-                <a:lumMod val="75000"/>
-              </a:schemeClr>
-            </a:solidFill>
-            <a:tailEnd type="triangle"/>
-          </a:ln>
-        </p:spPr>
-        <p:style>
-          <a:lnRef idx="1">
-            <a:schemeClr val="accent1"/>
-          </a:lnRef>
-          <a:fillRef idx="0">
-            <a:schemeClr val="accent1"/>
-          </a:fillRef>
-          <a:effectRef idx="0">
-            <a:schemeClr val="accent1"/>
-          </a:effectRef>
-          <a:fontRef idx="minor">
-            <a:schemeClr val="tx1"/>
-          </a:fontRef>
-        </p:style>
-      </p:cxnSp>
-      <p:pic>
-        <p:nvPicPr>
-          <p:cNvPr id="17" name="Image 16">
-            <a:extLst>
-              <a:ext uri="{FF2B5EF4-FFF2-40B4-BE49-F238E27FC236}">
-                <a16:creationId xmlns:a16="http://schemas.microsoft.com/office/drawing/2014/main" id="{DA6E274B-3D6C-46A6-8031-5789C70501D7}"/>
-              </a:ext>
-            </a:extLst>
-          </p:cNvPr>
-          <p:cNvPicPr>
-            <a:picLocks noChangeAspect="1"/>
-          </p:cNvPicPr>
-          <p:nvPr/>
-        </p:nvPicPr>
-        <p:blipFill>
-          <a:blip r:embed="rId4">
-            <a:clrChange>
-              <a:clrFrom>
-                <a:srgbClr val="FFFFFF"/>
-              </a:clrFrom>
-              <a:clrTo>
-                <a:srgbClr val="FFFFFF">
-                  <a:alpha val="0"/>
-                </a:srgbClr>
-              </a:clrTo>
-            </a:clrChange>
-            <a:extLst>
-              <a:ext uri="{28A0092B-C50C-407E-A947-70E740481C1C}">
-                <a14:useLocalDpi xmlns:a14="http://schemas.microsoft.com/office/drawing/2010/main" val="0"/>
-              </a:ext>
-            </a:extLst>
-          </a:blip>
-          <a:stretch>
-            <a:fillRect/>
-          </a:stretch>
-        </p:blipFill>
-        <p:spPr>
-          <a:xfrm>
-            <a:off x="3627863" y="2191820"/>
-            <a:ext cx="1647326" cy="374187"/>
-          </a:xfrm>
-          <a:prstGeom prst="rect">
-            <a:avLst/>
-          </a:prstGeom>
-        </p:spPr>
-      </p:pic>
-      <p:pic>
-        <p:nvPicPr>
-          <p:cNvPr id="18" name="Image 17">
-            <a:extLst>
-              <a:ext uri="{FF2B5EF4-FFF2-40B4-BE49-F238E27FC236}">
-                <a16:creationId xmlns:a16="http://schemas.microsoft.com/office/drawing/2014/main" id="{E25CEFC0-11E9-490C-AA4C-56AAA5475887}"/>
-              </a:ext>
-            </a:extLst>
-          </p:cNvPr>
-          <p:cNvPicPr>
-            <a:picLocks noChangeAspect="1"/>
-          </p:cNvPicPr>
-          <p:nvPr/>
-        </p:nvPicPr>
-        <p:blipFill rotWithShape="1">
-          <a:blip r:embed="rId3">
-            <a:clrChange>
-              <a:clrFrom>
-                <a:srgbClr val="FFFFFF"/>
-              </a:clrFrom>
-              <a:clrTo>
-                <a:srgbClr val="FFFFFF">
-                  <a:alpha val="0"/>
-                </a:srgbClr>
-              </a:clrTo>
-            </a:clrChange>
-            <a:extLst>
-              <a:ext uri="{28A0092B-C50C-407E-A947-70E740481C1C}">
-                <a14:useLocalDpi xmlns:a14="http://schemas.microsoft.com/office/drawing/2010/main" val="0"/>
-              </a:ext>
-            </a:extLst>
-          </a:blip>
-          <a:srcRect l="49515" t="58816" r="9961" b="16490"/>
-          <a:stretch/>
-        </p:blipFill>
-        <p:spPr>
-          <a:xfrm>
-            <a:off x="3800331" y="4627168"/>
-            <a:ext cx="1742529" cy="562772"/>
-          </a:xfrm>
-          <a:prstGeom prst="rect">
-            <a:avLst/>
-          </a:prstGeom>
-        </p:spPr>
-      </p:pic>
-      <p:cxnSp>
-        <p:nvCxnSpPr>
-          <p:cNvPr id="19" name="Connecteur droit 18">
-            <a:extLst>
-              <a:ext uri="{FF2B5EF4-FFF2-40B4-BE49-F238E27FC236}">
-                <a16:creationId xmlns:a16="http://schemas.microsoft.com/office/drawing/2014/main" id="{28793B0B-4C51-4F92-B7D1-9075027E01EF}"/>
-              </a:ext>
-            </a:extLst>
-          </p:cNvPr>
-          <p:cNvCxnSpPr>
-            <a:cxnSpLocks/>
-          </p:cNvCxnSpPr>
-          <p:nvPr/>
-        </p:nvCxnSpPr>
-        <p:spPr>
-          <a:xfrm>
-            <a:off x="3808697" y="4575436"/>
-            <a:ext cx="1759790" cy="0"/>
-          </a:xfrm>
-          <a:prstGeom prst="line">
-            <a:avLst/>
-          </a:prstGeom>
-          <a:ln w="38100">
-            <a:solidFill>
-              <a:schemeClr val="tx1">
-                <a:lumMod val="95000"/>
-                <a:lumOff val="5000"/>
-              </a:schemeClr>
-            </a:solidFill>
-          </a:ln>
-        </p:spPr>
-        <p:style>
-          <a:lnRef idx="1">
-            <a:schemeClr val="accent1"/>
-          </a:lnRef>
-          <a:fillRef idx="0">
-            <a:schemeClr val="accent1"/>
-          </a:fillRef>
-          <a:effectRef idx="0">
-            <a:schemeClr val="accent1"/>
-          </a:effectRef>
-          <a:fontRef idx="minor">
-            <a:schemeClr val="tx1"/>
-          </a:fontRef>
-        </p:style>
-      </p:cxnSp>
-      <p:sp>
-        <p:nvSpPr>
-          <p:cNvPr id="20" name="ZoneTexte 19">
-            <a:extLst>
-              <a:ext uri="{FF2B5EF4-FFF2-40B4-BE49-F238E27FC236}">
-                <a16:creationId xmlns:a16="http://schemas.microsoft.com/office/drawing/2014/main" id="{35CF1E70-E9B2-4DDC-BDEB-2D49920D7934}"/>
-              </a:ext>
-            </a:extLst>
-          </p:cNvPr>
-          <p:cNvSpPr txBox="1"/>
-          <p:nvPr/>
-        </p:nvSpPr>
-        <p:spPr>
-          <a:xfrm>
-            <a:off x="3575784" y="4333897"/>
-            <a:ext cx="1807031" cy="246221"/>
-          </a:xfrm>
-          <a:prstGeom prst="rect">
-            <a:avLst/>
-          </a:prstGeom>
-          <a:noFill/>
-        </p:spPr>
-        <p:txBody>
-          <a:bodyPr wrap="square" rtlCol="0">
-            <a:spAutoFit/>
-          </a:bodyPr>
-          <a:lstStyle/>
-          <a:p>
-            <a:r>
-              <a:rPr lang="en-GB" sz="1000" i="1" dirty="0">
-                <a:latin typeface="Arial" panose="020B0604020202020204" pitchFamily="34" charset="0"/>
-                <a:cs typeface="Arial" panose="020B0604020202020204" pitchFamily="34" charset="0"/>
-              </a:rPr>
-              <a:t>Mouse Reference Genome</a:t>
-            </a:r>
-          </a:p>
-        </p:txBody>
-      </p:sp>
-      <p:grpSp>
-        <p:nvGrpSpPr>
-          <p:cNvPr id="21" name="Groupe 20">
-            <a:extLst>
-              <a:ext uri="{FF2B5EF4-FFF2-40B4-BE49-F238E27FC236}">
-                <a16:creationId xmlns:a16="http://schemas.microsoft.com/office/drawing/2014/main" id="{8A09D41D-475E-4266-93E2-A6DE47863681}"/>
-              </a:ext>
-            </a:extLst>
-          </p:cNvPr>
-          <p:cNvGrpSpPr/>
-          <p:nvPr/>
-        </p:nvGrpSpPr>
-        <p:grpSpPr>
-          <a:xfrm>
-            <a:off x="3184278" y="1883996"/>
-            <a:ext cx="857331" cy="1236200"/>
-            <a:chOff x="3774110" y="2101313"/>
-            <a:chExt cx="820087" cy="1577402"/>
-          </a:xfrm>
-        </p:grpSpPr>
-        <p:pic>
-          <p:nvPicPr>
-            <p:cNvPr id="22" name="Image 21">
-              <a:extLst>
-                <a:ext uri="{FF2B5EF4-FFF2-40B4-BE49-F238E27FC236}">
-                  <a16:creationId xmlns:a16="http://schemas.microsoft.com/office/drawing/2014/main" id="{2F858A58-DC57-402B-85F2-E45BA37DBF79}"/>
-                </a:ext>
-              </a:extLst>
-            </p:cNvPr>
-            <p:cNvPicPr>
-              <a:picLocks noChangeAspect="1"/>
-            </p:cNvPicPr>
-            <p:nvPr/>
-          </p:nvPicPr>
-          <p:blipFill rotWithShape="1">
-            <a:blip r:embed="rId5">
-              <a:clrChange>
-                <a:clrFrom>
-                  <a:srgbClr val="FFFFFF"/>
-                </a:clrFrom>
-                <a:clrTo>
-                  <a:srgbClr val="FFFFFF">
-                    <a:alpha val="0"/>
-                  </a:srgbClr>
-                </a:clrTo>
-              </a:clrChange>
-              <a:extLst>
-                <a:ext uri="{28A0092B-C50C-407E-A947-70E740481C1C}">
-                  <a14:useLocalDpi xmlns:a14="http://schemas.microsoft.com/office/drawing/2010/main" val="0"/>
-                </a:ext>
-              </a:extLst>
-            </a:blip>
-            <a:srcRect l="44328" t="6684" r="28518" b="20976"/>
-            <a:stretch/>
-          </p:blipFill>
-          <p:spPr>
-            <a:xfrm>
-              <a:off x="3774110" y="2242807"/>
-              <a:ext cx="671858" cy="1200082"/>
-            </a:xfrm>
-            <a:prstGeom prst="rect">
-              <a:avLst/>
-            </a:prstGeom>
-          </p:spPr>
-        </p:pic>
-        <p:sp>
-          <p:nvSpPr>
-            <p:cNvPr id="23" name="ZoneTexte 22">
-              <a:extLst>
-                <a:ext uri="{FF2B5EF4-FFF2-40B4-BE49-F238E27FC236}">
-                  <a16:creationId xmlns:a16="http://schemas.microsoft.com/office/drawing/2014/main" id="{A6545FC5-25CB-4EF5-9D82-EAAEF5BFC422}"/>
-                </a:ext>
-              </a:extLst>
-            </p:cNvPr>
-            <p:cNvSpPr txBox="1"/>
-            <p:nvPr/>
-          </p:nvSpPr>
-          <p:spPr>
-            <a:xfrm>
-              <a:off x="4022088" y="3417076"/>
-              <a:ext cx="409255" cy="261639"/>
-            </a:xfrm>
-            <a:prstGeom prst="rect">
-              <a:avLst/>
-            </a:prstGeom>
-            <a:noFill/>
-          </p:spPr>
-          <p:txBody>
-            <a:bodyPr wrap="square" rtlCol="0">
-              <a:spAutoFit/>
-            </a:bodyPr>
-            <a:lstStyle/>
-            <a:p>
-              <a:r>
-                <a:rPr lang="en-GB" sz="1000" dirty="0">
-                  <a:latin typeface="Arial" panose="020B0604020202020204" pitchFamily="34" charset="0"/>
-                  <a:cs typeface="Arial" panose="020B0604020202020204" pitchFamily="34" charset="0"/>
-                </a:rPr>
-                <a:t>3’</a:t>
-              </a:r>
-            </a:p>
-          </p:txBody>
-        </p:sp>
-        <p:sp>
-          <p:nvSpPr>
-            <p:cNvPr id="24" name="ZoneTexte 23">
-              <a:extLst>
-                <a:ext uri="{FF2B5EF4-FFF2-40B4-BE49-F238E27FC236}">
-                  <a16:creationId xmlns:a16="http://schemas.microsoft.com/office/drawing/2014/main" id="{69A9C70F-7F28-439F-9D91-00DBE563284E}"/>
-                </a:ext>
-              </a:extLst>
-            </p:cNvPr>
-            <p:cNvSpPr txBox="1"/>
-            <p:nvPr/>
-          </p:nvSpPr>
-          <p:spPr>
-            <a:xfrm>
-              <a:off x="4184942" y="2101313"/>
-              <a:ext cx="409255" cy="261639"/>
-            </a:xfrm>
-            <a:prstGeom prst="rect">
-              <a:avLst/>
-            </a:prstGeom>
-            <a:noFill/>
-          </p:spPr>
-          <p:txBody>
-            <a:bodyPr wrap="square" rtlCol="0">
-              <a:spAutoFit/>
-            </a:bodyPr>
-            <a:lstStyle/>
-            <a:p>
-              <a:r>
-                <a:rPr lang="en-GB" sz="1000" dirty="0">
-                  <a:latin typeface="Arial" panose="020B0604020202020204" pitchFamily="34" charset="0"/>
-                  <a:cs typeface="Arial" panose="020B0604020202020204" pitchFamily="34" charset="0"/>
-                </a:rPr>
-                <a:t>5</a:t>
-              </a:r>
-              <a:r>
-                <a:rPr lang="en-GB" sz="1000" dirty="0"/>
-                <a:t>’</a:t>
-              </a:r>
-            </a:p>
-          </p:txBody>
-        </p:sp>
-      </p:grpSp>
-      <p:cxnSp>
-        <p:nvCxnSpPr>
-          <p:cNvPr id="25" name="Connecteur droit 24">
-            <a:extLst>
-              <a:ext uri="{FF2B5EF4-FFF2-40B4-BE49-F238E27FC236}">
-                <a16:creationId xmlns:a16="http://schemas.microsoft.com/office/drawing/2014/main" id="{60FFDFBB-0AE9-4AAC-8F79-46953F885D25}"/>
-              </a:ext>
-            </a:extLst>
-          </p:cNvPr>
-          <p:cNvCxnSpPr>
-            <a:cxnSpLocks/>
-            <a:stCxn id="30" idx="0"/>
-            <a:endCxn id="27" idx="2"/>
-          </p:cNvCxnSpPr>
-          <p:nvPr/>
-        </p:nvCxnSpPr>
-        <p:spPr>
-          <a:xfrm flipV="1">
-            <a:off x="2560099" y="2487843"/>
-            <a:ext cx="537925" cy="1770989"/>
-          </a:xfrm>
-          <a:prstGeom prst="line">
-            <a:avLst/>
-          </a:prstGeom>
-          <a:ln>
-            <a:solidFill>
-              <a:schemeClr val="bg1">
-                <a:lumMod val="65000"/>
-              </a:schemeClr>
-            </a:solidFill>
-            <a:prstDash val="lgDash"/>
-          </a:ln>
-        </p:spPr>
-        <p:style>
-          <a:lnRef idx="1">
-            <a:schemeClr val="dk1"/>
-          </a:lnRef>
-          <a:fillRef idx="0">
-            <a:schemeClr val="dk1"/>
-          </a:fillRef>
-          <a:effectRef idx="0">
-            <a:schemeClr val="dk1"/>
-          </a:effectRef>
-          <a:fontRef idx="minor">
-            <a:schemeClr val="tx1"/>
-          </a:fontRef>
-        </p:style>
-      </p:cxnSp>
-      <p:cxnSp>
-        <p:nvCxnSpPr>
-          <p:cNvPr id="26" name="Connecteur droit 25">
-            <a:extLst>
-              <a:ext uri="{FF2B5EF4-FFF2-40B4-BE49-F238E27FC236}">
-                <a16:creationId xmlns:a16="http://schemas.microsoft.com/office/drawing/2014/main" id="{E53E82D3-50ED-4C61-835E-EC318E4F60A7}"/>
-              </a:ext>
-            </a:extLst>
-          </p:cNvPr>
-          <p:cNvCxnSpPr>
-            <a:cxnSpLocks/>
-            <a:stCxn id="30" idx="3"/>
-            <a:endCxn id="27" idx="5"/>
-          </p:cNvCxnSpPr>
-          <p:nvPr/>
-        </p:nvCxnSpPr>
-        <p:spPr>
-          <a:xfrm flipV="1">
-            <a:off x="2902924" y="2963627"/>
-            <a:ext cx="971048" cy="1515649"/>
-          </a:xfrm>
-          <a:prstGeom prst="line">
-            <a:avLst/>
-          </a:prstGeom>
-          <a:ln>
-            <a:solidFill>
-              <a:schemeClr val="bg1">
-                <a:lumMod val="65000"/>
-              </a:schemeClr>
-            </a:solidFill>
-            <a:prstDash val="lgDash"/>
-          </a:ln>
-        </p:spPr>
-        <p:style>
-          <a:lnRef idx="1">
-            <a:schemeClr val="dk1"/>
-          </a:lnRef>
-          <a:fillRef idx="0">
-            <a:schemeClr val="dk1"/>
-          </a:fillRef>
-          <a:effectRef idx="0">
-            <a:schemeClr val="dk1"/>
-          </a:effectRef>
-          <a:fontRef idx="minor">
-            <a:schemeClr val="tx1"/>
-          </a:fontRef>
-        </p:style>
-      </p:cxnSp>
-      <p:sp>
-        <p:nvSpPr>
           <p:cNvPr id="27" name="Ellipse 26">
             <a:extLst>
               <a:ext uri="{FF2B5EF4-FFF2-40B4-BE49-F238E27FC236}">
@@ -6997,373 +6045,1346 @@
           </a:p>
         </p:txBody>
       </p:sp>
-      <p:sp>
-        <p:nvSpPr>
-          <p:cNvPr id="28" name="ZoneTexte 27">
-            <a:extLst>
-              <a:ext uri="{FF2B5EF4-FFF2-40B4-BE49-F238E27FC236}">
-                <a16:creationId xmlns:a16="http://schemas.microsoft.com/office/drawing/2014/main" id="{20708EE0-E851-4341-B841-562AC0E07588}"/>
-              </a:ext>
-            </a:extLst>
-          </p:cNvPr>
-          <p:cNvSpPr txBox="1"/>
+      <p:grpSp>
+        <p:nvGrpSpPr>
+          <p:cNvPr id="36" name="Group 35">
+            <a:extLst>
+              <a:ext uri="{FF2B5EF4-FFF2-40B4-BE49-F238E27FC236}">
+                <a16:creationId xmlns:a16="http://schemas.microsoft.com/office/drawing/2014/main" id="{88C867D8-A31E-0274-0CB4-49A87268438D}"/>
+              </a:ext>
+            </a:extLst>
+          </p:cNvPr>
+          <p:cNvGrpSpPr/>
           <p:nvPr/>
-        </p:nvSpPr>
-        <p:spPr>
+        </p:nvGrpSpPr>
+        <p:grpSpPr>
           <a:xfrm>
-            <a:off x="3575785" y="3609277"/>
-            <a:ext cx="983411" cy="246221"/>
+            <a:off x="792719" y="1843082"/>
+            <a:ext cx="6084466" cy="4014280"/>
+            <a:chOff x="792719" y="1843082"/>
+            <a:chExt cx="6084466" cy="4014280"/>
           </a:xfrm>
-          <a:prstGeom prst="rect">
-            <a:avLst/>
-          </a:prstGeom>
-          <a:noFill/>
-        </p:spPr>
-        <p:txBody>
-          <a:bodyPr wrap="square" rtlCol="0">
-            <a:spAutoFit/>
-          </a:bodyPr>
-          <a:lstStyle/>
-          <a:p>
-            <a:r>
-              <a:rPr lang="en-GB" sz="1000" dirty="0">
+        </p:grpSpPr>
+        <p:sp>
+          <p:nvSpPr>
+            <p:cNvPr id="5" name="ZoneTexte 4">
+              <a:extLst>
+                <a:ext uri="{FF2B5EF4-FFF2-40B4-BE49-F238E27FC236}">
+                  <a16:creationId xmlns:a16="http://schemas.microsoft.com/office/drawing/2014/main" id="{8E3A4C2A-D5AE-491D-BA47-A9AA6ED25459}"/>
+                </a:ext>
+              </a:extLst>
+            </p:cNvPr>
+            <p:cNvSpPr txBox="1"/>
+            <p:nvPr/>
+          </p:nvSpPr>
+          <p:spPr>
+            <a:xfrm>
+              <a:off x="5530963" y="4409533"/>
+              <a:ext cx="979139" cy="276999"/>
+            </a:xfrm>
+            <a:prstGeom prst="rect">
+              <a:avLst/>
+            </a:prstGeom>
+            <a:noFill/>
+          </p:spPr>
+          <p:txBody>
+            <a:bodyPr wrap="square" rtlCol="0">
+              <a:spAutoFit/>
+            </a:bodyPr>
+            <a:lstStyle/>
+            <a:p>
+              <a:pPr algn="ctr"/>
+              <a:r>
+                <a:rPr lang="en-GB" sz="1200" b="1" dirty="0">
+                  <a:latin typeface="Arial" panose="020B0604020202020204" pitchFamily="34" charset="0"/>
+                  <a:cs typeface="Arial" panose="020B0604020202020204" pitchFamily="34" charset="0"/>
+                </a:rPr>
+                <a:t>Alignment</a:t>
+              </a:r>
+              <a:endParaRPr lang="en-GB" sz="1400" b="1" dirty="0">
                 <a:latin typeface="Arial" panose="020B0604020202020204" pitchFamily="34" charset="0"/>
                 <a:cs typeface="Arial" panose="020B0604020202020204" pitchFamily="34" charset="0"/>
-              </a:rPr>
-              <a:t>Reads</a:t>
-            </a:r>
-          </a:p>
-        </p:txBody>
-      </p:sp>
-      <p:pic>
-        <p:nvPicPr>
-          <p:cNvPr id="29" name="Image 28">
-            <a:extLst>
-              <a:ext uri="{FF2B5EF4-FFF2-40B4-BE49-F238E27FC236}">
-                <a16:creationId xmlns:a16="http://schemas.microsoft.com/office/drawing/2014/main" id="{6D75847F-7FC8-4B6F-BB37-DF92408D7D2D}"/>
-              </a:ext>
-            </a:extLst>
-          </p:cNvPr>
-          <p:cNvPicPr>
-            <a:picLocks noChangeAspect="1"/>
-          </p:cNvPicPr>
-          <p:nvPr/>
-        </p:nvPicPr>
-        <p:blipFill rotWithShape="1">
-          <a:blip r:embed="rId6">
-            <a:clrChange>
-              <a:clrFrom>
-                <a:srgbClr val="FFFFFF"/>
-              </a:clrFrom>
-              <a:clrTo>
-                <a:srgbClr val="FFFFFF">
-                  <a:alpha val="0"/>
-                </a:srgbClr>
-              </a:clrTo>
-            </a:clrChange>
-            <a:extLst>
-              <a:ext uri="{28A0092B-C50C-407E-A947-70E740481C1C}">
-                <a14:useLocalDpi xmlns:a14="http://schemas.microsoft.com/office/drawing/2010/main" val="0"/>
-              </a:ext>
-            </a:extLst>
-          </a:blip>
-          <a:srcRect l="1872" t="17210" r="55268" b="51678"/>
-          <a:stretch/>
-        </p:blipFill>
-        <p:spPr>
-          <a:xfrm>
-            <a:off x="1206055" y="4121733"/>
-            <a:ext cx="1224801" cy="616834"/>
-          </a:xfrm>
-          <a:prstGeom prst="rect">
-            <a:avLst/>
-          </a:prstGeom>
-        </p:spPr>
-      </p:pic>
-      <p:pic>
-        <p:nvPicPr>
-          <p:cNvPr id="30" name="Image 29">
-            <a:extLst>
-              <a:ext uri="{FF2B5EF4-FFF2-40B4-BE49-F238E27FC236}">
-                <a16:creationId xmlns:a16="http://schemas.microsoft.com/office/drawing/2014/main" id="{5EF988C7-A5FE-49F0-A233-1505F1F6EBC4}"/>
-              </a:ext>
-            </a:extLst>
-          </p:cNvPr>
-          <p:cNvPicPr>
-            <a:picLocks noChangeAspect="1"/>
-          </p:cNvPicPr>
-          <p:nvPr/>
-        </p:nvPicPr>
-        <p:blipFill rotWithShape="1">
-          <a:blip r:embed="rId6">
-            <a:extLst>
-              <a:ext uri="{28A0092B-C50C-407E-A947-70E740481C1C}">
-                <a14:useLocalDpi xmlns:a14="http://schemas.microsoft.com/office/drawing/2010/main" val="0"/>
-              </a:ext>
-            </a:extLst>
-          </a:blip>
-          <a:srcRect l="54311" t="59983" r="20541" b="16710"/>
-          <a:stretch/>
-        </p:blipFill>
-        <p:spPr>
-          <a:xfrm>
-            <a:off x="2217274" y="4258832"/>
-            <a:ext cx="685650" cy="440888"/>
-          </a:xfrm>
-          <a:prstGeom prst="rect">
-            <a:avLst/>
-          </a:prstGeom>
-        </p:spPr>
-      </p:pic>
-      <p:sp>
-        <p:nvSpPr>
-          <p:cNvPr id="31" name="ZoneTexte 30">
-            <a:extLst>
-              <a:ext uri="{FF2B5EF4-FFF2-40B4-BE49-F238E27FC236}">
-                <a16:creationId xmlns:a16="http://schemas.microsoft.com/office/drawing/2014/main" id="{6264C65A-8CDD-47A9-A547-F60D78D46E3F}"/>
-              </a:ext>
-            </a:extLst>
-          </p:cNvPr>
-          <p:cNvSpPr txBox="1"/>
-          <p:nvPr/>
-        </p:nvSpPr>
-        <p:spPr>
-          <a:xfrm>
-            <a:off x="809445" y="4847016"/>
-            <a:ext cx="2537382" cy="276999"/>
-          </a:xfrm>
-          <a:prstGeom prst="rect">
-            <a:avLst/>
-          </a:prstGeom>
-          <a:noFill/>
-        </p:spPr>
-        <p:txBody>
-          <a:bodyPr wrap="square" rtlCol="0">
-            <a:spAutoFit/>
-          </a:bodyPr>
-          <a:lstStyle/>
-          <a:p>
-            <a:r>
-              <a:rPr lang="en-GB" sz="1200" dirty="0">
-                <a:latin typeface="Arial" panose="020B0604020202020204" pitchFamily="34" charset="0"/>
-                <a:cs typeface="Arial" panose="020B0604020202020204" pitchFamily="34" charset="0"/>
-              </a:rPr>
-              <a:t>Nanopore RNA sequencing</a:t>
-            </a:r>
-          </a:p>
-        </p:txBody>
-      </p:sp>
-      <p:cxnSp>
-        <p:nvCxnSpPr>
-          <p:cNvPr id="32" name="Connecteur droit avec flèche 31">
-            <a:extLst>
-              <a:ext uri="{FF2B5EF4-FFF2-40B4-BE49-F238E27FC236}">
-                <a16:creationId xmlns:a16="http://schemas.microsoft.com/office/drawing/2014/main" id="{6C0C6CF2-83BD-4FF7-B735-B56B82795B67}"/>
-              </a:ext>
-            </a:extLst>
-          </p:cNvPr>
-          <p:cNvCxnSpPr/>
-          <p:nvPr/>
-        </p:nvCxnSpPr>
-        <p:spPr>
-          <a:xfrm>
-            <a:off x="1782486" y="3672203"/>
-            <a:ext cx="0" cy="381000"/>
-          </a:xfrm>
-          <a:prstGeom prst="straightConnector1">
-            <a:avLst/>
-          </a:prstGeom>
-          <a:ln>
-            <a:solidFill>
-              <a:schemeClr val="tx1"/>
-            </a:solidFill>
-            <a:tailEnd type="triangle"/>
-          </a:ln>
-        </p:spPr>
-        <p:style>
-          <a:lnRef idx="1">
-            <a:schemeClr val="accent1"/>
-          </a:lnRef>
-          <a:fillRef idx="0">
-            <a:schemeClr val="accent1"/>
-          </a:fillRef>
-          <a:effectRef idx="0">
-            <a:schemeClr val="accent1"/>
-          </a:effectRef>
-          <a:fontRef idx="minor">
-            <a:schemeClr val="tx1"/>
-          </a:fontRef>
-        </p:style>
-      </p:cxnSp>
-      <p:pic>
-        <p:nvPicPr>
-          <p:cNvPr id="33" name="Image 32">
-            <a:extLst>
-              <a:ext uri="{FF2B5EF4-FFF2-40B4-BE49-F238E27FC236}">
-                <a16:creationId xmlns:a16="http://schemas.microsoft.com/office/drawing/2014/main" id="{2CE83691-CA45-4A77-89C4-10E59BDBB630}"/>
-              </a:ext>
-            </a:extLst>
-          </p:cNvPr>
-          <p:cNvPicPr>
-            <a:picLocks noChangeAspect="1"/>
-          </p:cNvPicPr>
-          <p:nvPr/>
-        </p:nvPicPr>
-        <p:blipFill>
-          <a:blip r:embed="rId7">
-            <a:clrChange>
-              <a:clrFrom>
-                <a:srgbClr val="FFFFFF"/>
-              </a:clrFrom>
-              <a:clrTo>
-                <a:srgbClr val="FFFFFF">
-                  <a:alpha val="0"/>
-                </a:srgbClr>
-              </a:clrTo>
-            </a:clrChange>
-            <a:extLst>
-              <a:ext uri="{28A0092B-C50C-407E-A947-70E740481C1C}">
-                <a14:useLocalDpi xmlns:a14="http://schemas.microsoft.com/office/drawing/2010/main" val="0"/>
-              </a:ext>
-            </a:extLst>
-          </a:blip>
-          <a:stretch>
-            <a:fillRect/>
-          </a:stretch>
-        </p:blipFill>
-        <p:spPr>
-          <a:xfrm>
-            <a:off x="1568578" y="2983618"/>
-            <a:ext cx="481016" cy="337039"/>
-          </a:xfrm>
-          <a:prstGeom prst="rect">
-            <a:avLst/>
-          </a:prstGeom>
-        </p:spPr>
-      </p:pic>
-      <p:sp>
-        <p:nvSpPr>
-          <p:cNvPr id="34" name="ZoneTexte 33">
-            <a:extLst>
-              <a:ext uri="{FF2B5EF4-FFF2-40B4-BE49-F238E27FC236}">
-                <a16:creationId xmlns:a16="http://schemas.microsoft.com/office/drawing/2014/main" id="{BD17993C-1CD9-48F9-B61E-9A40C357AA97}"/>
-              </a:ext>
-            </a:extLst>
-          </p:cNvPr>
-          <p:cNvSpPr txBox="1"/>
-          <p:nvPr/>
-        </p:nvSpPr>
-        <p:spPr>
-          <a:xfrm>
-            <a:off x="1152268" y="3310702"/>
-            <a:ext cx="1237129" cy="276999"/>
-          </a:xfrm>
-          <a:prstGeom prst="rect">
-            <a:avLst/>
-          </a:prstGeom>
-          <a:noFill/>
-        </p:spPr>
-        <p:txBody>
-          <a:bodyPr wrap="square" rtlCol="0">
-            <a:spAutoFit/>
-          </a:bodyPr>
-          <a:lstStyle/>
-          <a:p>
-            <a:pPr algn="ctr"/>
-            <a:r>
-              <a:rPr lang="en-GB" sz="1200" dirty="0">
+              </a:endParaRPr>
+            </a:p>
+          </p:txBody>
+        </p:sp>
+        <p:sp>
+          <p:nvSpPr>
+            <p:cNvPr id="6" name="ZoneTexte 5">
+              <a:extLst>
+                <a:ext uri="{FF2B5EF4-FFF2-40B4-BE49-F238E27FC236}">
+                  <a16:creationId xmlns:a16="http://schemas.microsoft.com/office/drawing/2014/main" id="{12F16074-8783-459C-962D-29B32C377A5B}"/>
+                </a:ext>
+              </a:extLst>
+            </p:cNvPr>
+            <p:cNvSpPr txBox="1"/>
+            <p:nvPr/>
+          </p:nvSpPr>
+          <p:spPr>
+            <a:xfrm>
+              <a:off x="5454961" y="2758406"/>
+              <a:ext cx="1098374" cy="276999"/>
+            </a:xfrm>
+            <a:prstGeom prst="rect">
+              <a:avLst/>
+            </a:prstGeom>
+            <a:noFill/>
+          </p:spPr>
+          <p:txBody>
+            <a:bodyPr wrap="square" rtlCol="0">
+              <a:spAutoFit/>
+            </a:bodyPr>
+            <a:lstStyle/>
+            <a:p>
+              <a:r>
+                <a:rPr lang="en-GB" sz="1200" b="1" dirty="0">
+                  <a:latin typeface="Arial" panose="020B0604020202020204" pitchFamily="34" charset="0"/>
+                  <a:cs typeface="Arial" panose="020B0604020202020204" pitchFamily="34" charset="0"/>
+                </a:rPr>
+                <a:t>Base-calling</a:t>
+              </a:r>
+            </a:p>
+          </p:txBody>
+        </p:sp>
+        <p:pic>
+          <p:nvPicPr>
+            <p:cNvPr id="7" name="Image 6">
+              <a:extLst>
+                <a:ext uri="{FF2B5EF4-FFF2-40B4-BE49-F238E27FC236}">
+                  <a16:creationId xmlns:a16="http://schemas.microsoft.com/office/drawing/2014/main" id="{3215F999-1692-4BD0-A589-60EA65645381}"/>
+                </a:ext>
+              </a:extLst>
+            </p:cNvPr>
+            <p:cNvPicPr>
+              <a:picLocks noChangeAspect="1"/>
+            </p:cNvPicPr>
+            <p:nvPr/>
+          </p:nvPicPr>
+          <p:blipFill>
+            <a:blip r:embed="rId2">
+              <a:clrChange>
+                <a:clrFrom>
+                  <a:srgbClr val="FFFFFF"/>
+                </a:clrFrom>
+                <a:clrTo>
+                  <a:srgbClr val="FFFFFF">
+                    <a:alpha val="0"/>
+                  </a:srgbClr>
+                </a:clrTo>
+              </a:clrChange>
+              <a:extLst>
+                <a:ext uri="{28A0092B-C50C-407E-A947-70E740481C1C}">
+                  <a14:useLocalDpi xmlns:a14="http://schemas.microsoft.com/office/drawing/2010/main" val="0"/>
+                </a:ext>
+              </a:extLst>
+            </a:blip>
+            <a:stretch>
+              <a:fillRect/>
+            </a:stretch>
+          </p:blipFill>
+          <p:spPr>
+            <a:xfrm>
+              <a:off x="4043878" y="2745923"/>
+              <a:ext cx="1481478" cy="336515"/>
+            </a:xfrm>
+            <a:prstGeom prst="rect">
+              <a:avLst/>
+            </a:prstGeom>
+          </p:spPr>
+        </p:pic>
+        <p:sp>
+          <p:nvSpPr>
+            <p:cNvPr id="8" name="ZoneTexte 7">
+              <a:extLst>
+                <a:ext uri="{FF2B5EF4-FFF2-40B4-BE49-F238E27FC236}">
+                  <a16:creationId xmlns:a16="http://schemas.microsoft.com/office/drawing/2014/main" id="{5938F217-DD2A-456B-B81F-A362C7613D68}"/>
+                </a:ext>
+              </a:extLst>
+            </p:cNvPr>
+            <p:cNvSpPr txBox="1"/>
+            <p:nvPr/>
+          </p:nvSpPr>
+          <p:spPr>
+            <a:xfrm>
+              <a:off x="3834578" y="3063985"/>
+              <a:ext cx="1889184" cy="261610"/>
+            </a:xfrm>
+            <a:prstGeom prst="rect">
+              <a:avLst/>
+            </a:prstGeom>
+            <a:noFill/>
+          </p:spPr>
+          <p:txBody>
+            <a:bodyPr wrap="square" rtlCol="0">
+              <a:spAutoFit/>
+            </a:bodyPr>
+            <a:lstStyle/>
+            <a:p>
+              <a:r>
+                <a:rPr lang="en-GB" sz="1100" dirty="0">
+                  <a:solidFill>
+                    <a:schemeClr val="accent5">
+                      <a:lumMod val="75000"/>
+                    </a:schemeClr>
+                  </a:solidFill>
+                  <a:latin typeface="Arial" panose="020B0604020202020204" pitchFamily="34" charset="0"/>
+                  <a:cs typeface="Arial" panose="020B0604020202020204" pitchFamily="34" charset="0"/>
+                </a:rPr>
+                <a:t>CGTTGATTTGCTGGGGG</a:t>
+              </a:r>
+              <a:endParaRPr lang="en-GB" sz="1050" dirty="0">
                 <a:solidFill>
-                  <a:schemeClr val="bg2">
-                    <a:lumMod val="50000"/>
+                  <a:schemeClr val="accent5">
+                    <a:lumMod val="75000"/>
                   </a:schemeClr>
                 </a:solidFill>
                 <a:latin typeface="Arial" panose="020B0604020202020204" pitchFamily="34" charset="0"/>
                 <a:cs typeface="Arial" panose="020B0604020202020204" pitchFamily="34" charset="0"/>
-              </a:rPr>
-              <a:t>RNA (liver)</a:t>
-            </a:r>
-          </a:p>
-        </p:txBody>
-      </p:sp>
-      <p:pic>
-        <p:nvPicPr>
-          <p:cNvPr id="35" name="Image 34">
-            <a:extLst>
-              <a:ext uri="{FF2B5EF4-FFF2-40B4-BE49-F238E27FC236}">
-                <a16:creationId xmlns:a16="http://schemas.microsoft.com/office/drawing/2014/main" id="{5E10B348-6626-4E49-B481-63ECAD8E349B}"/>
-              </a:ext>
-            </a:extLst>
-          </p:cNvPr>
-          <p:cNvPicPr>
-            <a:picLocks noChangeAspect="1"/>
-          </p:cNvPicPr>
-          <p:nvPr/>
-        </p:nvPicPr>
-        <p:blipFill rotWithShape="1">
-          <a:blip r:embed="rId8">
-            <a:clrChange>
-              <a:clrFrom>
-                <a:srgbClr val="FFFFFF"/>
-              </a:clrFrom>
-              <a:clrTo>
-                <a:srgbClr val="FFFFFF">
-                  <a:alpha val="0"/>
-                </a:srgbClr>
-              </a:clrTo>
-            </a:clrChange>
-          </a:blip>
-          <a:srcRect r="31045" b="77985"/>
-          <a:stretch/>
-        </p:blipFill>
-        <p:spPr>
-          <a:xfrm>
-            <a:off x="792719" y="1843082"/>
-            <a:ext cx="1928824" cy="1032994"/>
-          </a:xfrm>
-          <a:prstGeom prst="rect">
-            <a:avLst/>
-          </a:prstGeom>
-        </p:spPr>
-      </p:pic>
-      <p:sp>
-        <p:nvSpPr>
-          <p:cNvPr id="50" name="ZoneTexte 49">
-            <a:extLst>
-              <a:ext uri="{FF2B5EF4-FFF2-40B4-BE49-F238E27FC236}">
-                <a16:creationId xmlns:a16="http://schemas.microsoft.com/office/drawing/2014/main" id="{33EA0C91-8B9E-4644-90B9-943BBF4F49E9}"/>
-              </a:ext>
-            </a:extLst>
-          </p:cNvPr>
-          <p:cNvSpPr txBox="1"/>
-          <p:nvPr/>
-        </p:nvSpPr>
-        <p:spPr>
-          <a:xfrm>
-            <a:off x="5148172" y="5395697"/>
-            <a:ext cx="1707317" cy="461665"/>
-          </a:xfrm>
-          <a:prstGeom prst="rect">
-            <a:avLst/>
-          </a:prstGeom>
-          <a:noFill/>
-        </p:spPr>
-        <p:txBody>
-          <a:bodyPr wrap="square" rtlCol="0">
-            <a:spAutoFit/>
-          </a:bodyPr>
-          <a:lstStyle/>
-          <a:p>
-            <a:pPr algn="ctr"/>
-            <a:r>
-              <a:rPr lang="en-GB" sz="1200" dirty="0">
+              </a:endParaRPr>
+            </a:p>
+          </p:txBody>
+        </p:sp>
+        <p:pic>
+          <p:nvPicPr>
+            <p:cNvPr id="9" name="Image 8">
+              <a:extLst>
+                <a:ext uri="{FF2B5EF4-FFF2-40B4-BE49-F238E27FC236}">
+                  <a16:creationId xmlns:a16="http://schemas.microsoft.com/office/drawing/2014/main" id="{3873F93B-8839-47B6-916D-F41FB6885E38}"/>
+                </a:ext>
+              </a:extLst>
+            </p:cNvPr>
+            <p:cNvPicPr>
+              <a:picLocks noChangeAspect="1"/>
+            </p:cNvPicPr>
+            <p:nvPr/>
+          </p:nvPicPr>
+          <p:blipFill rotWithShape="1">
+            <a:blip r:embed="rId3">
+              <a:clrChange>
+                <a:clrFrom>
+                  <a:srgbClr val="FFFFFF"/>
+                </a:clrFrom>
+                <a:clrTo>
+                  <a:srgbClr val="FFFFFF">
+                    <a:alpha val="0"/>
+                  </a:srgbClr>
+                </a:clrTo>
+              </a:clrChange>
+              <a:extLst>
+                <a:ext uri="{28A0092B-C50C-407E-A947-70E740481C1C}">
+                  <a14:useLocalDpi xmlns:a14="http://schemas.microsoft.com/office/drawing/2010/main" val="0"/>
+                </a:ext>
+              </a:extLst>
+            </a:blip>
+            <a:srcRect l="49515" t="58816" r="9961" b="16490"/>
+            <a:stretch/>
+          </p:blipFill>
+          <p:spPr>
+            <a:xfrm>
+              <a:off x="3628347" y="3618725"/>
+              <a:ext cx="1715854" cy="554156"/>
+            </a:xfrm>
+            <a:prstGeom prst="rect">
+              <a:avLst/>
+            </a:prstGeom>
+          </p:spPr>
+        </p:pic>
+        <p:sp>
+          <p:nvSpPr>
+            <p:cNvPr id="10" name="ZoneTexte 9">
+              <a:extLst>
+                <a:ext uri="{FF2B5EF4-FFF2-40B4-BE49-F238E27FC236}">
+                  <a16:creationId xmlns:a16="http://schemas.microsoft.com/office/drawing/2014/main" id="{C3B1006E-A883-4137-AECA-7DE1FC69E407}"/>
+                </a:ext>
+              </a:extLst>
+            </p:cNvPr>
+            <p:cNvSpPr txBox="1"/>
+            <p:nvPr/>
+          </p:nvSpPr>
+          <p:spPr>
+            <a:xfrm>
+              <a:off x="5025020" y="5168074"/>
+              <a:ext cx="1852165" cy="276999"/>
+            </a:xfrm>
+            <a:prstGeom prst="rect">
+              <a:avLst/>
+            </a:prstGeom>
+            <a:noFill/>
+          </p:spPr>
+          <p:txBody>
+            <a:bodyPr wrap="square" rtlCol="0">
+              <a:spAutoFit/>
+            </a:bodyPr>
+            <a:lstStyle/>
+            <a:p>
+              <a:pPr algn="ctr"/>
+              <a:r>
+                <a:rPr lang="en-GB" sz="1200" b="1" dirty="0">
+                  <a:latin typeface="Arial" panose="020B0604020202020204" pitchFamily="34" charset="0"/>
+                  <a:cs typeface="Arial" panose="020B0604020202020204" pitchFamily="34" charset="0"/>
+                </a:rPr>
+                <a:t>Downstream analyses</a:t>
+              </a:r>
+            </a:p>
+          </p:txBody>
+        </p:sp>
+        <p:sp>
+          <p:nvSpPr>
+            <p:cNvPr id="11" name="ZoneTexte 10">
+              <a:extLst>
+                <a:ext uri="{FF2B5EF4-FFF2-40B4-BE49-F238E27FC236}">
+                  <a16:creationId xmlns:a16="http://schemas.microsoft.com/office/drawing/2014/main" id="{015FE71E-2601-46DA-AE4D-E74A77E3E648}"/>
+                </a:ext>
+              </a:extLst>
+            </p:cNvPr>
+            <p:cNvSpPr txBox="1"/>
+            <p:nvPr/>
+          </p:nvSpPr>
+          <p:spPr>
+            <a:xfrm>
+              <a:off x="5507554" y="2097039"/>
+              <a:ext cx="1123418" cy="276999"/>
+            </a:xfrm>
+            <a:prstGeom prst="rect">
+              <a:avLst/>
+            </a:prstGeom>
+            <a:noFill/>
+          </p:spPr>
+          <p:txBody>
+            <a:bodyPr wrap="square" rtlCol="0">
+              <a:spAutoFit/>
+            </a:bodyPr>
+            <a:lstStyle/>
+            <a:p>
+              <a:r>
+                <a:rPr lang="en-GB" sz="1200" b="1" dirty="0">
+                  <a:latin typeface="Arial" panose="020B0604020202020204" pitchFamily="34" charset="0"/>
+                  <a:cs typeface="Arial" panose="020B0604020202020204" pitchFamily="34" charset="0"/>
+                </a:rPr>
+                <a:t>Sequencing</a:t>
+              </a:r>
+              <a:endParaRPr lang="en-GB" sz="1400" b="1" dirty="0">
                 <a:latin typeface="Arial" panose="020B0604020202020204" pitchFamily="34" charset="0"/>
                 <a:cs typeface="Arial" panose="020B0604020202020204" pitchFamily="34" charset="0"/>
-              </a:rPr>
-              <a:t>Bioinformatics analysis</a:t>
-            </a:r>
-          </a:p>
-        </p:txBody>
-      </p:sp>
+              </a:endParaRPr>
+            </a:p>
+          </p:txBody>
+        </p:sp>
+        <p:cxnSp>
+          <p:nvCxnSpPr>
+            <p:cNvPr id="12" name="Connecteur droit avec flèche 11">
+              <a:extLst>
+                <a:ext uri="{FF2B5EF4-FFF2-40B4-BE49-F238E27FC236}">
+                  <a16:creationId xmlns:a16="http://schemas.microsoft.com/office/drawing/2014/main" id="{1DEC4F06-BBD6-44F9-9E1A-A336DF9D9CD3}"/>
+                </a:ext>
+              </a:extLst>
+            </p:cNvPr>
+            <p:cNvCxnSpPr>
+              <a:cxnSpLocks/>
+            </p:cNvCxnSpPr>
+            <p:nvPr/>
+          </p:nvCxnSpPr>
+          <p:spPr>
+            <a:xfrm>
+              <a:off x="5959417" y="2339867"/>
+              <a:ext cx="0" cy="449730"/>
+            </a:xfrm>
+            <a:prstGeom prst="straightConnector1">
+              <a:avLst/>
+            </a:prstGeom>
+            <a:ln>
+              <a:solidFill>
+                <a:schemeClr val="bg1">
+                  <a:lumMod val="75000"/>
+                </a:schemeClr>
+              </a:solidFill>
+              <a:tailEnd type="triangle"/>
+            </a:ln>
+          </p:spPr>
+          <p:style>
+            <a:lnRef idx="1">
+              <a:schemeClr val="accent1"/>
+            </a:lnRef>
+            <a:fillRef idx="0">
+              <a:schemeClr val="accent1"/>
+            </a:fillRef>
+            <a:effectRef idx="0">
+              <a:schemeClr val="accent1"/>
+            </a:effectRef>
+            <a:fontRef idx="minor">
+              <a:schemeClr val="tx1"/>
+            </a:fontRef>
+          </p:style>
+        </p:cxnSp>
+        <p:cxnSp>
+          <p:nvCxnSpPr>
+            <p:cNvPr id="13" name="Connecteur droit avec flèche 12">
+              <a:extLst>
+                <a:ext uri="{FF2B5EF4-FFF2-40B4-BE49-F238E27FC236}">
+                  <a16:creationId xmlns:a16="http://schemas.microsoft.com/office/drawing/2014/main" id="{7E408328-4911-4F20-8E4B-F8E1327FFD77}"/>
+                </a:ext>
+              </a:extLst>
+            </p:cNvPr>
+            <p:cNvCxnSpPr>
+              <a:cxnSpLocks/>
+            </p:cNvCxnSpPr>
+            <p:nvPr/>
+          </p:nvCxnSpPr>
+          <p:spPr>
+            <a:xfrm>
+              <a:off x="5942163" y="3077199"/>
+              <a:ext cx="0" cy="1320137"/>
+            </a:xfrm>
+            <a:prstGeom prst="straightConnector1">
+              <a:avLst/>
+            </a:prstGeom>
+            <a:ln>
+              <a:solidFill>
+                <a:schemeClr val="bg1">
+                  <a:lumMod val="75000"/>
+                </a:schemeClr>
+              </a:solidFill>
+              <a:tailEnd type="triangle"/>
+            </a:ln>
+          </p:spPr>
+          <p:style>
+            <a:lnRef idx="1">
+              <a:schemeClr val="accent1"/>
+            </a:lnRef>
+            <a:fillRef idx="0">
+              <a:schemeClr val="accent1"/>
+            </a:fillRef>
+            <a:effectRef idx="0">
+              <a:schemeClr val="accent1"/>
+            </a:effectRef>
+            <a:fontRef idx="minor">
+              <a:schemeClr val="tx1"/>
+            </a:fontRef>
+          </p:style>
+        </p:cxnSp>
+        <p:cxnSp>
+          <p:nvCxnSpPr>
+            <p:cNvPr id="14" name="Connecteur droit avec flèche 13">
+              <a:extLst>
+                <a:ext uri="{FF2B5EF4-FFF2-40B4-BE49-F238E27FC236}">
+                  <a16:creationId xmlns:a16="http://schemas.microsoft.com/office/drawing/2014/main" id="{11B5980B-52AA-4D5C-9069-617EF03BC8A2}"/>
+                </a:ext>
+              </a:extLst>
+            </p:cNvPr>
+            <p:cNvCxnSpPr>
+              <a:cxnSpLocks/>
+            </p:cNvCxnSpPr>
+            <p:nvPr/>
+          </p:nvCxnSpPr>
+          <p:spPr>
+            <a:xfrm>
+              <a:off x="5950753" y="4626966"/>
+              <a:ext cx="0" cy="212295"/>
+            </a:xfrm>
+            <a:prstGeom prst="straightConnector1">
+              <a:avLst/>
+            </a:prstGeom>
+            <a:ln>
+              <a:solidFill>
+                <a:schemeClr val="bg1">
+                  <a:lumMod val="75000"/>
+                </a:schemeClr>
+              </a:solidFill>
+              <a:tailEnd type="triangle"/>
+            </a:ln>
+          </p:spPr>
+          <p:style>
+            <a:lnRef idx="1">
+              <a:schemeClr val="accent1"/>
+            </a:lnRef>
+            <a:fillRef idx="0">
+              <a:schemeClr val="accent1"/>
+            </a:fillRef>
+            <a:effectRef idx="0">
+              <a:schemeClr val="accent1"/>
+            </a:effectRef>
+            <a:fontRef idx="minor">
+              <a:schemeClr val="tx1"/>
+            </a:fontRef>
+          </p:style>
+        </p:cxnSp>
+        <p:cxnSp>
+          <p:nvCxnSpPr>
+            <p:cNvPr id="15" name="Connecteur droit avec flèche 14">
+              <a:extLst>
+                <a:ext uri="{FF2B5EF4-FFF2-40B4-BE49-F238E27FC236}">
+                  <a16:creationId xmlns:a16="http://schemas.microsoft.com/office/drawing/2014/main" id="{EDD2184E-B4F2-4DEA-A0C5-24AF3BDFC3C3}"/>
+                </a:ext>
+              </a:extLst>
+            </p:cNvPr>
+            <p:cNvCxnSpPr>
+              <a:cxnSpLocks/>
+            </p:cNvCxnSpPr>
+            <p:nvPr/>
+          </p:nvCxnSpPr>
+          <p:spPr>
+            <a:xfrm>
+              <a:off x="5950754" y="4811526"/>
+              <a:ext cx="0" cy="224719"/>
+            </a:xfrm>
+            <a:prstGeom prst="straightConnector1">
+              <a:avLst/>
+            </a:prstGeom>
+            <a:ln>
+              <a:solidFill>
+                <a:schemeClr val="bg1">
+                  <a:lumMod val="75000"/>
+                </a:schemeClr>
+              </a:solidFill>
+              <a:tailEnd type="triangle"/>
+            </a:ln>
+          </p:spPr>
+          <p:style>
+            <a:lnRef idx="1">
+              <a:schemeClr val="accent1"/>
+            </a:lnRef>
+            <a:fillRef idx="0">
+              <a:schemeClr val="accent1"/>
+            </a:fillRef>
+            <a:effectRef idx="0">
+              <a:schemeClr val="accent1"/>
+            </a:effectRef>
+            <a:fontRef idx="minor">
+              <a:schemeClr val="tx1"/>
+            </a:fontRef>
+          </p:style>
+        </p:cxnSp>
+        <p:cxnSp>
+          <p:nvCxnSpPr>
+            <p:cNvPr id="16" name="Connecteur droit avec flèche 15">
+              <a:extLst>
+                <a:ext uri="{FF2B5EF4-FFF2-40B4-BE49-F238E27FC236}">
+                  <a16:creationId xmlns:a16="http://schemas.microsoft.com/office/drawing/2014/main" id="{0DE69C60-5268-495B-A368-4F710184B615}"/>
+                </a:ext>
+              </a:extLst>
+            </p:cNvPr>
+            <p:cNvCxnSpPr>
+              <a:cxnSpLocks/>
+            </p:cNvCxnSpPr>
+            <p:nvPr/>
+          </p:nvCxnSpPr>
+          <p:spPr>
+            <a:xfrm>
+              <a:off x="5950754" y="4992265"/>
+              <a:ext cx="0" cy="200679"/>
+            </a:xfrm>
+            <a:prstGeom prst="straightConnector1">
+              <a:avLst/>
+            </a:prstGeom>
+            <a:ln>
+              <a:solidFill>
+                <a:schemeClr val="bg1">
+                  <a:lumMod val="75000"/>
+                </a:schemeClr>
+              </a:solidFill>
+              <a:tailEnd type="triangle"/>
+            </a:ln>
+          </p:spPr>
+          <p:style>
+            <a:lnRef idx="1">
+              <a:schemeClr val="accent1"/>
+            </a:lnRef>
+            <a:fillRef idx="0">
+              <a:schemeClr val="accent1"/>
+            </a:fillRef>
+            <a:effectRef idx="0">
+              <a:schemeClr val="accent1"/>
+            </a:effectRef>
+            <a:fontRef idx="minor">
+              <a:schemeClr val="tx1"/>
+            </a:fontRef>
+          </p:style>
+        </p:cxnSp>
+        <p:pic>
+          <p:nvPicPr>
+            <p:cNvPr id="17" name="Image 16">
+              <a:extLst>
+                <a:ext uri="{FF2B5EF4-FFF2-40B4-BE49-F238E27FC236}">
+                  <a16:creationId xmlns:a16="http://schemas.microsoft.com/office/drawing/2014/main" id="{DA6E274B-3D6C-46A6-8031-5789C70501D7}"/>
+                </a:ext>
+              </a:extLst>
+            </p:cNvPr>
+            <p:cNvPicPr>
+              <a:picLocks noChangeAspect="1"/>
+            </p:cNvPicPr>
+            <p:nvPr/>
+          </p:nvPicPr>
+          <p:blipFill>
+            <a:blip r:embed="rId4">
+              <a:clrChange>
+                <a:clrFrom>
+                  <a:srgbClr val="FFFFFF"/>
+                </a:clrFrom>
+                <a:clrTo>
+                  <a:srgbClr val="FFFFFF">
+                    <a:alpha val="0"/>
+                  </a:srgbClr>
+                </a:clrTo>
+              </a:clrChange>
+              <a:extLst>
+                <a:ext uri="{28A0092B-C50C-407E-A947-70E740481C1C}">
+                  <a14:useLocalDpi xmlns:a14="http://schemas.microsoft.com/office/drawing/2010/main" val="0"/>
+                </a:ext>
+              </a:extLst>
+            </a:blip>
+            <a:stretch>
+              <a:fillRect/>
+            </a:stretch>
+          </p:blipFill>
+          <p:spPr>
+            <a:xfrm>
+              <a:off x="3627863" y="2191820"/>
+              <a:ext cx="1647326" cy="374187"/>
+            </a:xfrm>
+            <a:prstGeom prst="rect">
+              <a:avLst/>
+            </a:prstGeom>
+          </p:spPr>
+        </p:pic>
+        <p:pic>
+          <p:nvPicPr>
+            <p:cNvPr id="18" name="Image 17">
+              <a:extLst>
+                <a:ext uri="{FF2B5EF4-FFF2-40B4-BE49-F238E27FC236}">
+                  <a16:creationId xmlns:a16="http://schemas.microsoft.com/office/drawing/2014/main" id="{E25CEFC0-11E9-490C-AA4C-56AAA5475887}"/>
+                </a:ext>
+              </a:extLst>
+            </p:cNvPr>
+            <p:cNvPicPr>
+              <a:picLocks noChangeAspect="1"/>
+            </p:cNvPicPr>
+            <p:nvPr/>
+          </p:nvPicPr>
+          <p:blipFill rotWithShape="1">
+            <a:blip r:embed="rId3">
+              <a:clrChange>
+                <a:clrFrom>
+                  <a:srgbClr val="FFFFFF"/>
+                </a:clrFrom>
+                <a:clrTo>
+                  <a:srgbClr val="FFFFFF">
+                    <a:alpha val="0"/>
+                  </a:srgbClr>
+                </a:clrTo>
+              </a:clrChange>
+              <a:extLst>
+                <a:ext uri="{28A0092B-C50C-407E-A947-70E740481C1C}">
+                  <a14:useLocalDpi xmlns:a14="http://schemas.microsoft.com/office/drawing/2010/main" val="0"/>
+                </a:ext>
+              </a:extLst>
+            </a:blip>
+            <a:srcRect l="49515" t="58816" r="9961" b="16490"/>
+            <a:stretch/>
+          </p:blipFill>
+          <p:spPr>
+            <a:xfrm>
+              <a:off x="3800331" y="4627168"/>
+              <a:ext cx="1742529" cy="562772"/>
+            </a:xfrm>
+            <a:prstGeom prst="rect">
+              <a:avLst/>
+            </a:prstGeom>
+          </p:spPr>
+        </p:pic>
+        <p:cxnSp>
+          <p:nvCxnSpPr>
+            <p:cNvPr id="19" name="Connecteur droit 18">
+              <a:extLst>
+                <a:ext uri="{FF2B5EF4-FFF2-40B4-BE49-F238E27FC236}">
+                  <a16:creationId xmlns:a16="http://schemas.microsoft.com/office/drawing/2014/main" id="{28793B0B-4C51-4F92-B7D1-9075027E01EF}"/>
+                </a:ext>
+              </a:extLst>
+            </p:cNvPr>
+            <p:cNvCxnSpPr>
+              <a:cxnSpLocks/>
+            </p:cNvCxnSpPr>
+            <p:nvPr/>
+          </p:nvCxnSpPr>
+          <p:spPr>
+            <a:xfrm>
+              <a:off x="3808697" y="4575436"/>
+              <a:ext cx="1759790" cy="0"/>
+            </a:xfrm>
+            <a:prstGeom prst="line">
+              <a:avLst/>
+            </a:prstGeom>
+            <a:ln w="38100">
+              <a:solidFill>
+                <a:schemeClr val="tx1">
+                  <a:lumMod val="95000"/>
+                  <a:lumOff val="5000"/>
+                </a:schemeClr>
+              </a:solidFill>
+            </a:ln>
+          </p:spPr>
+          <p:style>
+            <a:lnRef idx="1">
+              <a:schemeClr val="accent1"/>
+            </a:lnRef>
+            <a:fillRef idx="0">
+              <a:schemeClr val="accent1"/>
+            </a:fillRef>
+            <a:effectRef idx="0">
+              <a:schemeClr val="accent1"/>
+            </a:effectRef>
+            <a:fontRef idx="minor">
+              <a:schemeClr val="tx1"/>
+            </a:fontRef>
+          </p:style>
+        </p:cxnSp>
+        <p:sp>
+          <p:nvSpPr>
+            <p:cNvPr id="20" name="ZoneTexte 19">
+              <a:extLst>
+                <a:ext uri="{FF2B5EF4-FFF2-40B4-BE49-F238E27FC236}">
+                  <a16:creationId xmlns:a16="http://schemas.microsoft.com/office/drawing/2014/main" id="{35CF1E70-E9B2-4DDC-BDEB-2D49920D7934}"/>
+                </a:ext>
+              </a:extLst>
+            </p:cNvPr>
+            <p:cNvSpPr txBox="1"/>
+            <p:nvPr/>
+          </p:nvSpPr>
+          <p:spPr>
+            <a:xfrm>
+              <a:off x="3575784" y="4333897"/>
+              <a:ext cx="1807031" cy="246221"/>
+            </a:xfrm>
+            <a:prstGeom prst="rect">
+              <a:avLst/>
+            </a:prstGeom>
+            <a:noFill/>
+          </p:spPr>
+          <p:txBody>
+            <a:bodyPr wrap="square" rtlCol="0">
+              <a:spAutoFit/>
+            </a:bodyPr>
+            <a:lstStyle/>
+            <a:p>
+              <a:r>
+                <a:rPr lang="en-GB" sz="1000" i="1" dirty="0">
+                  <a:latin typeface="Arial" panose="020B0604020202020204" pitchFamily="34" charset="0"/>
+                  <a:cs typeface="Arial" panose="020B0604020202020204" pitchFamily="34" charset="0"/>
+                </a:rPr>
+                <a:t>Mouse Reference Genome</a:t>
+              </a:r>
+            </a:p>
+          </p:txBody>
+        </p:sp>
+        <p:grpSp>
+          <p:nvGrpSpPr>
+            <p:cNvPr id="21" name="Groupe 20">
+              <a:extLst>
+                <a:ext uri="{FF2B5EF4-FFF2-40B4-BE49-F238E27FC236}">
+                  <a16:creationId xmlns:a16="http://schemas.microsoft.com/office/drawing/2014/main" id="{8A09D41D-475E-4266-93E2-A6DE47863681}"/>
+                </a:ext>
+              </a:extLst>
+            </p:cNvPr>
+            <p:cNvGrpSpPr/>
+            <p:nvPr/>
+          </p:nvGrpSpPr>
+          <p:grpSpPr>
+            <a:xfrm>
+              <a:off x="3184278" y="1883996"/>
+              <a:ext cx="857331" cy="1236200"/>
+              <a:chOff x="3774110" y="2101313"/>
+              <a:chExt cx="820087" cy="1577402"/>
+            </a:xfrm>
+          </p:grpSpPr>
+          <p:pic>
+            <p:nvPicPr>
+              <p:cNvPr id="22" name="Image 21">
+                <a:extLst>
+                  <a:ext uri="{FF2B5EF4-FFF2-40B4-BE49-F238E27FC236}">
+                    <a16:creationId xmlns:a16="http://schemas.microsoft.com/office/drawing/2014/main" id="{2F858A58-DC57-402B-85F2-E45BA37DBF79}"/>
+                  </a:ext>
+                </a:extLst>
+              </p:cNvPr>
+              <p:cNvPicPr>
+                <a:picLocks noChangeAspect="1"/>
+              </p:cNvPicPr>
+              <p:nvPr/>
+            </p:nvPicPr>
+            <p:blipFill rotWithShape="1">
+              <a:blip r:embed="rId5">
+                <a:clrChange>
+                  <a:clrFrom>
+                    <a:srgbClr val="FFFFFF"/>
+                  </a:clrFrom>
+                  <a:clrTo>
+                    <a:srgbClr val="FFFFFF">
+                      <a:alpha val="0"/>
+                    </a:srgbClr>
+                  </a:clrTo>
+                </a:clrChange>
+                <a:extLst>
+                  <a:ext uri="{28A0092B-C50C-407E-A947-70E740481C1C}">
+                    <a14:useLocalDpi xmlns:a14="http://schemas.microsoft.com/office/drawing/2010/main" val="0"/>
+                  </a:ext>
+                </a:extLst>
+              </a:blip>
+              <a:srcRect l="44328" t="6684" r="28518" b="20976"/>
+              <a:stretch/>
+            </p:blipFill>
+            <p:spPr>
+              <a:xfrm>
+                <a:off x="3774110" y="2242807"/>
+                <a:ext cx="671858" cy="1200082"/>
+              </a:xfrm>
+              <a:prstGeom prst="rect">
+                <a:avLst/>
+              </a:prstGeom>
+            </p:spPr>
+          </p:pic>
+          <p:sp>
+            <p:nvSpPr>
+              <p:cNvPr id="23" name="ZoneTexte 22">
+                <a:extLst>
+                  <a:ext uri="{FF2B5EF4-FFF2-40B4-BE49-F238E27FC236}">
+                    <a16:creationId xmlns:a16="http://schemas.microsoft.com/office/drawing/2014/main" id="{A6545FC5-25CB-4EF5-9D82-EAAEF5BFC422}"/>
+                  </a:ext>
+                </a:extLst>
+              </p:cNvPr>
+              <p:cNvSpPr txBox="1"/>
+              <p:nvPr/>
+            </p:nvSpPr>
+            <p:spPr>
+              <a:xfrm>
+                <a:off x="4022088" y="3417076"/>
+                <a:ext cx="409255" cy="261639"/>
+              </a:xfrm>
+              <a:prstGeom prst="rect">
+                <a:avLst/>
+              </a:prstGeom>
+              <a:noFill/>
+            </p:spPr>
+            <p:txBody>
+              <a:bodyPr wrap="square" rtlCol="0">
+                <a:spAutoFit/>
+              </a:bodyPr>
+              <a:lstStyle/>
+              <a:p>
+                <a:r>
+                  <a:rPr lang="en-GB" sz="1000" dirty="0">
+                    <a:latin typeface="Arial" panose="020B0604020202020204" pitchFamily="34" charset="0"/>
+                    <a:cs typeface="Arial" panose="020B0604020202020204" pitchFamily="34" charset="0"/>
+                  </a:rPr>
+                  <a:t>3’</a:t>
+                </a:r>
+              </a:p>
+            </p:txBody>
+          </p:sp>
+          <p:sp>
+            <p:nvSpPr>
+              <p:cNvPr id="24" name="ZoneTexte 23">
+                <a:extLst>
+                  <a:ext uri="{FF2B5EF4-FFF2-40B4-BE49-F238E27FC236}">
+                    <a16:creationId xmlns:a16="http://schemas.microsoft.com/office/drawing/2014/main" id="{69A9C70F-7F28-439F-9D91-00DBE563284E}"/>
+                  </a:ext>
+                </a:extLst>
+              </p:cNvPr>
+              <p:cNvSpPr txBox="1"/>
+              <p:nvPr/>
+            </p:nvSpPr>
+            <p:spPr>
+              <a:xfrm>
+                <a:off x="4184942" y="2101313"/>
+                <a:ext cx="409255" cy="261639"/>
+              </a:xfrm>
+              <a:prstGeom prst="rect">
+                <a:avLst/>
+              </a:prstGeom>
+              <a:noFill/>
+            </p:spPr>
+            <p:txBody>
+              <a:bodyPr wrap="square" rtlCol="0">
+                <a:spAutoFit/>
+              </a:bodyPr>
+              <a:lstStyle/>
+              <a:p>
+                <a:r>
+                  <a:rPr lang="en-GB" sz="1000" dirty="0">
+                    <a:latin typeface="Arial" panose="020B0604020202020204" pitchFamily="34" charset="0"/>
+                    <a:cs typeface="Arial" panose="020B0604020202020204" pitchFamily="34" charset="0"/>
+                  </a:rPr>
+                  <a:t>5</a:t>
+                </a:r>
+                <a:r>
+                  <a:rPr lang="en-GB" sz="1000" dirty="0"/>
+                  <a:t>’</a:t>
+                </a:r>
+              </a:p>
+            </p:txBody>
+          </p:sp>
+        </p:grpSp>
+        <p:cxnSp>
+          <p:nvCxnSpPr>
+            <p:cNvPr id="25" name="Connecteur droit 24">
+              <a:extLst>
+                <a:ext uri="{FF2B5EF4-FFF2-40B4-BE49-F238E27FC236}">
+                  <a16:creationId xmlns:a16="http://schemas.microsoft.com/office/drawing/2014/main" id="{60FFDFBB-0AE9-4AAC-8F79-46953F885D25}"/>
+                </a:ext>
+              </a:extLst>
+            </p:cNvPr>
+            <p:cNvCxnSpPr>
+              <a:cxnSpLocks/>
+              <a:stCxn id="30" idx="0"/>
+              <a:endCxn id="27" idx="2"/>
+            </p:cNvCxnSpPr>
+            <p:nvPr/>
+          </p:nvCxnSpPr>
+          <p:spPr>
+            <a:xfrm flipV="1">
+              <a:off x="2560099" y="2487843"/>
+              <a:ext cx="537925" cy="1770989"/>
+            </a:xfrm>
+            <a:prstGeom prst="line">
+              <a:avLst/>
+            </a:prstGeom>
+            <a:ln>
+              <a:solidFill>
+                <a:schemeClr val="bg1">
+                  <a:lumMod val="65000"/>
+                </a:schemeClr>
+              </a:solidFill>
+              <a:prstDash val="lgDash"/>
+            </a:ln>
+          </p:spPr>
+          <p:style>
+            <a:lnRef idx="1">
+              <a:schemeClr val="dk1"/>
+            </a:lnRef>
+            <a:fillRef idx="0">
+              <a:schemeClr val="dk1"/>
+            </a:fillRef>
+            <a:effectRef idx="0">
+              <a:schemeClr val="dk1"/>
+            </a:effectRef>
+            <a:fontRef idx="minor">
+              <a:schemeClr val="tx1"/>
+            </a:fontRef>
+          </p:style>
+        </p:cxnSp>
+        <p:cxnSp>
+          <p:nvCxnSpPr>
+            <p:cNvPr id="26" name="Connecteur droit 25">
+              <a:extLst>
+                <a:ext uri="{FF2B5EF4-FFF2-40B4-BE49-F238E27FC236}">
+                  <a16:creationId xmlns:a16="http://schemas.microsoft.com/office/drawing/2014/main" id="{E53E82D3-50ED-4C61-835E-EC318E4F60A7}"/>
+                </a:ext>
+              </a:extLst>
+            </p:cNvPr>
+            <p:cNvCxnSpPr>
+              <a:cxnSpLocks/>
+              <a:stCxn id="30" idx="3"/>
+              <a:endCxn id="27" idx="5"/>
+            </p:cNvCxnSpPr>
+            <p:nvPr/>
+          </p:nvCxnSpPr>
+          <p:spPr>
+            <a:xfrm flipV="1">
+              <a:off x="2902924" y="2963627"/>
+              <a:ext cx="971048" cy="1515649"/>
+            </a:xfrm>
+            <a:prstGeom prst="line">
+              <a:avLst/>
+            </a:prstGeom>
+            <a:ln>
+              <a:solidFill>
+                <a:schemeClr val="bg1">
+                  <a:lumMod val="65000"/>
+                </a:schemeClr>
+              </a:solidFill>
+              <a:prstDash val="lgDash"/>
+            </a:ln>
+          </p:spPr>
+          <p:style>
+            <a:lnRef idx="1">
+              <a:schemeClr val="dk1"/>
+            </a:lnRef>
+            <a:fillRef idx="0">
+              <a:schemeClr val="dk1"/>
+            </a:fillRef>
+            <a:effectRef idx="0">
+              <a:schemeClr val="dk1"/>
+            </a:effectRef>
+            <a:fontRef idx="minor">
+              <a:schemeClr val="tx1"/>
+            </a:fontRef>
+          </p:style>
+        </p:cxnSp>
+        <p:sp>
+          <p:nvSpPr>
+            <p:cNvPr id="28" name="ZoneTexte 27">
+              <a:extLst>
+                <a:ext uri="{FF2B5EF4-FFF2-40B4-BE49-F238E27FC236}">
+                  <a16:creationId xmlns:a16="http://schemas.microsoft.com/office/drawing/2014/main" id="{20708EE0-E851-4341-B841-562AC0E07588}"/>
+                </a:ext>
+              </a:extLst>
+            </p:cNvPr>
+            <p:cNvSpPr txBox="1"/>
+            <p:nvPr/>
+          </p:nvSpPr>
+          <p:spPr>
+            <a:xfrm>
+              <a:off x="3575785" y="3609277"/>
+              <a:ext cx="983411" cy="246221"/>
+            </a:xfrm>
+            <a:prstGeom prst="rect">
+              <a:avLst/>
+            </a:prstGeom>
+            <a:noFill/>
+          </p:spPr>
+          <p:txBody>
+            <a:bodyPr wrap="square" rtlCol="0">
+              <a:spAutoFit/>
+            </a:bodyPr>
+            <a:lstStyle/>
+            <a:p>
+              <a:r>
+                <a:rPr lang="en-GB" sz="1000" dirty="0">
+                  <a:latin typeface="Arial" panose="020B0604020202020204" pitchFamily="34" charset="0"/>
+                  <a:cs typeface="Arial" panose="020B0604020202020204" pitchFamily="34" charset="0"/>
+                </a:rPr>
+                <a:t>Reads</a:t>
+              </a:r>
+            </a:p>
+          </p:txBody>
+        </p:sp>
+        <p:pic>
+          <p:nvPicPr>
+            <p:cNvPr id="29" name="Image 28">
+              <a:extLst>
+                <a:ext uri="{FF2B5EF4-FFF2-40B4-BE49-F238E27FC236}">
+                  <a16:creationId xmlns:a16="http://schemas.microsoft.com/office/drawing/2014/main" id="{6D75847F-7FC8-4B6F-BB37-DF92408D7D2D}"/>
+                </a:ext>
+              </a:extLst>
+            </p:cNvPr>
+            <p:cNvPicPr>
+              <a:picLocks noChangeAspect="1"/>
+            </p:cNvPicPr>
+            <p:nvPr/>
+          </p:nvPicPr>
+          <p:blipFill rotWithShape="1">
+            <a:blip r:embed="rId6">
+              <a:clrChange>
+                <a:clrFrom>
+                  <a:srgbClr val="FFFFFF"/>
+                </a:clrFrom>
+                <a:clrTo>
+                  <a:srgbClr val="FFFFFF">
+                    <a:alpha val="0"/>
+                  </a:srgbClr>
+                </a:clrTo>
+              </a:clrChange>
+              <a:extLst>
+                <a:ext uri="{28A0092B-C50C-407E-A947-70E740481C1C}">
+                  <a14:useLocalDpi xmlns:a14="http://schemas.microsoft.com/office/drawing/2010/main" val="0"/>
+                </a:ext>
+              </a:extLst>
+            </a:blip>
+            <a:srcRect l="1872" t="17210" r="55268" b="51678"/>
+            <a:stretch/>
+          </p:blipFill>
+          <p:spPr>
+            <a:xfrm>
+              <a:off x="1206055" y="4121733"/>
+              <a:ext cx="1224801" cy="616834"/>
+            </a:xfrm>
+            <a:prstGeom prst="rect">
+              <a:avLst/>
+            </a:prstGeom>
+          </p:spPr>
+        </p:pic>
+        <p:pic>
+          <p:nvPicPr>
+            <p:cNvPr id="30" name="Image 29">
+              <a:extLst>
+                <a:ext uri="{FF2B5EF4-FFF2-40B4-BE49-F238E27FC236}">
+                  <a16:creationId xmlns:a16="http://schemas.microsoft.com/office/drawing/2014/main" id="{5EF988C7-A5FE-49F0-A233-1505F1F6EBC4}"/>
+                </a:ext>
+              </a:extLst>
+            </p:cNvPr>
+            <p:cNvPicPr>
+              <a:picLocks noChangeAspect="1"/>
+            </p:cNvPicPr>
+            <p:nvPr/>
+          </p:nvPicPr>
+          <p:blipFill rotWithShape="1">
+            <a:blip r:embed="rId6">
+              <a:extLst>
+                <a:ext uri="{28A0092B-C50C-407E-A947-70E740481C1C}">
+                  <a14:useLocalDpi xmlns:a14="http://schemas.microsoft.com/office/drawing/2010/main" val="0"/>
+                </a:ext>
+              </a:extLst>
+            </a:blip>
+            <a:srcRect l="54311" t="59983" r="20541" b="16710"/>
+            <a:stretch/>
+          </p:blipFill>
+          <p:spPr>
+            <a:xfrm>
+              <a:off x="2217274" y="4258832"/>
+              <a:ext cx="685650" cy="440888"/>
+            </a:xfrm>
+            <a:prstGeom prst="rect">
+              <a:avLst/>
+            </a:prstGeom>
+          </p:spPr>
+        </p:pic>
+        <p:sp>
+          <p:nvSpPr>
+            <p:cNvPr id="31" name="ZoneTexte 30">
+              <a:extLst>
+                <a:ext uri="{FF2B5EF4-FFF2-40B4-BE49-F238E27FC236}">
+                  <a16:creationId xmlns:a16="http://schemas.microsoft.com/office/drawing/2014/main" id="{6264C65A-8CDD-47A9-A547-F60D78D46E3F}"/>
+                </a:ext>
+              </a:extLst>
+            </p:cNvPr>
+            <p:cNvSpPr txBox="1"/>
+            <p:nvPr/>
+          </p:nvSpPr>
+          <p:spPr>
+            <a:xfrm>
+              <a:off x="809445" y="4847016"/>
+              <a:ext cx="2537382" cy="276999"/>
+            </a:xfrm>
+            <a:prstGeom prst="rect">
+              <a:avLst/>
+            </a:prstGeom>
+            <a:noFill/>
+          </p:spPr>
+          <p:txBody>
+            <a:bodyPr wrap="square" rtlCol="0">
+              <a:spAutoFit/>
+            </a:bodyPr>
+            <a:lstStyle/>
+            <a:p>
+              <a:r>
+                <a:rPr lang="en-GB" sz="1200" dirty="0">
+                  <a:latin typeface="Arial" panose="020B0604020202020204" pitchFamily="34" charset="0"/>
+                  <a:cs typeface="Arial" panose="020B0604020202020204" pitchFamily="34" charset="0"/>
+                </a:rPr>
+                <a:t>Nanopore RNA sequencing</a:t>
+              </a:r>
+            </a:p>
+          </p:txBody>
+        </p:sp>
+        <p:cxnSp>
+          <p:nvCxnSpPr>
+            <p:cNvPr id="32" name="Connecteur droit avec flèche 31">
+              <a:extLst>
+                <a:ext uri="{FF2B5EF4-FFF2-40B4-BE49-F238E27FC236}">
+                  <a16:creationId xmlns:a16="http://schemas.microsoft.com/office/drawing/2014/main" id="{6C0C6CF2-83BD-4FF7-B735-B56B82795B67}"/>
+                </a:ext>
+              </a:extLst>
+            </p:cNvPr>
+            <p:cNvCxnSpPr/>
+            <p:nvPr/>
+          </p:nvCxnSpPr>
+          <p:spPr>
+            <a:xfrm>
+              <a:off x="1782486" y="3672203"/>
+              <a:ext cx="0" cy="381000"/>
+            </a:xfrm>
+            <a:prstGeom prst="straightConnector1">
+              <a:avLst/>
+            </a:prstGeom>
+            <a:ln>
+              <a:solidFill>
+                <a:schemeClr val="tx1"/>
+              </a:solidFill>
+              <a:tailEnd type="triangle"/>
+            </a:ln>
+          </p:spPr>
+          <p:style>
+            <a:lnRef idx="1">
+              <a:schemeClr val="accent1"/>
+            </a:lnRef>
+            <a:fillRef idx="0">
+              <a:schemeClr val="accent1"/>
+            </a:fillRef>
+            <a:effectRef idx="0">
+              <a:schemeClr val="accent1"/>
+            </a:effectRef>
+            <a:fontRef idx="minor">
+              <a:schemeClr val="tx1"/>
+            </a:fontRef>
+          </p:style>
+        </p:cxnSp>
+        <p:pic>
+          <p:nvPicPr>
+            <p:cNvPr id="33" name="Image 32">
+              <a:extLst>
+                <a:ext uri="{FF2B5EF4-FFF2-40B4-BE49-F238E27FC236}">
+                  <a16:creationId xmlns:a16="http://schemas.microsoft.com/office/drawing/2014/main" id="{2CE83691-CA45-4A77-89C4-10E59BDBB630}"/>
+                </a:ext>
+              </a:extLst>
+            </p:cNvPr>
+            <p:cNvPicPr>
+              <a:picLocks noChangeAspect="1"/>
+            </p:cNvPicPr>
+            <p:nvPr/>
+          </p:nvPicPr>
+          <p:blipFill>
+            <a:blip r:embed="rId7">
+              <a:clrChange>
+                <a:clrFrom>
+                  <a:srgbClr val="FFFFFF"/>
+                </a:clrFrom>
+                <a:clrTo>
+                  <a:srgbClr val="FFFFFF">
+                    <a:alpha val="0"/>
+                  </a:srgbClr>
+                </a:clrTo>
+              </a:clrChange>
+              <a:extLst>
+                <a:ext uri="{28A0092B-C50C-407E-A947-70E740481C1C}">
+                  <a14:useLocalDpi xmlns:a14="http://schemas.microsoft.com/office/drawing/2010/main" val="0"/>
+                </a:ext>
+              </a:extLst>
+            </a:blip>
+            <a:stretch>
+              <a:fillRect/>
+            </a:stretch>
+          </p:blipFill>
+          <p:spPr>
+            <a:xfrm>
+              <a:off x="1568578" y="2983618"/>
+              <a:ext cx="481016" cy="337039"/>
+            </a:xfrm>
+            <a:prstGeom prst="rect">
+              <a:avLst/>
+            </a:prstGeom>
+          </p:spPr>
+        </p:pic>
+        <p:sp>
+          <p:nvSpPr>
+            <p:cNvPr id="34" name="ZoneTexte 33">
+              <a:extLst>
+                <a:ext uri="{FF2B5EF4-FFF2-40B4-BE49-F238E27FC236}">
+                  <a16:creationId xmlns:a16="http://schemas.microsoft.com/office/drawing/2014/main" id="{BD17993C-1CD9-48F9-B61E-9A40C357AA97}"/>
+                </a:ext>
+              </a:extLst>
+            </p:cNvPr>
+            <p:cNvSpPr txBox="1"/>
+            <p:nvPr/>
+          </p:nvSpPr>
+          <p:spPr>
+            <a:xfrm>
+              <a:off x="1152268" y="3310702"/>
+              <a:ext cx="1237129" cy="276999"/>
+            </a:xfrm>
+            <a:prstGeom prst="rect">
+              <a:avLst/>
+            </a:prstGeom>
+            <a:noFill/>
+          </p:spPr>
+          <p:txBody>
+            <a:bodyPr wrap="square" rtlCol="0">
+              <a:spAutoFit/>
+            </a:bodyPr>
+            <a:lstStyle/>
+            <a:p>
+              <a:pPr algn="ctr"/>
+              <a:r>
+                <a:rPr lang="en-GB" sz="1200" dirty="0">
+                  <a:solidFill>
+                    <a:schemeClr val="bg2">
+                      <a:lumMod val="50000"/>
+                    </a:schemeClr>
+                  </a:solidFill>
+                  <a:latin typeface="Arial" panose="020B0604020202020204" pitchFamily="34" charset="0"/>
+                  <a:cs typeface="Arial" panose="020B0604020202020204" pitchFamily="34" charset="0"/>
+                </a:rPr>
+                <a:t>RNA (liver)</a:t>
+              </a:r>
+            </a:p>
+          </p:txBody>
+        </p:sp>
+        <p:pic>
+          <p:nvPicPr>
+            <p:cNvPr id="35" name="Image 34">
+              <a:extLst>
+                <a:ext uri="{FF2B5EF4-FFF2-40B4-BE49-F238E27FC236}">
+                  <a16:creationId xmlns:a16="http://schemas.microsoft.com/office/drawing/2014/main" id="{5E10B348-6626-4E49-B481-63ECAD8E349B}"/>
+                </a:ext>
+              </a:extLst>
+            </p:cNvPr>
+            <p:cNvPicPr>
+              <a:picLocks noChangeAspect="1"/>
+            </p:cNvPicPr>
+            <p:nvPr/>
+          </p:nvPicPr>
+          <p:blipFill rotWithShape="1">
+            <a:blip r:embed="rId8">
+              <a:clrChange>
+                <a:clrFrom>
+                  <a:srgbClr val="FFFFFF"/>
+                </a:clrFrom>
+                <a:clrTo>
+                  <a:srgbClr val="FFFFFF">
+                    <a:alpha val="0"/>
+                  </a:srgbClr>
+                </a:clrTo>
+              </a:clrChange>
+            </a:blip>
+            <a:srcRect r="31045" b="77985"/>
+            <a:stretch/>
+          </p:blipFill>
+          <p:spPr>
+            <a:xfrm>
+              <a:off x="792719" y="1843082"/>
+              <a:ext cx="1928824" cy="1032994"/>
+            </a:xfrm>
+            <a:prstGeom prst="rect">
+              <a:avLst/>
+            </a:prstGeom>
+          </p:spPr>
+        </p:pic>
+        <p:sp>
+          <p:nvSpPr>
+            <p:cNvPr id="50" name="ZoneTexte 49">
+              <a:extLst>
+                <a:ext uri="{FF2B5EF4-FFF2-40B4-BE49-F238E27FC236}">
+                  <a16:creationId xmlns:a16="http://schemas.microsoft.com/office/drawing/2014/main" id="{33EA0C91-8B9E-4644-90B9-943BBF4F49E9}"/>
+                </a:ext>
+              </a:extLst>
+            </p:cNvPr>
+            <p:cNvSpPr txBox="1"/>
+            <p:nvPr/>
+          </p:nvSpPr>
+          <p:spPr>
+            <a:xfrm>
+              <a:off x="5148172" y="5395697"/>
+              <a:ext cx="1707317" cy="461665"/>
+            </a:xfrm>
+            <a:prstGeom prst="rect">
+              <a:avLst/>
+            </a:prstGeom>
+            <a:noFill/>
+          </p:spPr>
+          <p:txBody>
+            <a:bodyPr wrap="square" rtlCol="0">
+              <a:spAutoFit/>
+            </a:bodyPr>
+            <a:lstStyle/>
+            <a:p>
+              <a:pPr algn="ctr"/>
+              <a:r>
+                <a:rPr lang="en-GB" sz="1200" dirty="0">
+                  <a:latin typeface="Arial" panose="020B0604020202020204" pitchFamily="34" charset="0"/>
+                  <a:cs typeface="Arial" panose="020B0604020202020204" pitchFamily="34" charset="0"/>
+                </a:rPr>
+                <a:t>Bioinformatics analysis</a:t>
+              </a:r>
+            </a:p>
+          </p:txBody>
+        </p:sp>
+      </p:grpSp>
       <p:sp>
         <p:nvSpPr>
           <p:cNvPr id="2" name="TextBox 1">
@@ -7413,7 +7434,7 @@
         </p:nvSpPr>
         <p:spPr>
           <a:xfrm>
-            <a:off x="571501" y="1349598"/>
+            <a:off x="544644" y="600317"/>
             <a:ext cx="3009900" cy="307777"/>
           </a:xfrm>
           <a:prstGeom prst="rect">
@@ -7447,238 +7468,6 @@
   <p:clrMapOvr>
     <a:masterClrMapping/>
   </p:clrMapOvr>
-  <p:timing>
-    <p:tnLst>
-      <p:par>
-        <p:cTn id="1" dur="indefinite" restart="never" nodeType="tmRoot">
-          <p:childTnLst>
-            <p:seq concurrent="1" nextAc="seek">
-              <p:cTn id="2" dur="indefinite" nodeType="mainSeq">
-                <p:childTnLst>
-                  <p:par>
-                    <p:cTn id="3" fill="hold">
-                      <p:stCondLst>
-                        <p:cond delay="indefinite"/>
-                      </p:stCondLst>
-                      <p:childTnLst>
-                        <p:par>
-                          <p:cTn id="4" fill="hold">
-                            <p:stCondLst>
-                              <p:cond delay="0"/>
-                            </p:stCondLst>
-                            <p:childTnLst>
-                              <p:par>
-                                <p:cTn id="5" presetID="1" presetClass="entr" presetSubtype="0" fill="hold" nodeType="clickEffect">
-                                  <p:stCondLst>
-                                    <p:cond delay="0"/>
-                                  </p:stCondLst>
-                                  <p:childTnLst>
-                                    <p:set>
-                                      <p:cBhvr>
-                                        <p:cTn id="6" dur="1" fill="hold">
-                                          <p:stCondLst>
-                                            <p:cond delay="0"/>
-                                          </p:stCondLst>
-                                        </p:cTn>
-                                        <p:tgtEl>
-                                          <p:spTgt spid="35"/>
-                                        </p:tgtEl>
-                                        <p:attrNameLst>
-                                          <p:attrName>style.visibility</p:attrName>
-                                        </p:attrNameLst>
-                                      </p:cBhvr>
-                                      <p:to>
-                                        <p:strVal val="visible"/>
-                                      </p:to>
-                                    </p:set>
-                                  </p:childTnLst>
-                                </p:cTn>
-                              </p:par>
-                            </p:childTnLst>
-                          </p:cTn>
-                        </p:par>
-                      </p:childTnLst>
-                    </p:cTn>
-                  </p:par>
-                  <p:par>
-                    <p:cTn id="7" fill="hold">
-                      <p:stCondLst>
-                        <p:cond delay="indefinite"/>
-                      </p:stCondLst>
-                      <p:childTnLst>
-                        <p:par>
-                          <p:cTn id="8" fill="hold">
-                            <p:stCondLst>
-                              <p:cond delay="0"/>
-                            </p:stCondLst>
-                            <p:childTnLst>
-                              <p:par>
-                                <p:cTn id="9" presetID="1" presetClass="entr" presetSubtype="0" fill="hold" nodeType="clickEffect">
-                                  <p:stCondLst>
-                                    <p:cond delay="0"/>
-                                  </p:stCondLst>
-                                  <p:childTnLst>
-                                    <p:set>
-                                      <p:cBhvr>
-                                        <p:cTn id="10" dur="1" fill="hold">
-                                          <p:stCondLst>
-                                            <p:cond delay="0"/>
-                                          </p:stCondLst>
-                                        </p:cTn>
-                                        <p:tgtEl>
-                                          <p:spTgt spid="14"/>
-                                        </p:tgtEl>
-                                        <p:attrNameLst>
-                                          <p:attrName>style.visibility</p:attrName>
-                                        </p:attrNameLst>
-                                      </p:cBhvr>
-                                      <p:to>
-                                        <p:strVal val="visible"/>
-                                      </p:to>
-                                    </p:set>
-                                  </p:childTnLst>
-                                </p:cTn>
-                              </p:par>
-                              <p:par>
-                                <p:cTn id="11" presetID="1" presetClass="entr" presetSubtype="0" fill="hold" nodeType="withEffect">
-                                  <p:stCondLst>
-                                    <p:cond delay="0"/>
-                                  </p:stCondLst>
-                                  <p:childTnLst>
-                                    <p:set>
-                                      <p:cBhvr>
-                                        <p:cTn id="12" dur="1" fill="hold">
-                                          <p:stCondLst>
-                                            <p:cond delay="0"/>
-                                          </p:stCondLst>
-                                        </p:cTn>
-                                        <p:tgtEl>
-                                          <p:spTgt spid="15"/>
-                                        </p:tgtEl>
-                                        <p:attrNameLst>
-                                          <p:attrName>style.visibility</p:attrName>
-                                        </p:attrNameLst>
-                                      </p:cBhvr>
-                                      <p:to>
-                                        <p:strVal val="visible"/>
-                                      </p:to>
-                                    </p:set>
-                                  </p:childTnLst>
-                                </p:cTn>
-                              </p:par>
-                              <p:par>
-                                <p:cTn id="13" presetID="1" presetClass="entr" presetSubtype="0" fill="hold" nodeType="withEffect">
-                                  <p:stCondLst>
-                                    <p:cond delay="0"/>
-                                  </p:stCondLst>
-                                  <p:childTnLst>
-                                    <p:set>
-                                      <p:cBhvr>
-                                        <p:cTn id="14" dur="1" fill="hold">
-                                          <p:stCondLst>
-                                            <p:cond delay="0"/>
-                                          </p:stCondLst>
-                                        </p:cTn>
-                                        <p:tgtEl>
-                                          <p:spTgt spid="16"/>
-                                        </p:tgtEl>
-                                        <p:attrNameLst>
-                                          <p:attrName>style.visibility</p:attrName>
-                                        </p:attrNameLst>
-                                      </p:cBhvr>
-                                      <p:to>
-                                        <p:strVal val="visible"/>
-                                      </p:to>
-                                    </p:set>
-                                  </p:childTnLst>
-                                </p:cTn>
-                              </p:par>
-                              <p:par>
-                                <p:cTn id="15" presetID="1" presetClass="entr" presetSubtype="0" fill="hold" grpId="0" nodeType="withEffect">
-                                  <p:stCondLst>
-                                    <p:cond delay="0"/>
-                                  </p:stCondLst>
-                                  <p:childTnLst>
-                                    <p:set>
-                                      <p:cBhvr>
-                                        <p:cTn id="16" dur="1" fill="hold">
-                                          <p:stCondLst>
-                                            <p:cond delay="0"/>
-                                          </p:stCondLst>
-                                        </p:cTn>
-                                        <p:tgtEl>
-                                          <p:spTgt spid="10"/>
-                                        </p:tgtEl>
-                                        <p:attrNameLst>
-                                          <p:attrName>style.visibility</p:attrName>
-                                        </p:attrNameLst>
-                                      </p:cBhvr>
-                                      <p:to>
-                                        <p:strVal val="visible"/>
-                                      </p:to>
-                                    </p:set>
-                                  </p:childTnLst>
-                                </p:cTn>
-                              </p:par>
-                              <p:par>
-                                <p:cTn id="17" presetID="1" presetClass="entr" presetSubtype="0" fill="hold" grpId="0" nodeType="withEffect">
-                                  <p:stCondLst>
-                                    <p:cond delay="0"/>
-                                  </p:stCondLst>
-                                  <p:childTnLst>
-                                    <p:set>
-                                      <p:cBhvr>
-                                        <p:cTn id="18" dur="1" fill="hold">
-                                          <p:stCondLst>
-                                            <p:cond delay="0"/>
-                                          </p:stCondLst>
-                                        </p:cTn>
-                                        <p:tgtEl>
-                                          <p:spTgt spid="50"/>
-                                        </p:tgtEl>
-                                        <p:attrNameLst>
-                                          <p:attrName>style.visibility</p:attrName>
-                                        </p:attrNameLst>
-                                      </p:cBhvr>
-                                      <p:to>
-                                        <p:strVal val="visible"/>
-                                      </p:to>
-                                    </p:set>
-                                  </p:childTnLst>
-                                </p:cTn>
-                              </p:par>
-                            </p:childTnLst>
-                          </p:cTn>
-                        </p:par>
-                      </p:childTnLst>
-                    </p:cTn>
-                  </p:par>
-                </p:childTnLst>
-              </p:cTn>
-              <p:prevCondLst>
-                <p:cond evt="onPrev" delay="0">
-                  <p:tgtEl>
-                    <p:sldTgt/>
-                  </p:tgtEl>
-                </p:cond>
-              </p:prevCondLst>
-              <p:nextCondLst>
-                <p:cond evt="onNext" delay="0">
-                  <p:tgtEl>
-                    <p:sldTgt/>
-                  </p:tgtEl>
-                </p:cond>
-              </p:nextCondLst>
-            </p:seq>
-          </p:childTnLst>
-        </p:cTn>
-      </p:par>
-    </p:tnLst>
-    <p:bldLst>
-      <p:bldP spid="10" grpId="0"/>
-      <p:bldP spid="50" grpId="0"/>
-    </p:bldLst>
-  </p:timing>
 </p:sld>
 </file>
 
@@ -7699,782 +7488,12 @@
           <a:chExt cx="0" cy="0"/>
         </a:xfrm>
       </p:grpSpPr>
-      <p:sp>
-        <p:nvSpPr>
-          <p:cNvPr id="4" name="Rectangle : coins arrondis 3">
-            <a:extLst>
-              <a:ext uri="{FF2B5EF4-FFF2-40B4-BE49-F238E27FC236}">
-                <a16:creationId xmlns:a16="http://schemas.microsoft.com/office/drawing/2014/main" id="{6CD43B71-2562-41AE-BDC5-E3C496763E8B}"/>
-              </a:ext>
-            </a:extLst>
-          </p:cNvPr>
-          <p:cNvSpPr/>
-          <p:nvPr/>
-        </p:nvSpPr>
-        <p:spPr>
-          <a:xfrm>
-            <a:off x="803984" y="1700304"/>
-            <a:ext cx="6433073" cy="4453668"/>
-          </a:xfrm>
-          <a:prstGeom prst="roundRect">
-            <a:avLst>
-              <a:gd name="adj" fmla="val 5569"/>
-            </a:avLst>
-          </a:prstGeom>
-          <a:solidFill>
-            <a:schemeClr val="bg1">
-              <a:lumMod val="95000"/>
-            </a:schemeClr>
-          </a:solidFill>
-          <a:ln>
-            <a:solidFill>
-              <a:schemeClr val="bg2">
-                <a:lumMod val="90000"/>
-              </a:schemeClr>
-            </a:solidFill>
-          </a:ln>
-        </p:spPr>
-        <p:style>
-          <a:lnRef idx="2">
-            <a:schemeClr val="accent1">
-              <a:shade val="50000"/>
-            </a:schemeClr>
-          </a:lnRef>
-          <a:fillRef idx="1">
-            <a:schemeClr val="accent1"/>
-          </a:fillRef>
-          <a:effectRef idx="0">
-            <a:schemeClr val="accent1"/>
-          </a:effectRef>
-          <a:fontRef idx="minor">
-            <a:schemeClr val="lt1"/>
-          </a:fontRef>
-        </p:style>
-        <p:txBody>
-          <a:bodyPr rtlCol="0" anchor="ctr"/>
-          <a:lstStyle/>
-          <a:p>
-            <a:pPr algn="ctr"/>
-            <a:endParaRPr lang="en-GB" dirty="0"/>
-          </a:p>
-        </p:txBody>
-      </p:sp>
-      <p:sp>
-        <p:nvSpPr>
-          <p:cNvPr id="5" name="ZoneTexte 4">
-            <a:extLst>
-              <a:ext uri="{FF2B5EF4-FFF2-40B4-BE49-F238E27FC236}">
-                <a16:creationId xmlns:a16="http://schemas.microsoft.com/office/drawing/2014/main" id="{111EBF8C-85AE-4E9A-9A1B-71541F0CC5AA}"/>
-              </a:ext>
-            </a:extLst>
-          </p:cNvPr>
-          <p:cNvSpPr txBox="1"/>
-          <p:nvPr/>
-        </p:nvSpPr>
-        <p:spPr>
-          <a:xfrm>
-            <a:off x="5828139" y="4595663"/>
-            <a:ext cx="979139" cy="276999"/>
-          </a:xfrm>
-          <a:prstGeom prst="rect">
-            <a:avLst/>
-          </a:prstGeom>
-          <a:noFill/>
-        </p:spPr>
-        <p:txBody>
-          <a:bodyPr wrap="square" rtlCol="0">
-            <a:spAutoFit/>
-          </a:bodyPr>
-          <a:lstStyle/>
-          <a:p>
-            <a:pPr algn="ctr"/>
-            <a:r>
-              <a:rPr lang="en-GB" sz="1200" b="1" dirty="0">
-                <a:latin typeface="Arial" panose="020B0604020202020204" pitchFamily="34" charset="0"/>
-                <a:cs typeface="Arial" panose="020B0604020202020204" pitchFamily="34" charset="0"/>
-              </a:rPr>
-              <a:t>Alignment</a:t>
-            </a:r>
-            <a:endParaRPr lang="en-GB" sz="1400" b="1" dirty="0">
-              <a:latin typeface="Arial" panose="020B0604020202020204" pitchFamily="34" charset="0"/>
-              <a:cs typeface="Arial" panose="020B0604020202020204" pitchFamily="34" charset="0"/>
-            </a:endParaRPr>
-          </a:p>
-        </p:txBody>
-      </p:sp>
-      <p:sp>
-        <p:nvSpPr>
-          <p:cNvPr id="6" name="ZoneTexte 5">
-            <a:extLst>
-              <a:ext uri="{FF2B5EF4-FFF2-40B4-BE49-F238E27FC236}">
-                <a16:creationId xmlns:a16="http://schemas.microsoft.com/office/drawing/2014/main" id="{21B7EC46-4340-4F35-8B7A-DCB99B33B8B9}"/>
-              </a:ext>
-            </a:extLst>
-          </p:cNvPr>
-          <p:cNvSpPr txBox="1"/>
-          <p:nvPr/>
-        </p:nvSpPr>
-        <p:spPr>
-          <a:xfrm>
-            <a:off x="5752137" y="2944536"/>
-            <a:ext cx="1098374" cy="276999"/>
-          </a:xfrm>
-          <a:prstGeom prst="rect">
-            <a:avLst/>
-          </a:prstGeom>
-          <a:noFill/>
-        </p:spPr>
-        <p:txBody>
-          <a:bodyPr wrap="square" rtlCol="0">
-            <a:spAutoFit/>
-          </a:bodyPr>
-          <a:lstStyle/>
-          <a:p>
-            <a:r>
-              <a:rPr lang="en-GB" sz="1200" b="1" dirty="0">
-                <a:latin typeface="Arial" panose="020B0604020202020204" pitchFamily="34" charset="0"/>
-                <a:cs typeface="Arial" panose="020B0604020202020204" pitchFamily="34" charset="0"/>
-              </a:rPr>
-              <a:t>Base-calling</a:t>
-            </a:r>
-          </a:p>
-        </p:txBody>
-      </p:sp>
-      <p:pic>
-        <p:nvPicPr>
-          <p:cNvPr id="7" name="Image 6">
-            <a:extLst>
-              <a:ext uri="{FF2B5EF4-FFF2-40B4-BE49-F238E27FC236}">
-                <a16:creationId xmlns:a16="http://schemas.microsoft.com/office/drawing/2014/main" id="{033FEE8A-0FA9-4C78-8DBC-C666E42181B2}"/>
-              </a:ext>
-            </a:extLst>
-          </p:cNvPr>
-          <p:cNvPicPr>
-            <a:picLocks noChangeAspect="1"/>
-          </p:cNvPicPr>
-          <p:nvPr/>
-        </p:nvPicPr>
-        <p:blipFill>
-          <a:blip r:embed="rId2">
-            <a:clrChange>
-              <a:clrFrom>
-                <a:srgbClr val="FFFFFF"/>
-              </a:clrFrom>
-              <a:clrTo>
-                <a:srgbClr val="FFFFFF">
-                  <a:alpha val="0"/>
-                </a:srgbClr>
-              </a:clrTo>
-            </a:clrChange>
-            <a:extLst>
-              <a:ext uri="{28A0092B-C50C-407E-A947-70E740481C1C}">
-                <a14:useLocalDpi xmlns:a14="http://schemas.microsoft.com/office/drawing/2010/main" val="0"/>
-              </a:ext>
-            </a:extLst>
-          </a:blip>
-          <a:stretch>
-            <a:fillRect/>
-          </a:stretch>
-        </p:blipFill>
-        <p:spPr>
-          <a:xfrm>
-            <a:off x="4341054" y="2932053"/>
-            <a:ext cx="1481478" cy="336515"/>
-          </a:xfrm>
-          <a:prstGeom prst="rect">
-            <a:avLst/>
-          </a:prstGeom>
-        </p:spPr>
-      </p:pic>
-      <p:sp>
-        <p:nvSpPr>
-          <p:cNvPr id="8" name="ZoneTexte 7">
-            <a:extLst>
-              <a:ext uri="{FF2B5EF4-FFF2-40B4-BE49-F238E27FC236}">
-                <a16:creationId xmlns:a16="http://schemas.microsoft.com/office/drawing/2014/main" id="{F1E7973D-239A-4670-B93F-CAF3F78ACFD4}"/>
-              </a:ext>
-            </a:extLst>
-          </p:cNvPr>
-          <p:cNvSpPr txBox="1"/>
-          <p:nvPr/>
-        </p:nvSpPr>
-        <p:spPr>
-          <a:xfrm>
-            <a:off x="4131754" y="3250115"/>
-            <a:ext cx="1889184" cy="261610"/>
-          </a:xfrm>
-          <a:prstGeom prst="rect">
-            <a:avLst/>
-          </a:prstGeom>
-          <a:noFill/>
-        </p:spPr>
-        <p:txBody>
-          <a:bodyPr wrap="square" rtlCol="0">
-            <a:spAutoFit/>
-          </a:bodyPr>
-          <a:lstStyle/>
-          <a:p>
-            <a:r>
-              <a:rPr lang="en-GB" sz="1100" dirty="0">
-                <a:solidFill>
-                  <a:schemeClr val="accent5">
-                    <a:lumMod val="75000"/>
-                  </a:schemeClr>
-                </a:solidFill>
-                <a:latin typeface="Arial" panose="020B0604020202020204" pitchFamily="34" charset="0"/>
-                <a:cs typeface="Arial" panose="020B0604020202020204" pitchFamily="34" charset="0"/>
-              </a:rPr>
-              <a:t>CGTTGATTTGCTGGGGG</a:t>
-            </a:r>
-            <a:endParaRPr lang="en-GB" sz="1050" dirty="0">
-              <a:solidFill>
-                <a:schemeClr val="accent5">
-                  <a:lumMod val="75000"/>
-                </a:schemeClr>
-              </a:solidFill>
-              <a:latin typeface="Arial" panose="020B0604020202020204" pitchFamily="34" charset="0"/>
-              <a:cs typeface="Arial" panose="020B0604020202020204" pitchFamily="34" charset="0"/>
-            </a:endParaRPr>
-          </a:p>
-        </p:txBody>
-      </p:sp>
-      <p:pic>
-        <p:nvPicPr>
-          <p:cNvPr id="9" name="Image 8">
-            <a:extLst>
-              <a:ext uri="{FF2B5EF4-FFF2-40B4-BE49-F238E27FC236}">
-                <a16:creationId xmlns:a16="http://schemas.microsoft.com/office/drawing/2014/main" id="{229BD257-3158-4EFF-A091-C74B009EB695}"/>
-              </a:ext>
-            </a:extLst>
-          </p:cNvPr>
-          <p:cNvPicPr>
-            <a:picLocks noChangeAspect="1"/>
-          </p:cNvPicPr>
-          <p:nvPr/>
-        </p:nvPicPr>
-        <p:blipFill rotWithShape="1">
-          <a:blip r:embed="rId3">
-            <a:clrChange>
-              <a:clrFrom>
-                <a:srgbClr val="FFFFFF"/>
-              </a:clrFrom>
-              <a:clrTo>
-                <a:srgbClr val="FFFFFF">
-                  <a:alpha val="0"/>
-                </a:srgbClr>
-              </a:clrTo>
-            </a:clrChange>
-            <a:extLst>
-              <a:ext uri="{28A0092B-C50C-407E-A947-70E740481C1C}">
-                <a14:useLocalDpi xmlns:a14="http://schemas.microsoft.com/office/drawing/2010/main" val="0"/>
-              </a:ext>
-            </a:extLst>
-          </a:blip>
-          <a:srcRect l="49515" t="58816" r="9961" b="16490"/>
-          <a:stretch/>
-        </p:blipFill>
-        <p:spPr>
-          <a:xfrm>
-            <a:off x="3925523" y="3804855"/>
-            <a:ext cx="1715854" cy="554156"/>
-          </a:xfrm>
-          <a:prstGeom prst="rect">
-            <a:avLst/>
-          </a:prstGeom>
-        </p:spPr>
-      </p:pic>
-      <p:sp>
-        <p:nvSpPr>
-          <p:cNvPr id="10" name="ZoneTexte 9">
-            <a:extLst>
-              <a:ext uri="{FF2B5EF4-FFF2-40B4-BE49-F238E27FC236}">
-                <a16:creationId xmlns:a16="http://schemas.microsoft.com/office/drawing/2014/main" id="{4521496F-4325-4EB3-8648-1D9D2F4258A8}"/>
-              </a:ext>
-            </a:extLst>
-          </p:cNvPr>
-          <p:cNvSpPr txBox="1"/>
-          <p:nvPr/>
-        </p:nvSpPr>
-        <p:spPr>
-          <a:xfrm>
-            <a:off x="5322196" y="5354204"/>
-            <a:ext cx="1852165" cy="276999"/>
-          </a:xfrm>
-          <a:prstGeom prst="rect">
-            <a:avLst/>
-          </a:prstGeom>
-          <a:noFill/>
-        </p:spPr>
-        <p:txBody>
-          <a:bodyPr wrap="square" rtlCol="0">
-            <a:spAutoFit/>
-          </a:bodyPr>
-          <a:lstStyle/>
-          <a:p>
-            <a:pPr algn="ctr"/>
-            <a:r>
-              <a:rPr lang="en-GB" sz="1200" b="1" dirty="0">
-                <a:latin typeface="Arial" panose="020B0604020202020204" pitchFamily="34" charset="0"/>
-                <a:cs typeface="Arial" panose="020B0604020202020204" pitchFamily="34" charset="0"/>
-              </a:rPr>
-              <a:t>Downstream analyses</a:t>
-            </a:r>
-          </a:p>
-        </p:txBody>
-      </p:sp>
-      <p:sp>
-        <p:nvSpPr>
-          <p:cNvPr id="11" name="ZoneTexte 10">
-            <a:extLst>
-              <a:ext uri="{FF2B5EF4-FFF2-40B4-BE49-F238E27FC236}">
-                <a16:creationId xmlns:a16="http://schemas.microsoft.com/office/drawing/2014/main" id="{75D26726-F30A-4129-AA99-A9DC2E1238A1}"/>
-              </a:ext>
-            </a:extLst>
-          </p:cNvPr>
-          <p:cNvSpPr txBox="1"/>
-          <p:nvPr/>
-        </p:nvSpPr>
-        <p:spPr>
-          <a:xfrm>
-            <a:off x="5804730" y="2283169"/>
-            <a:ext cx="1123418" cy="276999"/>
-          </a:xfrm>
-          <a:prstGeom prst="rect">
-            <a:avLst/>
-          </a:prstGeom>
-          <a:noFill/>
-        </p:spPr>
-        <p:txBody>
-          <a:bodyPr wrap="square" rtlCol="0">
-            <a:spAutoFit/>
-          </a:bodyPr>
-          <a:lstStyle/>
-          <a:p>
-            <a:r>
-              <a:rPr lang="en-GB" sz="1200" b="1" dirty="0">
-                <a:latin typeface="Arial" panose="020B0604020202020204" pitchFamily="34" charset="0"/>
-                <a:cs typeface="Arial" panose="020B0604020202020204" pitchFamily="34" charset="0"/>
-              </a:rPr>
-              <a:t>Sequencing</a:t>
-            </a:r>
-            <a:endParaRPr lang="en-GB" sz="1400" b="1" dirty="0">
-              <a:latin typeface="Arial" panose="020B0604020202020204" pitchFamily="34" charset="0"/>
-              <a:cs typeface="Arial" panose="020B0604020202020204" pitchFamily="34" charset="0"/>
-            </a:endParaRPr>
-          </a:p>
-        </p:txBody>
-      </p:sp>
-      <p:cxnSp>
-        <p:nvCxnSpPr>
-          <p:cNvPr id="12" name="Connecteur droit avec flèche 11">
-            <a:extLst>
-              <a:ext uri="{FF2B5EF4-FFF2-40B4-BE49-F238E27FC236}">
-                <a16:creationId xmlns:a16="http://schemas.microsoft.com/office/drawing/2014/main" id="{3CBEA162-D8AA-43FB-8469-FFE1F48BFF40}"/>
-              </a:ext>
-            </a:extLst>
-          </p:cNvPr>
-          <p:cNvCxnSpPr>
-            <a:cxnSpLocks/>
-          </p:cNvCxnSpPr>
-          <p:nvPr/>
-        </p:nvCxnSpPr>
-        <p:spPr>
-          <a:xfrm>
-            <a:off x="6256593" y="2525997"/>
-            <a:ext cx="0" cy="449730"/>
-          </a:xfrm>
-          <a:prstGeom prst="straightConnector1">
-            <a:avLst/>
-          </a:prstGeom>
-          <a:ln>
-            <a:solidFill>
-              <a:schemeClr val="bg1">
-                <a:lumMod val="75000"/>
-              </a:schemeClr>
-            </a:solidFill>
-            <a:tailEnd type="triangle"/>
-          </a:ln>
-        </p:spPr>
-        <p:style>
-          <a:lnRef idx="1">
-            <a:schemeClr val="accent1"/>
-          </a:lnRef>
-          <a:fillRef idx="0">
-            <a:schemeClr val="accent1"/>
-          </a:fillRef>
-          <a:effectRef idx="0">
-            <a:schemeClr val="accent1"/>
-          </a:effectRef>
-          <a:fontRef idx="minor">
-            <a:schemeClr val="tx1"/>
-          </a:fontRef>
-        </p:style>
-      </p:cxnSp>
-      <p:cxnSp>
-        <p:nvCxnSpPr>
-          <p:cNvPr id="13" name="Connecteur droit avec flèche 12">
-            <a:extLst>
-              <a:ext uri="{FF2B5EF4-FFF2-40B4-BE49-F238E27FC236}">
-                <a16:creationId xmlns:a16="http://schemas.microsoft.com/office/drawing/2014/main" id="{8D884E9E-8D3A-45FA-9F1F-DC36AF053643}"/>
-              </a:ext>
-            </a:extLst>
-          </p:cNvPr>
-          <p:cNvCxnSpPr>
-            <a:cxnSpLocks/>
-          </p:cNvCxnSpPr>
-          <p:nvPr/>
-        </p:nvCxnSpPr>
-        <p:spPr>
-          <a:xfrm>
-            <a:off x="6239339" y="3263329"/>
-            <a:ext cx="0" cy="1320137"/>
-          </a:xfrm>
-          <a:prstGeom prst="straightConnector1">
-            <a:avLst/>
-          </a:prstGeom>
-          <a:ln>
-            <a:solidFill>
-              <a:schemeClr val="bg1">
-                <a:lumMod val="75000"/>
-              </a:schemeClr>
-            </a:solidFill>
-            <a:tailEnd type="triangle"/>
-          </a:ln>
-        </p:spPr>
-        <p:style>
-          <a:lnRef idx="1">
-            <a:schemeClr val="accent1"/>
-          </a:lnRef>
-          <a:fillRef idx="0">
-            <a:schemeClr val="accent1"/>
-          </a:fillRef>
-          <a:effectRef idx="0">
-            <a:schemeClr val="accent1"/>
-          </a:effectRef>
-          <a:fontRef idx="minor">
-            <a:schemeClr val="tx1"/>
-          </a:fontRef>
-        </p:style>
-      </p:cxnSp>
-      <p:cxnSp>
-        <p:nvCxnSpPr>
-          <p:cNvPr id="14" name="Connecteur droit avec flèche 13">
-            <a:extLst>
-              <a:ext uri="{FF2B5EF4-FFF2-40B4-BE49-F238E27FC236}">
-                <a16:creationId xmlns:a16="http://schemas.microsoft.com/office/drawing/2014/main" id="{D6B68798-60ED-495B-93A2-17D37B2FB5D7}"/>
-              </a:ext>
-            </a:extLst>
-          </p:cNvPr>
-          <p:cNvCxnSpPr>
-            <a:cxnSpLocks/>
-          </p:cNvCxnSpPr>
-          <p:nvPr/>
-        </p:nvCxnSpPr>
-        <p:spPr>
-          <a:xfrm>
-            <a:off x="6247929" y="4813096"/>
-            <a:ext cx="0" cy="212295"/>
-          </a:xfrm>
-          <a:prstGeom prst="straightConnector1">
-            <a:avLst/>
-          </a:prstGeom>
-          <a:ln>
-            <a:solidFill>
-              <a:schemeClr val="bg1">
-                <a:lumMod val="75000"/>
-              </a:schemeClr>
-            </a:solidFill>
-            <a:tailEnd type="triangle"/>
-          </a:ln>
-        </p:spPr>
-        <p:style>
-          <a:lnRef idx="1">
-            <a:schemeClr val="accent1"/>
-          </a:lnRef>
-          <a:fillRef idx="0">
-            <a:schemeClr val="accent1"/>
-          </a:fillRef>
-          <a:effectRef idx="0">
-            <a:schemeClr val="accent1"/>
-          </a:effectRef>
-          <a:fontRef idx="minor">
-            <a:schemeClr val="tx1"/>
-          </a:fontRef>
-        </p:style>
-      </p:cxnSp>
-      <p:cxnSp>
-        <p:nvCxnSpPr>
-          <p:cNvPr id="15" name="Connecteur droit avec flèche 14">
-            <a:extLst>
-              <a:ext uri="{FF2B5EF4-FFF2-40B4-BE49-F238E27FC236}">
-                <a16:creationId xmlns:a16="http://schemas.microsoft.com/office/drawing/2014/main" id="{FE0A4AD2-A139-4214-8D5E-957FFDDC24B4}"/>
-              </a:ext>
-            </a:extLst>
-          </p:cNvPr>
-          <p:cNvCxnSpPr>
-            <a:cxnSpLocks/>
-          </p:cNvCxnSpPr>
-          <p:nvPr/>
-        </p:nvCxnSpPr>
-        <p:spPr>
-          <a:xfrm>
-            <a:off x="6247930" y="4997656"/>
-            <a:ext cx="0" cy="224719"/>
-          </a:xfrm>
-          <a:prstGeom prst="straightConnector1">
-            <a:avLst/>
-          </a:prstGeom>
-          <a:ln>
-            <a:solidFill>
-              <a:schemeClr val="bg1">
-                <a:lumMod val="75000"/>
-              </a:schemeClr>
-            </a:solidFill>
-            <a:tailEnd type="triangle"/>
-          </a:ln>
-        </p:spPr>
-        <p:style>
-          <a:lnRef idx="1">
-            <a:schemeClr val="accent1"/>
-          </a:lnRef>
-          <a:fillRef idx="0">
-            <a:schemeClr val="accent1"/>
-          </a:fillRef>
-          <a:effectRef idx="0">
-            <a:schemeClr val="accent1"/>
-          </a:effectRef>
-          <a:fontRef idx="minor">
-            <a:schemeClr val="tx1"/>
-          </a:fontRef>
-        </p:style>
-      </p:cxnSp>
-      <p:cxnSp>
-        <p:nvCxnSpPr>
-          <p:cNvPr id="16" name="Connecteur droit avec flèche 15">
-            <a:extLst>
-              <a:ext uri="{FF2B5EF4-FFF2-40B4-BE49-F238E27FC236}">
-                <a16:creationId xmlns:a16="http://schemas.microsoft.com/office/drawing/2014/main" id="{FCF2A530-9E93-488E-886D-4F1B2FA097F9}"/>
-              </a:ext>
-            </a:extLst>
-          </p:cNvPr>
-          <p:cNvCxnSpPr>
-            <a:cxnSpLocks/>
-          </p:cNvCxnSpPr>
-          <p:nvPr/>
-        </p:nvCxnSpPr>
-        <p:spPr>
-          <a:xfrm>
-            <a:off x="6247930" y="5178395"/>
-            <a:ext cx="0" cy="200679"/>
-          </a:xfrm>
-          <a:prstGeom prst="straightConnector1">
-            <a:avLst/>
-          </a:prstGeom>
-          <a:ln>
-            <a:solidFill>
-              <a:schemeClr val="bg1">
-                <a:lumMod val="75000"/>
-              </a:schemeClr>
-            </a:solidFill>
-            <a:tailEnd type="triangle"/>
-          </a:ln>
-        </p:spPr>
-        <p:style>
-          <a:lnRef idx="1">
-            <a:schemeClr val="accent1"/>
-          </a:lnRef>
-          <a:fillRef idx="0">
-            <a:schemeClr val="accent1"/>
-          </a:fillRef>
-          <a:effectRef idx="0">
-            <a:schemeClr val="accent1"/>
-          </a:effectRef>
-          <a:fontRef idx="minor">
-            <a:schemeClr val="tx1"/>
-          </a:fontRef>
-        </p:style>
-      </p:cxnSp>
-      <p:pic>
-        <p:nvPicPr>
-          <p:cNvPr id="17" name="Image 16">
-            <a:extLst>
-              <a:ext uri="{FF2B5EF4-FFF2-40B4-BE49-F238E27FC236}">
-                <a16:creationId xmlns:a16="http://schemas.microsoft.com/office/drawing/2014/main" id="{6F4710B2-1D18-4FCF-8395-B4AC77341AD0}"/>
-              </a:ext>
-            </a:extLst>
-          </p:cNvPr>
-          <p:cNvPicPr>
-            <a:picLocks noChangeAspect="1"/>
-          </p:cNvPicPr>
-          <p:nvPr/>
-        </p:nvPicPr>
-        <p:blipFill>
-          <a:blip r:embed="rId4">
-            <a:clrChange>
-              <a:clrFrom>
-                <a:srgbClr val="FFFFFF"/>
-              </a:clrFrom>
-              <a:clrTo>
-                <a:srgbClr val="FFFFFF">
-                  <a:alpha val="0"/>
-                </a:srgbClr>
-              </a:clrTo>
-            </a:clrChange>
-            <a:extLst>
-              <a:ext uri="{28A0092B-C50C-407E-A947-70E740481C1C}">
-                <a14:useLocalDpi xmlns:a14="http://schemas.microsoft.com/office/drawing/2010/main" val="0"/>
-              </a:ext>
-            </a:extLst>
-          </a:blip>
-          <a:stretch>
-            <a:fillRect/>
-          </a:stretch>
-        </p:blipFill>
-        <p:spPr>
-          <a:xfrm>
-            <a:off x="3925039" y="2377950"/>
-            <a:ext cx="1647326" cy="374187"/>
-          </a:xfrm>
-          <a:prstGeom prst="rect">
-            <a:avLst/>
-          </a:prstGeom>
-        </p:spPr>
-      </p:pic>
-      <p:pic>
-        <p:nvPicPr>
-          <p:cNvPr id="18" name="Image 17">
-            <a:extLst>
-              <a:ext uri="{FF2B5EF4-FFF2-40B4-BE49-F238E27FC236}">
-                <a16:creationId xmlns:a16="http://schemas.microsoft.com/office/drawing/2014/main" id="{310CC7A3-1C2F-4C71-9A91-746026B12204}"/>
-              </a:ext>
-            </a:extLst>
-          </p:cNvPr>
-          <p:cNvPicPr>
-            <a:picLocks noChangeAspect="1"/>
-          </p:cNvPicPr>
-          <p:nvPr/>
-        </p:nvPicPr>
-        <p:blipFill rotWithShape="1">
-          <a:blip r:embed="rId3">
-            <a:clrChange>
-              <a:clrFrom>
-                <a:srgbClr val="FFFFFF"/>
-              </a:clrFrom>
-              <a:clrTo>
-                <a:srgbClr val="FFFFFF">
-                  <a:alpha val="0"/>
-                </a:srgbClr>
-              </a:clrTo>
-            </a:clrChange>
-            <a:extLst>
-              <a:ext uri="{28A0092B-C50C-407E-A947-70E740481C1C}">
-                <a14:useLocalDpi xmlns:a14="http://schemas.microsoft.com/office/drawing/2010/main" val="0"/>
-              </a:ext>
-            </a:extLst>
-          </a:blip>
-          <a:srcRect l="49515" t="58816" r="9961" b="16490"/>
-          <a:stretch/>
-        </p:blipFill>
-        <p:spPr>
-          <a:xfrm>
-            <a:off x="4097507" y="4813298"/>
-            <a:ext cx="1742529" cy="562772"/>
-          </a:xfrm>
-          <a:prstGeom prst="rect">
-            <a:avLst/>
-          </a:prstGeom>
-        </p:spPr>
-      </p:pic>
-      <p:cxnSp>
-        <p:nvCxnSpPr>
-          <p:cNvPr id="19" name="Connecteur droit 18">
-            <a:extLst>
-              <a:ext uri="{FF2B5EF4-FFF2-40B4-BE49-F238E27FC236}">
-                <a16:creationId xmlns:a16="http://schemas.microsoft.com/office/drawing/2014/main" id="{74AB01E5-2597-4C15-B37D-060B70EF579F}"/>
-              </a:ext>
-            </a:extLst>
-          </p:cNvPr>
-          <p:cNvCxnSpPr>
-            <a:cxnSpLocks/>
-          </p:cNvCxnSpPr>
-          <p:nvPr/>
-        </p:nvCxnSpPr>
-        <p:spPr>
-          <a:xfrm>
-            <a:off x="4105873" y="4761566"/>
-            <a:ext cx="1759790" cy="0"/>
-          </a:xfrm>
-          <a:prstGeom prst="line">
-            <a:avLst/>
-          </a:prstGeom>
-          <a:ln w="38100">
-            <a:solidFill>
-              <a:schemeClr val="tx1">
-                <a:lumMod val="95000"/>
-                <a:lumOff val="5000"/>
-              </a:schemeClr>
-            </a:solidFill>
-          </a:ln>
-        </p:spPr>
-        <p:style>
-          <a:lnRef idx="1">
-            <a:schemeClr val="accent1"/>
-          </a:lnRef>
-          <a:fillRef idx="0">
-            <a:schemeClr val="accent1"/>
-          </a:fillRef>
-          <a:effectRef idx="0">
-            <a:schemeClr val="accent1"/>
-          </a:effectRef>
-          <a:fontRef idx="minor">
-            <a:schemeClr val="tx1"/>
-          </a:fontRef>
-        </p:style>
-      </p:cxnSp>
-      <p:sp>
-        <p:nvSpPr>
-          <p:cNvPr id="20" name="ZoneTexte 19">
-            <a:extLst>
-              <a:ext uri="{FF2B5EF4-FFF2-40B4-BE49-F238E27FC236}">
-                <a16:creationId xmlns:a16="http://schemas.microsoft.com/office/drawing/2014/main" id="{EDE19849-4C97-41C5-8042-4D2EB7B23505}"/>
-              </a:ext>
-            </a:extLst>
-          </p:cNvPr>
-          <p:cNvSpPr txBox="1"/>
-          <p:nvPr/>
-        </p:nvSpPr>
-        <p:spPr>
-          <a:xfrm>
-            <a:off x="3872960" y="4520027"/>
-            <a:ext cx="1466491" cy="246221"/>
-          </a:xfrm>
-          <a:prstGeom prst="rect">
-            <a:avLst/>
-          </a:prstGeom>
-          <a:noFill/>
-        </p:spPr>
-        <p:txBody>
-          <a:bodyPr wrap="square" rtlCol="0">
-            <a:spAutoFit/>
-          </a:bodyPr>
-          <a:lstStyle/>
-          <a:p>
-            <a:r>
-              <a:rPr lang="en-GB" sz="1000" i="1" dirty="0">
-                <a:latin typeface="Arial" panose="020B0604020202020204" pitchFamily="34" charset="0"/>
-                <a:cs typeface="Arial" panose="020B0604020202020204" pitchFamily="34" charset="0"/>
-              </a:rPr>
-              <a:t>Reference</a:t>
-            </a:r>
-          </a:p>
-        </p:txBody>
-      </p:sp>
       <p:grpSp>
         <p:nvGrpSpPr>
-          <p:cNvPr id="21" name="Groupe 20">
-            <a:extLst>
-              <a:ext uri="{FF2B5EF4-FFF2-40B4-BE49-F238E27FC236}">
-                <a16:creationId xmlns:a16="http://schemas.microsoft.com/office/drawing/2014/main" id="{D1806755-C5FB-4E62-915C-235A6E86938E}"/>
+          <p:cNvPr id="3" name="Group 2">
+            <a:extLst>
+              <a:ext uri="{FF2B5EF4-FFF2-40B4-BE49-F238E27FC236}">
+                <a16:creationId xmlns:a16="http://schemas.microsoft.com/office/drawing/2014/main" id="{12825F95-E33F-BBE9-B1CC-8E16125E87E5}"/>
               </a:ext>
             </a:extLst>
           </p:cNvPr>
@@ -8483,18 +7502,159 @@
         </p:nvGrpSpPr>
         <p:grpSpPr>
           <a:xfrm>
-            <a:off x="3481454" y="2070126"/>
-            <a:ext cx="857331" cy="1236200"/>
-            <a:chOff x="3774110" y="2101313"/>
-            <a:chExt cx="820087" cy="1577402"/>
+            <a:off x="803984" y="1700304"/>
+            <a:ext cx="6433073" cy="4453668"/>
+            <a:chOff x="803984" y="1700304"/>
+            <a:chExt cx="6433073" cy="4453668"/>
           </a:xfrm>
         </p:grpSpPr>
+        <p:sp>
+          <p:nvSpPr>
+            <p:cNvPr id="4" name="Rectangle : coins arrondis 3">
+              <a:extLst>
+                <a:ext uri="{FF2B5EF4-FFF2-40B4-BE49-F238E27FC236}">
+                  <a16:creationId xmlns:a16="http://schemas.microsoft.com/office/drawing/2014/main" id="{6CD43B71-2562-41AE-BDC5-E3C496763E8B}"/>
+                </a:ext>
+              </a:extLst>
+            </p:cNvPr>
+            <p:cNvSpPr/>
+            <p:nvPr/>
+          </p:nvSpPr>
+          <p:spPr>
+            <a:xfrm>
+              <a:off x="803984" y="1700304"/>
+              <a:ext cx="6433073" cy="4453668"/>
+            </a:xfrm>
+            <a:prstGeom prst="roundRect">
+              <a:avLst>
+                <a:gd name="adj" fmla="val 5569"/>
+              </a:avLst>
+            </a:prstGeom>
+            <a:solidFill>
+              <a:schemeClr val="bg1">
+                <a:lumMod val="95000"/>
+              </a:schemeClr>
+            </a:solidFill>
+            <a:ln>
+              <a:solidFill>
+                <a:schemeClr val="bg2">
+                  <a:lumMod val="90000"/>
+                </a:schemeClr>
+              </a:solidFill>
+            </a:ln>
+          </p:spPr>
+          <p:style>
+            <a:lnRef idx="2">
+              <a:schemeClr val="accent1">
+                <a:shade val="50000"/>
+              </a:schemeClr>
+            </a:lnRef>
+            <a:fillRef idx="1">
+              <a:schemeClr val="accent1"/>
+            </a:fillRef>
+            <a:effectRef idx="0">
+              <a:schemeClr val="accent1"/>
+            </a:effectRef>
+            <a:fontRef idx="minor">
+              <a:schemeClr val="lt1"/>
+            </a:fontRef>
+          </p:style>
+          <p:txBody>
+            <a:bodyPr rtlCol="0" anchor="ctr"/>
+            <a:lstStyle/>
+            <a:p>
+              <a:pPr algn="ctr"/>
+              <a:endParaRPr lang="en-GB" dirty="0"/>
+            </a:p>
+          </p:txBody>
+        </p:sp>
+        <p:sp>
+          <p:nvSpPr>
+            <p:cNvPr id="5" name="ZoneTexte 4">
+              <a:extLst>
+                <a:ext uri="{FF2B5EF4-FFF2-40B4-BE49-F238E27FC236}">
+                  <a16:creationId xmlns:a16="http://schemas.microsoft.com/office/drawing/2014/main" id="{111EBF8C-85AE-4E9A-9A1B-71541F0CC5AA}"/>
+                </a:ext>
+              </a:extLst>
+            </p:cNvPr>
+            <p:cNvSpPr txBox="1"/>
+            <p:nvPr/>
+          </p:nvSpPr>
+          <p:spPr>
+            <a:xfrm>
+              <a:off x="5828139" y="4595663"/>
+              <a:ext cx="979139" cy="276999"/>
+            </a:xfrm>
+            <a:prstGeom prst="rect">
+              <a:avLst/>
+            </a:prstGeom>
+            <a:noFill/>
+          </p:spPr>
+          <p:txBody>
+            <a:bodyPr wrap="square" rtlCol="0">
+              <a:spAutoFit/>
+            </a:bodyPr>
+            <a:lstStyle/>
+            <a:p>
+              <a:pPr algn="ctr"/>
+              <a:r>
+                <a:rPr lang="en-GB" sz="1200" b="1" dirty="0">
+                  <a:latin typeface="Arial" panose="020B0604020202020204" pitchFamily="34" charset="0"/>
+                  <a:cs typeface="Arial" panose="020B0604020202020204" pitchFamily="34" charset="0"/>
+                </a:rPr>
+                <a:t>Alignment</a:t>
+              </a:r>
+              <a:endParaRPr lang="en-GB" sz="1400" b="1" dirty="0">
+                <a:latin typeface="Arial" panose="020B0604020202020204" pitchFamily="34" charset="0"/>
+                <a:cs typeface="Arial" panose="020B0604020202020204" pitchFamily="34" charset="0"/>
+              </a:endParaRPr>
+            </a:p>
+          </p:txBody>
+        </p:sp>
+        <p:sp>
+          <p:nvSpPr>
+            <p:cNvPr id="6" name="ZoneTexte 5">
+              <a:extLst>
+                <a:ext uri="{FF2B5EF4-FFF2-40B4-BE49-F238E27FC236}">
+                  <a16:creationId xmlns:a16="http://schemas.microsoft.com/office/drawing/2014/main" id="{21B7EC46-4340-4F35-8B7A-DCB99B33B8B9}"/>
+                </a:ext>
+              </a:extLst>
+            </p:cNvPr>
+            <p:cNvSpPr txBox="1"/>
+            <p:nvPr/>
+          </p:nvSpPr>
+          <p:spPr>
+            <a:xfrm>
+              <a:off x="5752137" y="2944536"/>
+              <a:ext cx="1098374" cy="276999"/>
+            </a:xfrm>
+            <a:prstGeom prst="rect">
+              <a:avLst/>
+            </a:prstGeom>
+            <a:noFill/>
+          </p:spPr>
+          <p:txBody>
+            <a:bodyPr wrap="square" rtlCol="0">
+              <a:spAutoFit/>
+            </a:bodyPr>
+            <a:lstStyle/>
+            <a:p>
+              <a:r>
+                <a:rPr lang="en-GB" sz="1200" b="1" dirty="0">
+                  <a:latin typeface="Arial" panose="020B0604020202020204" pitchFamily="34" charset="0"/>
+                  <a:cs typeface="Arial" panose="020B0604020202020204" pitchFamily="34" charset="0"/>
+                </a:rPr>
+                <a:t>Base-calling</a:t>
+              </a:r>
+            </a:p>
+          </p:txBody>
+        </p:sp>
         <p:pic>
           <p:nvPicPr>
-            <p:cNvPr id="22" name="Image 21">
+            <p:cNvPr id="7" name="Image 6">
               <a:extLst>
                 <a:ext uri="{FF2B5EF4-FFF2-40B4-BE49-F238E27FC236}">
-                  <a16:creationId xmlns:a16="http://schemas.microsoft.com/office/drawing/2014/main" id="{CB3688D5-DDBF-435B-852C-DE3182215082}"/>
+                  <a16:creationId xmlns:a16="http://schemas.microsoft.com/office/drawing/2014/main" id="{033FEE8A-0FA9-4C78-8DBC-C666E42181B2}"/>
                 </a:ext>
               </a:extLst>
             </p:cNvPr>
@@ -8503,8 +7663,8 @@
             </p:cNvPicPr>
             <p:nvPr/>
           </p:nvPicPr>
-          <p:blipFill rotWithShape="1">
-            <a:blip r:embed="rId5">
+          <p:blipFill>
+            <a:blip r:embed="rId2">
               <a:clrChange>
                 <a:clrFrom>
                   <a:srgbClr val="FFFFFF"/>
@@ -8521,13 +7681,14 @@
                 </a:ext>
               </a:extLst>
             </a:blip>
-            <a:srcRect l="44328" t="6684" r="28518" b="20976"/>
-            <a:stretch/>
+            <a:stretch>
+              <a:fillRect/>
+            </a:stretch>
           </p:blipFill>
           <p:spPr>
             <a:xfrm>
-              <a:off x="3774110" y="2242807"/>
-              <a:ext cx="671858" cy="1200082"/>
+              <a:off x="4341054" y="2932053"/>
+              <a:ext cx="1481478" cy="336515"/>
             </a:xfrm>
             <a:prstGeom prst="rect">
               <a:avLst/>
@@ -8536,10 +7697,10 @@
         </p:pic>
         <p:sp>
           <p:nvSpPr>
-            <p:cNvPr id="23" name="ZoneTexte 22">
+            <p:cNvPr id="8" name="ZoneTexte 7">
               <a:extLst>
                 <a:ext uri="{FF2B5EF4-FFF2-40B4-BE49-F238E27FC236}">
-                  <a16:creationId xmlns:a16="http://schemas.microsoft.com/office/drawing/2014/main" id="{D49EAE63-BBE1-417B-99FA-EC45480D142E}"/>
+                  <a16:creationId xmlns:a16="http://schemas.microsoft.com/office/drawing/2014/main" id="{F1E7973D-239A-4670-B93F-CAF3F78ACFD4}"/>
                 </a:ext>
               </a:extLst>
             </p:cNvPr>
@@ -8548,8 +7709,888 @@
           </p:nvSpPr>
           <p:spPr>
             <a:xfrm>
-              <a:off x="4022088" y="3417076"/>
-              <a:ext cx="409255" cy="261639"/>
+              <a:off x="4131754" y="3250115"/>
+              <a:ext cx="1889184" cy="261610"/>
+            </a:xfrm>
+            <a:prstGeom prst="rect">
+              <a:avLst/>
+            </a:prstGeom>
+            <a:noFill/>
+          </p:spPr>
+          <p:txBody>
+            <a:bodyPr wrap="square" rtlCol="0">
+              <a:spAutoFit/>
+            </a:bodyPr>
+            <a:lstStyle/>
+            <a:p>
+              <a:r>
+                <a:rPr lang="en-GB" sz="1100" dirty="0">
+                  <a:solidFill>
+                    <a:schemeClr val="accent5">
+                      <a:lumMod val="75000"/>
+                    </a:schemeClr>
+                  </a:solidFill>
+                  <a:latin typeface="Arial" panose="020B0604020202020204" pitchFamily="34" charset="0"/>
+                  <a:cs typeface="Arial" panose="020B0604020202020204" pitchFamily="34" charset="0"/>
+                </a:rPr>
+                <a:t>CGTTGATTTGCTGGGGG</a:t>
+              </a:r>
+              <a:endParaRPr lang="en-GB" sz="1050" dirty="0">
+                <a:solidFill>
+                  <a:schemeClr val="accent5">
+                    <a:lumMod val="75000"/>
+                  </a:schemeClr>
+                </a:solidFill>
+                <a:latin typeface="Arial" panose="020B0604020202020204" pitchFamily="34" charset="0"/>
+                <a:cs typeface="Arial" panose="020B0604020202020204" pitchFamily="34" charset="0"/>
+              </a:endParaRPr>
+            </a:p>
+          </p:txBody>
+        </p:sp>
+        <p:pic>
+          <p:nvPicPr>
+            <p:cNvPr id="9" name="Image 8">
+              <a:extLst>
+                <a:ext uri="{FF2B5EF4-FFF2-40B4-BE49-F238E27FC236}">
+                  <a16:creationId xmlns:a16="http://schemas.microsoft.com/office/drawing/2014/main" id="{229BD257-3158-4EFF-A091-C74B009EB695}"/>
+                </a:ext>
+              </a:extLst>
+            </p:cNvPr>
+            <p:cNvPicPr>
+              <a:picLocks noChangeAspect="1"/>
+            </p:cNvPicPr>
+            <p:nvPr/>
+          </p:nvPicPr>
+          <p:blipFill rotWithShape="1">
+            <a:blip r:embed="rId3">
+              <a:clrChange>
+                <a:clrFrom>
+                  <a:srgbClr val="FFFFFF"/>
+                </a:clrFrom>
+                <a:clrTo>
+                  <a:srgbClr val="FFFFFF">
+                    <a:alpha val="0"/>
+                  </a:srgbClr>
+                </a:clrTo>
+              </a:clrChange>
+              <a:extLst>
+                <a:ext uri="{28A0092B-C50C-407E-A947-70E740481C1C}">
+                  <a14:useLocalDpi xmlns:a14="http://schemas.microsoft.com/office/drawing/2010/main" val="0"/>
+                </a:ext>
+              </a:extLst>
+            </a:blip>
+            <a:srcRect l="49515" t="58816" r="9961" b="16490"/>
+            <a:stretch/>
+          </p:blipFill>
+          <p:spPr>
+            <a:xfrm>
+              <a:off x="3925523" y="3804855"/>
+              <a:ext cx="1715854" cy="554156"/>
+            </a:xfrm>
+            <a:prstGeom prst="rect">
+              <a:avLst/>
+            </a:prstGeom>
+          </p:spPr>
+        </p:pic>
+        <p:sp>
+          <p:nvSpPr>
+            <p:cNvPr id="10" name="ZoneTexte 9">
+              <a:extLst>
+                <a:ext uri="{FF2B5EF4-FFF2-40B4-BE49-F238E27FC236}">
+                  <a16:creationId xmlns:a16="http://schemas.microsoft.com/office/drawing/2014/main" id="{4521496F-4325-4EB3-8648-1D9D2F4258A8}"/>
+                </a:ext>
+              </a:extLst>
+            </p:cNvPr>
+            <p:cNvSpPr txBox="1"/>
+            <p:nvPr/>
+          </p:nvSpPr>
+          <p:spPr>
+            <a:xfrm>
+              <a:off x="5322196" y="5354204"/>
+              <a:ext cx="1852165" cy="276999"/>
+            </a:xfrm>
+            <a:prstGeom prst="rect">
+              <a:avLst/>
+            </a:prstGeom>
+            <a:noFill/>
+          </p:spPr>
+          <p:txBody>
+            <a:bodyPr wrap="square" rtlCol="0">
+              <a:spAutoFit/>
+            </a:bodyPr>
+            <a:lstStyle/>
+            <a:p>
+              <a:pPr algn="ctr"/>
+              <a:r>
+                <a:rPr lang="en-GB" sz="1200" b="1" dirty="0">
+                  <a:latin typeface="Arial" panose="020B0604020202020204" pitchFamily="34" charset="0"/>
+                  <a:cs typeface="Arial" panose="020B0604020202020204" pitchFamily="34" charset="0"/>
+                </a:rPr>
+                <a:t>Downstream analyses</a:t>
+              </a:r>
+            </a:p>
+          </p:txBody>
+        </p:sp>
+        <p:sp>
+          <p:nvSpPr>
+            <p:cNvPr id="11" name="ZoneTexte 10">
+              <a:extLst>
+                <a:ext uri="{FF2B5EF4-FFF2-40B4-BE49-F238E27FC236}">
+                  <a16:creationId xmlns:a16="http://schemas.microsoft.com/office/drawing/2014/main" id="{75D26726-F30A-4129-AA99-A9DC2E1238A1}"/>
+                </a:ext>
+              </a:extLst>
+            </p:cNvPr>
+            <p:cNvSpPr txBox="1"/>
+            <p:nvPr/>
+          </p:nvSpPr>
+          <p:spPr>
+            <a:xfrm>
+              <a:off x="5804730" y="2283169"/>
+              <a:ext cx="1123418" cy="276999"/>
+            </a:xfrm>
+            <a:prstGeom prst="rect">
+              <a:avLst/>
+            </a:prstGeom>
+            <a:noFill/>
+          </p:spPr>
+          <p:txBody>
+            <a:bodyPr wrap="square" rtlCol="0">
+              <a:spAutoFit/>
+            </a:bodyPr>
+            <a:lstStyle/>
+            <a:p>
+              <a:r>
+                <a:rPr lang="en-GB" sz="1200" b="1" dirty="0">
+                  <a:latin typeface="Arial" panose="020B0604020202020204" pitchFamily="34" charset="0"/>
+                  <a:cs typeface="Arial" panose="020B0604020202020204" pitchFamily="34" charset="0"/>
+                </a:rPr>
+                <a:t>Sequencing</a:t>
+              </a:r>
+              <a:endParaRPr lang="en-GB" sz="1400" b="1" dirty="0">
+                <a:latin typeface="Arial" panose="020B0604020202020204" pitchFamily="34" charset="0"/>
+                <a:cs typeface="Arial" panose="020B0604020202020204" pitchFamily="34" charset="0"/>
+              </a:endParaRPr>
+            </a:p>
+          </p:txBody>
+        </p:sp>
+        <p:cxnSp>
+          <p:nvCxnSpPr>
+            <p:cNvPr id="12" name="Connecteur droit avec flèche 11">
+              <a:extLst>
+                <a:ext uri="{FF2B5EF4-FFF2-40B4-BE49-F238E27FC236}">
+                  <a16:creationId xmlns:a16="http://schemas.microsoft.com/office/drawing/2014/main" id="{3CBEA162-D8AA-43FB-8469-FFE1F48BFF40}"/>
+                </a:ext>
+              </a:extLst>
+            </p:cNvPr>
+            <p:cNvCxnSpPr>
+              <a:cxnSpLocks/>
+            </p:cNvCxnSpPr>
+            <p:nvPr/>
+          </p:nvCxnSpPr>
+          <p:spPr>
+            <a:xfrm>
+              <a:off x="6256593" y="2525997"/>
+              <a:ext cx="0" cy="449730"/>
+            </a:xfrm>
+            <a:prstGeom prst="straightConnector1">
+              <a:avLst/>
+            </a:prstGeom>
+            <a:ln>
+              <a:solidFill>
+                <a:schemeClr val="bg1">
+                  <a:lumMod val="75000"/>
+                </a:schemeClr>
+              </a:solidFill>
+              <a:tailEnd type="triangle"/>
+            </a:ln>
+          </p:spPr>
+          <p:style>
+            <a:lnRef idx="1">
+              <a:schemeClr val="accent1"/>
+            </a:lnRef>
+            <a:fillRef idx="0">
+              <a:schemeClr val="accent1"/>
+            </a:fillRef>
+            <a:effectRef idx="0">
+              <a:schemeClr val="accent1"/>
+            </a:effectRef>
+            <a:fontRef idx="minor">
+              <a:schemeClr val="tx1"/>
+            </a:fontRef>
+          </p:style>
+        </p:cxnSp>
+        <p:cxnSp>
+          <p:nvCxnSpPr>
+            <p:cNvPr id="13" name="Connecteur droit avec flèche 12">
+              <a:extLst>
+                <a:ext uri="{FF2B5EF4-FFF2-40B4-BE49-F238E27FC236}">
+                  <a16:creationId xmlns:a16="http://schemas.microsoft.com/office/drawing/2014/main" id="{8D884E9E-8D3A-45FA-9F1F-DC36AF053643}"/>
+                </a:ext>
+              </a:extLst>
+            </p:cNvPr>
+            <p:cNvCxnSpPr>
+              <a:cxnSpLocks/>
+            </p:cNvCxnSpPr>
+            <p:nvPr/>
+          </p:nvCxnSpPr>
+          <p:spPr>
+            <a:xfrm>
+              <a:off x="6239339" y="3263329"/>
+              <a:ext cx="0" cy="1320137"/>
+            </a:xfrm>
+            <a:prstGeom prst="straightConnector1">
+              <a:avLst/>
+            </a:prstGeom>
+            <a:ln>
+              <a:solidFill>
+                <a:schemeClr val="bg1">
+                  <a:lumMod val="75000"/>
+                </a:schemeClr>
+              </a:solidFill>
+              <a:tailEnd type="triangle"/>
+            </a:ln>
+          </p:spPr>
+          <p:style>
+            <a:lnRef idx="1">
+              <a:schemeClr val="accent1"/>
+            </a:lnRef>
+            <a:fillRef idx="0">
+              <a:schemeClr val="accent1"/>
+            </a:fillRef>
+            <a:effectRef idx="0">
+              <a:schemeClr val="accent1"/>
+            </a:effectRef>
+            <a:fontRef idx="minor">
+              <a:schemeClr val="tx1"/>
+            </a:fontRef>
+          </p:style>
+        </p:cxnSp>
+        <p:cxnSp>
+          <p:nvCxnSpPr>
+            <p:cNvPr id="14" name="Connecteur droit avec flèche 13">
+              <a:extLst>
+                <a:ext uri="{FF2B5EF4-FFF2-40B4-BE49-F238E27FC236}">
+                  <a16:creationId xmlns:a16="http://schemas.microsoft.com/office/drawing/2014/main" id="{D6B68798-60ED-495B-93A2-17D37B2FB5D7}"/>
+                </a:ext>
+              </a:extLst>
+            </p:cNvPr>
+            <p:cNvCxnSpPr>
+              <a:cxnSpLocks/>
+            </p:cNvCxnSpPr>
+            <p:nvPr/>
+          </p:nvCxnSpPr>
+          <p:spPr>
+            <a:xfrm>
+              <a:off x="6247929" y="4813096"/>
+              <a:ext cx="0" cy="212295"/>
+            </a:xfrm>
+            <a:prstGeom prst="straightConnector1">
+              <a:avLst/>
+            </a:prstGeom>
+            <a:ln>
+              <a:solidFill>
+                <a:schemeClr val="bg1">
+                  <a:lumMod val="75000"/>
+                </a:schemeClr>
+              </a:solidFill>
+              <a:tailEnd type="triangle"/>
+            </a:ln>
+          </p:spPr>
+          <p:style>
+            <a:lnRef idx="1">
+              <a:schemeClr val="accent1"/>
+            </a:lnRef>
+            <a:fillRef idx="0">
+              <a:schemeClr val="accent1"/>
+            </a:fillRef>
+            <a:effectRef idx="0">
+              <a:schemeClr val="accent1"/>
+            </a:effectRef>
+            <a:fontRef idx="minor">
+              <a:schemeClr val="tx1"/>
+            </a:fontRef>
+          </p:style>
+        </p:cxnSp>
+        <p:cxnSp>
+          <p:nvCxnSpPr>
+            <p:cNvPr id="15" name="Connecteur droit avec flèche 14">
+              <a:extLst>
+                <a:ext uri="{FF2B5EF4-FFF2-40B4-BE49-F238E27FC236}">
+                  <a16:creationId xmlns:a16="http://schemas.microsoft.com/office/drawing/2014/main" id="{FE0A4AD2-A139-4214-8D5E-957FFDDC24B4}"/>
+                </a:ext>
+              </a:extLst>
+            </p:cNvPr>
+            <p:cNvCxnSpPr>
+              <a:cxnSpLocks/>
+            </p:cNvCxnSpPr>
+            <p:nvPr/>
+          </p:nvCxnSpPr>
+          <p:spPr>
+            <a:xfrm>
+              <a:off x="6247930" y="4997656"/>
+              <a:ext cx="0" cy="224719"/>
+            </a:xfrm>
+            <a:prstGeom prst="straightConnector1">
+              <a:avLst/>
+            </a:prstGeom>
+            <a:ln>
+              <a:solidFill>
+                <a:schemeClr val="bg1">
+                  <a:lumMod val="75000"/>
+                </a:schemeClr>
+              </a:solidFill>
+              <a:tailEnd type="triangle"/>
+            </a:ln>
+          </p:spPr>
+          <p:style>
+            <a:lnRef idx="1">
+              <a:schemeClr val="accent1"/>
+            </a:lnRef>
+            <a:fillRef idx="0">
+              <a:schemeClr val="accent1"/>
+            </a:fillRef>
+            <a:effectRef idx="0">
+              <a:schemeClr val="accent1"/>
+            </a:effectRef>
+            <a:fontRef idx="minor">
+              <a:schemeClr val="tx1"/>
+            </a:fontRef>
+          </p:style>
+        </p:cxnSp>
+        <p:cxnSp>
+          <p:nvCxnSpPr>
+            <p:cNvPr id="16" name="Connecteur droit avec flèche 15">
+              <a:extLst>
+                <a:ext uri="{FF2B5EF4-FFF2-40B4-BE49-F238E27FC236}">
+                  <a16:creationId xmlns:a16="http://schemas.microsoft.com/office/drawing/2014/main" id="{FCF2A530-9E93-488E-886D-4F1B2FA097F9}"/>
+                </a:ext>
+              </a:extLst>
+            </p:cNvPr>
+            <p:cNvCxnSpPr>
+              <a:cxnSpLocks/>
+            </p:cNvCxnSpPr>
+            <p:nvPr/>
+          </p:nvCxnSpPr>
+          <p:spPr>
+            <a:xfrm>
+              <a:off x="6247930" y="5178395"/>
+              <a:ext cx="0" cy="200679"/>
+            </a:xfrm>
+            <a:prstGeom prst="straightConnector1">
+              <a:avLst/>
+            </a:prstGeom>
+            <a:ln>
+              <a:solidFill>
+                <a:schemeClr val="bg1">
+                  <a:lumMod val="75000"/>
+                </a:schemeClr>
+              </a:solidFill>
+              <a:tailEnd type="triangle"/>
+            </a:ln>
+          </p:spPr>
+          <p:style>
+            <a:lnRef idx="1">
+              <a:schemeClr val="accent1"/>
+            </a:lnRef>
+            <a:fillRef idx="0">
+              <a:schemeClr val="accent1"/>
+            </a:fillRef>
+            <a:effectRef idx="0">
+              <a:schemeClr val="accent1"/>
+            </a:effectRef>
+            <a:fontRef idx="minor">
+              <a:schemeClr val="tx1"/>
+            </a:fontRef>
+          </p:style>
+        </p:cxnSp>
+        <p:pic>
+          <p:nvPicPr>
+            <p:cNvPr id="17" name="Image 16">
+              <a:extLst>
+                <a:ext uri="{FF2B5EF4-FFF2-40B4-BE49-F238E27FC236}">
+                  <a16:creationId xmlns:a16="http://schemas.microsoft.com/office/drawing/2014/main" id="{6F4710B2-1D18-4FCF-8395-B4AC77341AD0}"/>
+                </a:ext>
+              </a:extLst>
+            </p:cNvPr>
+            <p:cNvPicPr>
+              <a:picLocks noChangeAspect="1"/>
+            </p:cNvPicPr>
+            <p:nvPr/>
+          </p:nvPicPr>
+          <p:blipFill>
+            <a:blip r:embed="rId4">
+              <a:clrChange>
+                <a:clrFrom>
+                  <a:srgbClr val="FFFFFF"/>
+                </a:clrFrom>
+                <a:clrTo>
+                  <a:srgbClr val="FFFFFF">
+                    <a:alpha val="0"/>
+                  </a:srgbClr>
+                </a:clrTo>
+              </a:clrChange>
+              <a:extLst>
+                <a:ext uri="{28A0092B-C50C-407E-A947-70E740481C1C}">
+                  <a14:useLocalDpi xmlns:a14="http://schemas.microsoft.com/office/drawing/2010/main" val="0"/>
+                </a:ext>
+              </a:extLst>
+            </a:blip>
+            <a:stretch>
+              <a:fillRect/>
+            </a:stretch>
+          </p:blipFill>
+          <p:spPr>
+            <a:xfrm>
+              <a:off x="3925039" y="2377950"/>
+              <a:ext cx="1647326" cy="374187"/>
+            </a:xfrm>
+            <a:prstGeom prst="rect">
+              <a:avLst/>
+            </a:prstGeom>
+          </p:spPr>
+        </p:pic>
+        <p:pic>
+          <p:nvPicPr>
+            <p:cNvPr id="18" name="Image 17">
+              <a:extLst>
+                <a:ext uri="{FF2B5EF4-FFF2-40B4-BE49-F238E27FC236}">
+                  <a16:creationId xmlns:a16="http://schemas.microsoft.com/office/drawing/2014/main" id="{310CC7A3-1C2F-4C71-9A91-746026B12204}"/>
+                </a:ext>
+              </a:extLst>
+            </p:cNvPr>
+            <p:cNvPicPr>
+              <a:picLocks noChangeAspect="1"/>
+            </p:cNvPicPr>
+            <p:nvPr/>
+          </p:nvPicPr>
+          <p:blipFill rotWithShape="1">
+            <a:blip r:embed="rId3">
+              <a:clrChange>
+                <a:clrFrom>
+                  <a:srgbClr val="FFFFFF"/>
+                </a:clrFrom>
+                <a:clrTo>
+                  <a:srgbClr val="FFFFFF">
+                    <a:alpha val="0"/>
+                  </a:srgbClr>
+                </a:clrTo>
+              </a:clrChange>
+              <a:extLst>
+                <a:ext uri="{28A0092B-C50C-407E-A947-70E740481C1C}">
+                  <a14:useLocalDpi xmlns:a14="http://schemas.microsoft.com/office/drawing/2010/main" val="0"/>
+                </a:ext>
+              </a:extLst>
+            </a:blip>
+            <a:srcRect l="49515" t="58816" r="9961" b="16490"/>
+            <a:stretch/>
+          </p:blipFill>
+          <p:spPr>
+            <a:xfrm>
+              <a:off x="4097507" y="4813298"/>
+              <a:ext cx="1742529" cy="562772"/>
+            </a:xfrm>
+            <a:prstGeom prst="rect">
+              <a:avLst/>
+            </a:prstGeom>
+          </p:spPr>
+        </p:pic>
+        <p:cxnSp>
+          <p:nvCxnSpPr>
+            <p:cNvPr id="19" name="Connecteur droit 18">
+              <a:extLst>
+                <a:ext uri="{FF2B5EF4-FFF2-40B4-BE49-F238E27FC236}">
+                  <a16:creationId xmlns:a16="http://schemas.microsoft.com/office/drawing/2014/main" id="{74AB01E5-2597-4C15-B37D-060B70EF579F}"/>
+                </a:ext>
+              </a:extLst>
+            </p:cNvPr>
+            <p:cNvCxnSpPr>
+              <a:cxnSpLocks/>
+            </p:cNvCxnSpPr>
+            <p:nvPr/>
+          </p:nvCxnSpPr>
+          <p:spPr>
+            <a:xfrm>
+              <a:off x="4105873" y="4761566"/>
+              <a:ext cx="1759790" cy="0"/>
+            </a:xfrm>
+            <a:prstGeom prst="line">
+              <a:avLst/>
+            </a:prstGeom>
+            <a:ln w="38100">
+              <a:solidFill>
+                <a:schemeClr val="tx1">
+                  <a:lumMod val="95000"/>
+                  <a:lumOff val="5000"/>
+                </a:schemeClr>
+              </a:solidFill>
+            </a:ln>
+          </p:spPr>
+          <p:style>
+            <a:lnRef idx="1">
+              <a:schemeClr val="accent1"/>
+            </a:lnRef>
+            <a:fillRef idx="0">
+              <a:schemeClr val="accent1"/>
+            </a:fillRef>
+            <a:effectRef idx="0">
+              <a:schemeClr val="accent1"/>
+            </a:effectRef>
+            <a:fontRef idx="minor">
+              <a:schemeClr val="tx1"/>
+            </a:fontRef>
+          </p:style>
+        </p:cxnSp>
+        <p:sp>
+          <p:nvSpPr>
+            <p:cNvPr id="20" name="ZoneTexte 19">
+              <a:extLst>
+                <a:ext uri="{FF2B5EF4-FFF2-40B4-BE49-F238E27FC236}">
+                  <a16:creationId xmlns:a16="http://schemas.microsoft.com/office/drawing/2014/main" id="{EDE19849-4C97-41C5-8042-4D2EB7B23505}"/>
+                </a:ext>
+              </a:extLst>
+            </p:cNvPr>
+            <p:cNvSpPr txBox="1"/>
+            <p:nvPr/>
+          </p:nvSpPr>
+          <p:spPr>
+            <a:xfrm>
+              <a:off x="3872960" y="4520027"/>
+              <a:ext cx="1466491" cy="246221"/>
+            </a:xfrm>
+            <a:prstGeom prst="rect">
+              <a:avLst/>
+            </a:prstGeom>
+            <a:noFill/>
+          </p:spPr>
+          <p:txBody>
+            <a:bodyPr wrap="square" rtlCol="0">
+              <a:spAutoFit/>
+            </a:bodyPr>
+            <a:lstStyle/>
+            <a:p>
+              <a:r>
+                <a:rPr lang="en-GB" sz="1000" i="1" dirty="0">
+                  <a:latin typeface="Arial" panose="020B0604020202020204" pitchFamily="34" charset="0"/>
+                  <a:cs typeface="Arial" panose="020B0604020202020204" pitchFamily="34" charset="0"/>
+                </a:rPr>
+                <a:t>Reference</a:t>
+              </a:r>
+            </a:p>
+          </p:txBody>
+        </p:sp>
+        <p:grpSp>
+          <p:nvGrpSpPr>
+            <p:cNvPr id="21" name="Groupe 20">
+              <a:extLst>
+                <a:ext uri="{FF2B5EF4-FFF2-40B4-BE49-F238E27FC236}">
+                  <a16:creationId xmlns:a16="http://schemas.microsoft.com/office/drawing/2014/main" id="{D1806755-C5FB-4E62-915C-235A6E86938E}"/>
+                </a:ext>
+              </a:extLst>
+            </p:cNvPr>
+            <p:cNvGrpSpPr/>
+            <p:nvPr/>
+          </p:nvGrpSpPr>
+          <p:grpSpPr>
+            <a:xfrm>
+              <a:off x="3481454" y="2070126"/>
+              <a:ext cx="857331" cy="1236200"/>
+              <a:chOff x="3774110" y="2101313"/>
+              <a:chExt cx="820087" cy="1577402"/>
+            </a:xfrm>
+          </p:grpSpPr>
+          <p:pic>
+            <p:nvPicPr>
+              <p:cNvPr id="22" name="Image 21">
+                <a:extLst>
+                  <a:ext uri="{FF2B5EF4-FFF2-40B4-BE49-F238E27FC236}">
+                    <a16:creationId xmlns:a16="http://schemas.microsoft.com/office/drawing/2014/main" id="{CB3688D5-DDBF-435B-852C-DE3182215082}"/>
+                  </a:ext>
+                </a:extLst>
+              </p:cNvPr>
+              <p:cNvPicPr>
+                <a:picLocks noChangeAspect="1"/>
+              </p:cNvPicPr>
+              <p:nvPr/>
+            </p:nvPicPr>
+            <p:blipFill rotWithShape="1">
+              <a:blip r:embed="rId5">
+                <a:clrChange>
+                  <a:clrFrom>
+                    <a:srgbClr val="FFFFFF"/>
+                  </a:clrFrom>
+                  <a:clrTo>
+                    <a:srgbClr val="FFFFFF">
+                      <a:alpha val="0"/>
+                    </a:srgbClr>
+                  </a:clrTo>
+                </a:clrChange>
+                <a:extLst>
+                  <a:ext uri="{28A0092B-C50C-407E-A947-70E740481C1C}">
+                    <a14:useLocalDpi xmlns:a14="http://schemas.microsoft.com/office/drawing/2010/main" val="0"/>
+                  </a:ext>
+                </a:extLst>
+              </a:blip>
+              <a:srcRect l="44328" t="6684" r="28518" b="20976"/>
+              <a:stretch/>
+            </p:blipFill>
+            <p:spPr>
+              <a:xfrm>
+                <a:off x="3774110" y="2242807"/>
+                <a:ext cx="671858" cy="1200082"/>
+              </a:xfrm>
+              <a:prstGeom prst="rect">
+                <a:avLst/>
+              </a:prstGeom>
+            </p:spPr>
+          </p:pic>
+          <p:sp>
+            <p:nvSpPr>
+              <p:cNvPr id="23" name="ZoneTexte 22">
+                <a:extLst>
+                  <a:ext uri="{FF2B5EF4-FFF2-40B4-BE49-F238E27FC236}">
+                    <a16:creationId xmlns:a16="http://schemas.microsoft.com/office/drawing/2014/main" id="{D49EAE63-BBE1-417B-99FA-EC45480D142E}"/>
+                  </a:ext>
+                </a:extLst>
+              </p:cNvPr>
+              <p:cNvSpPr txBox="1"/>
+              <p:nvPr/>
+            </p:nvSpPr>
+            <p:spPr>
+              <a:xfrm>
+                <a:off x="4022088" y="3417076"/>
+                <a:ext cx="409255" cy="261639"/>
+              </a:xfrm>
+              <a:prstGeom prst="rect">
+                <a:avLst/>
+              </a:prstGeom>
+              <a:noFill/>
+            </p:spPr>
+            <p:txBody>
+              <a:bodyPr wrap="square" rtlCol="0">
+                <a:spAutoFit/>
+              </a:bodyPr>
+              <a:lstStyle/>
+              <a:p>
+                <a:r>
+                  <a:rPr lang="en-GB" sz="1000" dirty="0">
+                    <a:latin typeface="Arial" panose="020B0604020202020204" pitchFamily="34" charset="0"/>
+                    <a:cs typeface="Arial" panose="020B0604020202020204" pitchFamily="34" charset="0"/>
+                  </a:rPr>
+                  <a:t>3’</a:t>
+                </a:r>
+              </a:p>
+            </p:txBody>
+          </p:sp>
+          <p:sp>
+            <p:nvSpPr>
+              <p:cNvPr id="24" name="ZoneTexte 23">
+                <a:extLst>
+                  <a:ext uri="{FF2B5EF4-FFF2-40B4-BE49-F238E27FC236}">
+                    <a16:creationId xmlns:a16="http://schemas.microsoft.com/office/drawing/2014/main" id="{EED10666-AAB3-4EC4-8142-3F2BA49DACE0}"/>
+                  </a:ext>
+                </a:extLst>
+              </p:cNvPr>
+              <p:cNvSpPr txBox="1"/>
+              <p:nvPr/>
+            </p:nvSpPr>
+            <p:spPr>
+              <a:xfrm>
+                <a:off x="4184942" y="2101313"/>
+                <a:ext cx="409255" cy="261639"/>
+              </a:xfrm>
+              <a:prstGeom prst="rect">
+                <a:avLst/>
+              </a:prstGeom>
+              <a:noFill/>
+            </p:spPr>
+            <p:txBody>
+              <a:bodyPr wrap="square" rtlCol="0">
+                <a:spAutoFit/>
+              </a:bodyPr>
+              <a:lstStyle/>
+              <a:p>
+                <a:r>
+                  <a:rPr lang="en-GB" sz="1000" dirty="0">
+                    <a:latin typeface="Arial" panose="020B0604020202020204" pitchFamily="34" charset="0"/>
+                    <a:cs typeface="Arial" panose="020B0604020202020204" pitchFamily="34" charset="0"/>
+                  </a:rPr>
+                  <a:t>5</a:t>
+                </a:r>
+                <a:r>
+                  <a:rPr lang="en-GB" sz="1000" dirty="0"/>
+                  <a:t>’</a:t>
+                </a:r>
+              </a:p>
+            </p:txBody>
+          </p:sp>
+        </p:grpSp>
+        <p:cxnSp>
+          <p:nvCxnSpPr>
+            <p:cNvPr id="25" name="Connecteur droit 24">
+              <a:extLst>
+                <a:ext uri="{FF2B5EF4-FFF2-40B4-BE49-F238E27FC236}">
+                  <a16:creationId xmlns:a16="http://schemas.microsoft.com/office/drawing/2014/main" id="{C1AAE452-6406-4627-B79E-7514C6B777EF}"/>
+                </a:ext>
+              </a:extLst>
+            </p:cNvPr>
+            <p:cNvCxnSpPr>
+              <a:cxnSpLocks/>
+              <a:stCxn id="31" idx="0"/>
+              <a:endCxn id="27" idx="2"/>
+            </p:cNvCxnSpPr>
+            <p:nvPr/>
+          </p:nvCxnSpPr>
+          <p:spPr>
+            <a:xfrm flipV="1">
+              <a:off x="2857275" y="2673973"/>
+              <a:ext cx="537925" cy="1770989"/>
+            </a:xfrm>
+            <a:prstGeom prst="line">
+              <a:avLst/>
+            </a:prstGeom>
+            <a:ln>
+              <a:solidFill>
+                <a:schemeClr val="bg1">
+                  <a:lumMod val="65000"/>
+                </a:schemeClr>
+              </a:solidFill>
+              <a:prstDash val="lgDash"/>
+            </a:ln>
+          </p:spPr>
+          <p:style>
+            <a:lnRef idx="1">
+              <a:schemeClr val="dk1"/>
+            </a:lnRef>
+            <a:fillRef idx="0">
+              <a:schemeClr val="dk1"/>
+            </a:fillRef>
+            <a:effectRef idx="0">
+              <a:schemeClr val="dk1"/>
+            </a:effectRef>
+            <a:fontRef idx="minor">
+              <a:schemeClr val="tx1"/>
+            </a:fontRef>
+          </p:style>
+        </p:cxnSp>
+        <p:cxnSp>
+          <p:nvCxnSpPr>
+            <p:cNvPr id="26" name="Connecteur droit 25">
+              <a:extLst>
+                <a:ext uri="{FF2B5EF4-FFF2-40B4-BE49-F238E27FC236}">
+                  <a16:creationId xmlns:a16="http://schemas.microsoft.com/office/drawing/2014/main" id="{2E0F5059-8583-4B8D-BB28-F8F0E6CE71F9}"/>
+                </a:ext>
+              </a:extLst>
+            </p:cNvPr>
+            <p:cNvCxnSpPr>
+              <a:cxnSpLocks/>
+              <a:stCxn id="31" idx="3"/>
+              <a:endCxn id="27" idx="5"/>
+            </p:cNvCxnSpPr>
+            <p:nvPr/>
+          </p:nvCxnSpPr>
+          <p:spPr>
+            <a:xfrm flipV="1">
+              <a:off x="3200100" y="3149757"/>
+              <a:ext cx="971048" cy="1515649"/>
+            </a:xfrm>
+            <a:prstGeom prst="line">
+              <a:avLst/>
+            </a:prstGeom>
+            <a:ln>
+              <a:solidFill>
+                <a:schemeClr val="bg1">
+                  <a:lumMod val="65000"/>
+                </a:schemeClr>
+              </a:solidFill>
+              <a:prstDash val="lgDash"/>
+            </a:ln>
+          </p:spPr>
+          <p:style>
+            <a:lnRef idx="1">
+              <a:schemeClr val="dk1"/>
+            </a:lnRef>
+            <a:fillRef idx="0">
+              <a:schemeClr val="dk1"/>
+            </a:fillRef>
+            <a:effectRef idx="0">
+              <a:schemeClr val="dk1"/>
+            </a:effectRef>
+            <a:fontRef idx="minor">
+              <a:schemeClr val="tx1"/>
+            </a:fontRef>
+          </p:style>
+        </p:cxnSp>
+        <p:sp>
+          <p:nvSpPr>
+            <p:cNvPr id="27" name="Ellipse 26">
+              <a:extLst>
+                <a:ext uri="{FF2B5EF4-FFF2-40B4-BE49-F238E27FC236}">
+                  <a16:creationId xmlns:a16="http://schemas.microsoft.com/office/drawing/2014/main" id="{65D8EC2D-52F1-4F72-AF47-D7CD841C5F1D}"/>
+                </a:ext>
+              </a:extLst>
+            </p:cNvPr>
+            <p:cNvSpPr/>
+            <p:nvPr/>
+          </p:nvSpPr>
+          <p:spPr>
+            <a:xfrm>
+              <a:off x="3395200" y="2001112"/>
+              <a:ext cx="909080" cy="1345721"/>
+            </a:xfrm>
+            <a:prstGeom prst="ellipse">
+              <a:avLst/>
+            </a:prstGeom>
+            <a:noFill/>
+            <a:ln>
+              <a:solidFill>
+                <a:schemeClr val="bg1">
+                  <a:lumMod val="65000"/>
+                </a:schemeClr>
+              </a:solidFill>
+              <a:prstDash val="solid"/>
+            </a:ln>
+          </p:spPr>
+          <p:style>
+            <a:lnRef idx="2">
+              <a:schemeClr val="accent1">
+                <a:shade val="50000"/>
+              </a:schemeClr>
+            </a:lnRef>
+            <a:fillRef idx="1">
+              <a:schemeClr val="accent1"/>
+            </a:fillRef>
+            <a:effectRef idx="0">
+              <a:schemeClr val="accent1"/>
+            </a:effectRef>
+            <a:fontRef idx="minor">
+              <a:schemeClr val="lt1"/>
+            </a:fontRef>
+          </p:style>
+          <p:txBody>
+            <a:bodyPr rtlCol="0" anchor="ctr"/>
+            <a:lstStyle/>
+            <a:p>
+              <a:pPr algn="ctr"/>
+              <a:endParaRPr lang="en-GB" dirty="0"/>
+            </a:p>
+          </p:txBody>
+        </p:sp>
+        <p:sp>
+          <p:nvSpPr>
+            <p:cNvPr id="28" name="ZoneTexte 27">
+              <a:extLst>
+                <a:ext uri="{FF2B5EF4-FFF2-40B4-BE49-F238E27FC236}">
+                  <a16:creationId xmlns:a16="http://schemas.microsoft.com/office/drawing/2014/main" id="{8BE428FF-DB0C-42CE-8493-6156D2054A4A}"/>
+                </a:ext>
+              </a:extLst>
+            </p:cNvPr>
+            <p:cNvSpPr txBox="1"/>
+            <p:nvPr/>
+          </p:nvSpPr>
+          <p:spPr>
+            <a:xfrm>
+              <a:off x="3872961" y="3795407"/>
+              <a:ext cx="983411" cy="246221"/>
             </a:xfrm>
             <a:prstGeom prst="rect">
               <a:avLst/>
@@ -8567,17 +8608,137 @@
                   <a:latin typeface="Arial" panose="020B0604020202020204" pitchFamily="34" charset="0"/>
                   <a:cs typeface="Arial" panose="020B0604020202020204" pitchFamily="34" charset="0"/>
                 </a:rPr>
-                <a:t>3’</a:t>
+                <a:t>Reads</a:t>
               </a:r>
             </a:p>
           </p:txBody>
         </p:sp>
+        <p:pic>
+          <p:nvPicPr>
+            <p:cNvPr id="29" name="Image 28">
+              <a:extLst>
+                <a:ext uri="{FF2B5EF4-FFF2-40B4-BE49-F238E27FC236}">
+                  <a16:creationId xmlns:a16="http://schemas.microsoft.com/office/drawing/2014/main" id="{C986D289-4789-40C5-8F05-9D29606E1762}"/>
+                </a:ext>
+              </a:extLst>
+            </p:cNvPr>
+            <p:cNvPicPr>
+              <a:picLocks noChangeAspect="1"/>
+            </p:cNvPicPr>
+            <p:nvPr/>
+          </p:nvPicPr>
+          <p:blipFill rotWithShape="1">
+            <a:blip r:embed="rId6">
+              <a:clrChange>
+                <a:clrFrom>
+                  <a:srgbClr val="FFFFFF"/>
+                </a:clrFrom>
+                <a:clrTo>
+                  <a:srgbClr val="FFFFFF">
+                    <a:alpha val="0"/>
+                  </a:srgbClr>
+                </a:clrTo>
+              </a:clrChange>
+            </a:blip>
+            <a:srcRect t="829" r="31045" b="83810"/>
+            <a:stretch/>
+          </p:blipFill>
+          <p:spPr>
+            <a:xfrm>
+              <a:off x="1446949" y="1969246"/>
+              <a:ext cx="1727304" cy="645459"/>
+            </a:xfrm>
+            <a:prstGeom prst="rect">
+              <a:avLst/>
+            </a:prstGeom>
+          </p:spPr>
+        </p:pic>
+        <p:pic>
+          <p:nvPicPr>
+            <p:cNvPr id="30" name="Image 29">
+              <a:extLst>
+                <a:ext uri="{FF2B5EF4-FFF2-40B4-BE49-F238E27FC236}">
+                  <a16:creationId xmlns:a16="http://schemas.microsoft.com/office/drawing/2014/main" id="{FB7CF2BB-0F17-44EF-B912-66D06CE39C5A}"/>
+                </a:ext>
+              </a:extLst>
+            </p:cNvPr>
+            <p:cNvPicPr>
+              <a:picLocks noChangeAspect="1"/>
+            </p:cNvPicPr>
+            <p:nvPr/>
+          </p:nvPicPr>
+          <p:blipFill rotWithShape="1">
+            <a:blip r:embed="rId7">
+              <a:clrChange>
+                <a:clrFrom>
+                  <a:srgbClr val="FFFFFF"/>
+                </a:clrFrom>
+                <a:clrTo>
+                  <a:srgbClr val="FFFFFF">
+                    <a:alpha val="0"/>
+                  </a:srgbClr>
+                </a:clrTo>
+              </a:clrChange>
+              <a:extLst>
+                <a:ext uri="{28A0092B-C50C-407E-A947-70E740481C1C}">
+                  <a14:useLocalDpi xmlns:a14="http://schemas.microsoft.com/office/drawing/2010/main" val="0"/>
+                </a:ext>
+              </a:extLst>
+            </a:blip>
+            <a:srcRect l="1872" t="17210" r="55268" b="51678"/>
+            <a:stretch/>
+          </p:blipFill>
+          <p:spPr>
+            <a:xfrm>
+              <a:off x="1503231" y="4307863"/>
+              <a:ext cx="1224801" cy="616834"/>
+            </a:xfrm>
+            <a:prstGeom prst="rect">
+              <a:avLst/>
+            </a:prstGeom>
+          </p:spPr>
+        </p:pic>
+        <p:pic>
+          <p:nvPicPr>
+            <p:cNvPr id="31" name="Image 30">
+              <a:extLst>
+                <a:ext uri="{FF2B5EF4-FFF2-40B4-BE49-F238E27FC236}">
+                  <a16:creationId xmlns:a16="http://schemas.microsoft.com/office/drawing/2014/main" id="{61C2D7B0-7C95-4A0B-92B0-819D73639EAB}"/>
+                </a:ext>
+              </a:extLst>
+            </p:cNvPr>
+            <p:cNvPicPr>
+              <a:picLocks noChangeAspect="1"/>
+            </p:cNvPicPr>
+            <p:nvPr/>
+          </p:nvPicPr>
+          <p:blipFill rotWithShape="1">
+            <a:blip r:embed="rId7">
+              <a:extLst>
+                <a:ext uri="{28A0092B-C50C-407E-A947-70E740481C1C}">
+                  <a14:useLocalDpi xmlns:a14="http://schemas.microsoft.com/office/drawing/2010/main" val="0"/>
+                </a:ext>
+              </a:extLst>
+            </a:blip>
+            <a:srcRect l="54311" t="59983" r="20541" b="16710"/>
+            <a:stretch/>
+          </p:blipFill>
+          <p:spPr>
+            <a:xfrm>
+              <a:off x="2514450" y="4444962"/>
+              <a:ext cx="685650" cy="440888"/>
+            </a:xfrm>
+            <a:prstGeom prst="rect">
+              <a:avLst/>
+            </a:prstGeom>
+          </p:spPr>
+        </p:pic>
         <p:sp>
           <p:nvSpPr>
-            <p:cNvPr id="24" name="ZoneTexte 23">
+            <p:cNvPr id="32" name="ZoneTexte 31">
               <a:extLst>
                 <a:ext uri="{FF2B5EF4-FFF2-40B4-BE49-F238E27FC236}">
-                  <a16:creationId xmlns:a16="http://schemas.microsoft.com/office/drawing/2014/main" id="{EED10666-AAB3-4EC4-8142-3F2BA49DACE0}"/>
+                  <a16:creationId xmlns:a16="http://schemas.microsoft.com/office/drawing/2014/main" id="{4C4CAF6E-8419-43BA-B821-3BCC8D816E2A}"/>
                 </a:ext>
               </a:extLst>
             </p:cNvPr>
@@ -8586,8 +8747,8 @@
           </p:nvSpPr>
           <p:spPr>
             <a:xfrm>
-              <a:off x="4184942" y="2101313"/>
-              <a:ext cx="409255" cy="261639"/>
+              <a:off x="1106621" y="5033146"/>
+              <a:ext cx="2537382" cy="276999"/>
             </a:xfrm>
             <a:prstGeom prst="rect">
               <a:avLst/>
@@ -8601,615 +8762,264 @@
             <a:lstStyle/>
             <a:p>
               <a:r>
-                <a:rPr lang="en-GB" sz="1000" dirty="0">
+                <a:rPr lang="en-GB" sz="1200" dirty="0">
                   <a:latin typeface="Arial" panose="020B0604020202020204" pitchFamily="34" charset="0"/>
                   <a:cs typeface="Arial" panose="020B0604020202020204" pitchFamily="34" charset="0"/>
                 </a:rPr>
-                <a:t>5</a:t>
+                <a:t>Direct RNA nanopore sequencing</a:t>
+              </a:r>
+            </a:p>
+          </p:txBody>
+        </p:sp>
+        <p:cxnSp>
+          <p:nvCxnSpPr>
+            <p:cNvPr id="33" name="Connecteur droit avec flèche 32">
+              <a:extLst>
+                <a:ext uri="{FF2B5EF4-FFF2-40B4-BE49-F238E27FC236}">
+                  <a16:creationId xmlns:a16="http://schemas.microsoft.com/office/drawing/2014/main" id="{57AA206E-976D-41C3-8F14-498E42F624DC}"/>
+                </a:ext>
+              </a:extLst>
+            </p:cNvPr>
+            <p:cNvCxnSpPr/>
+            <p:nvPr/>
+          </p:nvCxnSpPr>
+          <p:spPr>
+            <a:xfrm>
+              <a:off x="2079662" y="3858333"/>
+              <a:ext cx="0" cy="381000"/>
+            </a:xfrm>
+            <a:prstGeom prst="straightConnector1">
+              <a:avLst/>
+            </a:prstGeom>
+            <a:ln>
+              <a:solidFill>
+                <a:schemeClr val="tx1"/>
+              </a:solidFill>
+              <a:tailEnd type="triangle"/>
+            </a:ln>
+          </p:spPr>
+          <p:style>
+            <a:lnRef idx="1">
+              <a:schemeClr val="accent1"/>
+            </a:lnRef>
+            <a:fillRef idx="0">
+              <a:schemeClr val="accent1"/>
+            </a:fillRef>
+            <a:effectRef idx="0">
+              <a:schemeClr val="accent1"/>
+            </a:effectRef>
+            <a:fontRef idx="minor">
+              <a:schemeClr val="tx1"/>
+            </a:fontRef>
+          </p:style>
+        </p:cxnSp>
+        <p:sp>
+          <p:nvSpPr>
+            <p:cNvPr id="34" name="Rectangle 33">
+              <a:extLst>
+                <a:ext uri="{FF2B5EF4-FFF2-40B4-BE49-F238E27FC236}">
+                  <a16:creationId xmlns:a16="http://schemas.microsoft.com/office/drawing/2014/main" id="{366DA2C0-B8F5-4C51-A3D6-71E98C98F76F}"/>
+                </a:ext>
+              </a:extLst>
+            </p:cNvPr>
+            <p:cNvSpPr/>
+            <p:nvPr/>
+          </p:nvSpPr>
+          <p:spPr>
+            <a:xfrm>
+              <a:off x="5214620" y="5593801"/>
+              <a:ext cx="1888751" cy="492443"/>
+            </a:xfrm>
+            <a:prstGeom prst="rect">
+              <a:avLst/>
+            </a:prstGeom>
+          </p:spPr>
+          <p:txBody>
+            <a:bodyPr wrap="square">
+              <a:spAutoFit/>
+            </a:bodyPr>
+            <a:lstStyle/>
+            <a:p>
+              <a:pPr algn="ctr"/>
+              <a:r>
+                <a:rPr lang="en-GB" sz="1300" dirty="0">
+                  <a:latin typeface="Arial" panose="020B0604020202020204" pitchFamily="34" charset="0"/>
+                  <a:cs typeface="Arial" panose="020B0604020202020204" pitchFamily="34" charset="0"/>
+                </a:rPr>
+                <a:t>Transcriptome</a:t>
+              </a:r>
+            </a:p>
+            <a:p>
+              <a:pPr algn="ctr"/>
+              <a:r>
+                <a:rPr lang="en-GB" sz="1300" dirty="0">
+                  <a:latin typeface="Arial" panose="020B0604020202020204" pitchFamily="34" charset="0"/>
+                  <a:cs typeface="Arial" panose="020B0604020202020204" pitchFamily="34" charset="0"/>
+                </a:rPr>
+                <a:t>Alternative Splicing</a:t>
+              </a:r>
+            </a:p>
+          </p:txBody>
+        </p:sp>
+        <p:pic>
+          <p:nvPicPr>
+            <p:cNvPr id="35" name="Image 34">
+              <a:extLst>
+                <a:ext uri="{FF2B5EF4-FFF2-40B4-BE49-F238E27FC236}">
+                  <a16:creationId xmlns:a16="http://schemas.microsoft.com/office/drawing/2014/main" id="{F4D8645B-582E-4965-83EC-57B450F76826}"/>
+                </a:ext>
+              </a:extLst>
+            </p:cNvPr>
+            <p:cNvPicPr>
+              <a:picLocks noChangeAspect="1"/>
+            </p:cNvPicPr>
+            <p:nvPr/>
+          </p:nvPicPr>
+          <p:blipFill>
+            <a:blip r:embed="rId8">
+              <a:clrChange>
+                <a:clrFrom>
+                  <a:srgbClr val="FFFFFF"/>
+                </a:clrFrom>
+                <a:clrTo>
+                  <a:srgbClr val="FFFFFF">
+                    <a:alpha val="0"/>
+                  </a:srgbClr>
+                </a:clrTo>
+              </a:clrChange>
+              <a:extLst>
+                <a:ext uri="{28A0092B-C50C-407E-A947-70E740481C1C}">
+                  <a14:useLocalDpi xmlns:a14="http://schemas.microsoft.com/office/drawing/2010/main" val="0"/>
+                </a:ext>
+              </a:extLst>
+            </a:blip>
+            <a:stretch>
+              <a:fillRect/>
+            </a:stretch>
+          </p:blipFill>
+          <p:spPr>
+            <a:xfrm>
+              <a:off x="1893049" y="3224339"/>
+              <a:ext cx="481016" cy="337039"/>
+            </a:xfrm>
+            <a:prstGeom prst="rect">
+              <a:avLst/>
+            </a:prstGeom>
+          </p:spPr>
+        </p:pic>
+        <p:pic>
+          <p:nvPicPr>
+            <p:cNvPr id="36" name="Image 35">
+              <a:extLst>
+                <a:ext uri="{FF2B5EF4-FFF2-40B4-BE49-F238E27FC236}">
+                  <a16:creationId xmlns:a16="http://schemas.microsoft.com/office/drawing/2014/main" id="{67DAADBF-225C-4FE1-A796-7ED1821F641F}"/>
+                </a:ext>
+              </a:extLst>
+            </p:cNvPr>
+            <p:cNvPicPr>
+              <a:picLocks noChangeAspect="1"/>
+            </p:cNvPicPr>
+            <p:nvPr/>
+          </p:nvPicPr>
+          <p:blipFill rotWithShape="1">
+            <a:blip r:embed="rId9"/>
+            <a:srcRect l="10825" t="4084" r="15044" b="90721"/>
+            <a:stretch/>
+          </p:blipFill>
+          <p:spPr>
+            <a:xfrm>
+              <a:off x="879291" y="2625463"/>
+              <a:ext cx="2452744" cy="279700"/>
+            </a:xfrm>
+            <a:prstGeom prst="rect">
+              <a:avLst/>
+            </a:prstGeom>
+          </p:spPr>
+        </p:pic>
+        <p:sp>
+          <p:nvSpPr>
+            <p:cNvPr id="37" name="ZoneTexte 36">
+              <a:extLst>
+                <a:ext uri="{FF2B5EF4-FFF2-40B4-BE49-F238E27FC236}">
+                  <a16:creationId xmlns:a16="http://schemas.microsoft.com/office/drawing/2014/main" id="{E3C1AF75-5B5D-4251-A9B9-98BE330B8607}"/>
+                </a:ext>
+              </a:extLst>
+            </p:cNvPr>
+            <p:cNvSpPr txBox="1"/>
+            <p:nvPr/>
+          </p:nvSpPr>
+          <p:spPr>
+            <a:xfrm>
+              <a:off x="1449444" y="3496832"/>
+              <a:ext cx="1237129" cy="276999"/>
+            </a:xfrm>
+            <a:prstGeom prst="rect">
+              <a:avLst/>
+            </a:prstGeom>
+            <a:noFill/>
+          </p:spPr>
+          <p:txBody>
+            <a:bodyPr wrap="square" rtlCol="0">
+              <a:spAutoFit/>
+            </a:bodyPr>
+            <a:lstStyle/>
+            <a:p>
+              <a:pPr algn="ctr"/>
+              <a:r>
+                <a:rPr lang="en-GB" sz="1200" dirty="0">
+                  <a:solidFill>
+                    <a:schemeClr val="bg2">
+                      <a:lumMod val="50000"/>
+                    </a:schemeClr>
+                  </a:solidFill>
+                  <a:latin typeface="Arial" panose="020B0604020202020204" pitchFamily="34" charset="0"/>
+                  <a:cs typeface="Arial" panose="020B0604020202020204" pitchFamily="34" charset="0"/>
+                </a:rPr>
+                <a:t>RNA (</a:t>
               </a:r>
               <a:r>
-                <a:rPr lang="en-GB" sz="1000" dirty="0"/>
-                <a:t>’</a:t>
+                <a:rPr lang="en-GB" sz="1200" dirty="0" err="1">
+                  <a:solidFill>
+                    <a:schemeClr val="bg2">
+                      <a:lumMod val="50000"/>
+                    </a:schemeClr>
+                  </a:solidFill>
+                  <a:latin typeface="Arial" panose="020B0604020202020204" pitchFamily="34" charset="0"/>
+                  <a:cs typeface="Arial" panose="020B0604020202020204" pitchFamily="34" charset="0"/>
+                </a:rPr>
+                <a:t>polyA</a:t>
+              </a:r>
+              <a:r>
+                <a:rPr lang="en-GB" sz="1200" dirty="0">
+                  <a:solidFill>
+                    <a:schemeClr val="bg2">
+                      <a:lumMod val="50000"/>
+                    </a:schemeClr>
+                  </a:solidFill>
+                  <a:latin typeface="Arial" panose="020B0604020202020204" pitchFamily="34" charset="0"/>
+                  <a:cs typeface="Arial" panose="020B0604020202020204" pitchFamily="34" charset="0"/>
+                </a:rPr>
+                <a:t>)</a:t>
               </a:r>
             </a:p>
           </p:txBody>
         </p:sp>
       </p:grpSp>
-      <p:cxnSp>
-        <p:nvCxnSpPr>
-          <p:cNvPr id="25" name="Connecteur droit 24">
-            <a:extLst>
-              <a:ext uri="{FF2B5EF4-FFF2-40B4-BE49-F238E27FC236}">
-                <a16:creationId xmlns:a16="http://schemas.microsoft.com/office/drawing/2014/main" id="{C1AAE452-6406-4627-B79E-7514C6B777EF}"/>
-              </a:ext>
-            </a:extLst>
-          </p:cNvPr>
-          <p:cNvCxnSpPr>
-            <a:cxnSpLocks/>
-            <a:stCxn id="31" idx="0"/>
-            <a:endCxn id="27" idx="2"/>
-          </p:cNvCxnSpPr>
-          <p:nvPr/>
-        </p:nvCxnSpPr>
-        <p:spPr>
-          <a:xfrm flipV="1">
-            <a:off x="2857275" y="2673973"/>
-            <a:ext cx="537925" cy="1770989"/>
-          </a:xfrm>
-          <a:prstGeom prst="line">
-            <a:avLst/>
-          </a:prstGeom>
-          <a:ln>
-            <a:solidFill>
-              <a:schemeClr val="bg1">
-                <a:lumMod val="65000"/>
-              </a:schemeClr>
-            </a:solidFill>
-            <a:prstDash val="lgDash"/>
-          </a:ln>
-        </p:spPr>
-        <p:style>
-          <a:lnRef idx="1">
-            <a:schemeClr val="dk1"/>
-          </a:lnRef>
-          <a:fillRef idx="0">
-            <a:schemeClr val="dk1"/>
-          </a:fillRef>
-          <a:effectRef idx="0">
-            <a:schemeClr val="dk1"/>
-          </a:effectRef>
-          <a:fontRef idx="minor">
-            <a:schemeClr val="tx1"/>
-          </a:fontRef>
-        </p:style>
-      </p:cxnSp>
-      <p:cxnSp>
-        <p:nvCxnSpPr>
-          <p:cNvPr id="26" name="Connecteur droit 25">
-            <a:extLst>
-              <a:ext uri="{FF2B5EF4-FFF2-40B4-BE49-F238E27FC236}">
-                <a16:creationId xmlns:a16="http://schemas.microsoft.com/office/drawing/2014/main" id="{2E0F5059-8583-4B8D-BB28-F8F0E6CE71F9}"/>
-              </a:ext>
-            </a:extLst>
-          </p:cNvPr>
-          <p:cNvCxnSpPr>
-            <a:cxnSpLocks/>
-            <a:stCxn id="31" idx="3"/>
-            <a:endCxn id="27" idx="5"/>
-          </p:cNvCxnSpPr>
-          <p:nvPr/>
-        </p:nvCxnSpPr>
-        <p:spPr>
-          <a:xfrm flipV="1">
-            <a:off x="3200100" y="3149757"/>
-            <a:ext cx="971048" cy="1515649"/>
-          </a:xfrm>
-          <a:prstGeom prst="line">
-            <a:avLst/>
-          </a:prstGeom>
-          <a:ln>
-            <a:solidFill>
-              <a:schemeClr val="bg1">
-                <a:lumMod val="65000"/>
-              </a:schemeClr>
-            </a:solidFill>
-            <a:prstDash val="lgDash"/>
-          </a:ln>
-        </p:spPr>
-        <p:style>
-          <a:lnRef idx="1">
-            <a:schemeClr val="dk1"/>
-          </a:lnRef>
-          <a:fillRef idx="0">
-            <a:schemeClr val="dk1"/>
-          </a:fillRef>
-          <a:effectRef idx="0">
-            <a:schemeClr val="dk1"/>
-          </a:effectRef>
-          <a:fontRef idx="minor">
-            <a:schemeClr val="tx1"/>
-          </a:fontRef>
-        </p:style>
-      </p:cxnSp>
-      <p:sp>
-        <p:nvSpPr>
-          <p:cNvPr id="27" name="Ellipse 26">
-            <a:extLst>
-              <a:ext uri="{FF2B5EF4-FFF2-40B4-BE49-F238E27FC236}">
-                <a16:creationId xmlns:a16="http://schemas.microsoft.com/office/drawing/2014/main" id="{65D8EC2D-52F1-4F72-AF47-D7CD841C5F1D}"/>
-              </a:ext>
-            </a:extLst>
-          </p:cNvPr>
-          <p:cNvSpPr/>
+      <p:sp>
+        <p:nvSpPr>
+          <p:cNvPr id="38" name="ZoneTexte 37">
+            <a:extLst>
+              <a:ext uri="{FF2B5EF4-FFF2-40B4-BE49-F238E27FC236}">
+                <a16:creationId xmlns:a16="http://schemas.microsoft.com/office/drawing/2014/main" id="{9C720885-15C3-4DFE-910D-459A65D02359}"/>
+              </a:ext>
+            </a:extLst>
+          </p:cNvPr>
+          <p:cNvSpPr txBox="1"/>
           <p:nvPr/>
         </p:nvSpPr>
         <p:spPr>
           <a:xfrm>
-            <a:off x="3395200" y="2001112"/>
-            <a:ext cx="909080" cy="1345721"/>
-          </a:xfrm>
-          <a:prstGeom prst="ellipse">
-            <a:avLst/>
-          </a:prstGeom>
-          <a:noFill/>
-          <a:ln>
-            <a:solidFill>
-              <a:schemeClr val="bg1">
-                <a:lumMod val="65000"/>
-              </a:schemeClr>
-            </a:solidFill>
-            <a:prstDash val="solid"/>
-          </a:ln>
-        </p:spPr>
-        <p:style>
-          <a:lnRef idx="2">
-            <a:schemeClr val="accent1">
-              <a:shade val="50000"/>
-            </a:schemeClr>
-          </a:lnRef>
-          <a:fillRef idx="1">
-            <a:schemeClr val="accent1"/>
-          </a:fillRef>
-          <a:effectRef idx="0">
-            <a:schemeClr val="accent1"/>
-          </a:effectRef>
-          <a:fontRef idx="minor">
-            <a:schemeClr val="lt1"/>
-          </a:fontRef>
-        </p:style>
-        <p:txBody>
-          <a:bodyPr rtlCol="0" anchor="ctr"/>
-          <a:lstStyle/>
-          <a:p>
-            <a:pPr algn="ctr"/>
-            <a:endParaRPr lang="en-GB" dirty="0"/>
-          </a:p>
-        </p:txBody>
-      </p:sp>
-      <p:sp>
-        <p:nvSpPr>
-          <p:cNvPr id="28" name="ZoneTexte 27">
-            <a:extLst>
-              <a:ext uri="{FF2B5EF4-FFF2-40B4-BE49-F238E27FC236}">
-                <a16:creationId xmlns:a16="http://schemas.microsoft.com/office/drawing/2014/main" id="{8BE428FF-DB0C-42CE-8493-6156D2054A4A}"/>
-              </a:ext>
-            </a:extLst>
-          </p:cNvPr>
-          <p:cNvSpPr txBox="1"/>
-          <p:nvPr/>
-        </p:nvSpPr>
-        <p:spPr>
-          <a:xfrm>
-            <a:off x="3872961" y="3795407"/>
-            <a:ext cx="983411" cy="246221"/>
-          </a:xfrm>
-          <a:prstGeom prst="rect">
-            <a:avLst/>
-          </a:prstGeom>
-          <a:noFill/>
-        </p:spPr>
-        <p:txBody>
-          <a:bodyPr wrap="square" rtlCol="0">
-            <a:spAutoFit/>
-          </a:bodyPr>
-          <a:lstStyle/>
-          <a:p>
-            <a:r>
-              <a:rPr lang="en-GB" sz="1000" dirty="0">
-                <a:latin typeface="Arial" panose="020B0604020202020204" pitchFamily="34" charset="0"/>
-                <a:cs typeface="Arial" panose="020B0604020202020204" pitchFamily="34" charset="0"/>
-              </a:rPr>
-              <a:t>Reads</a:t>
-            </a:r>
-          </a:p>
-        </p:txBody>
-      </p:sp>
-      <p:pic>
-        <p:nvPicPr>
-          <p:cNvPr id="29" name="Image 28">
-            <a:extLst>
-              <a:ext uri="{FF2B5EF4-FFF2-40B4-BE49-F238E27FC236}">
-                <a16:creationId xmlns:a16="http://schemas.microsoft.com/office/drawing/2014/main" id="{C986D289-4789-40C5-8F05-9D29606E1762}"/>
-              </a:ext>
-            </a:extLst>
-          </p:cNvPr>
-          <p:cNvPicPr>
-            <a:picLocks noChangeAspect="1"/>
-          </p:cNvPicPr>
-          <p:nvPr/>
-        </p:nvPicPr>
-        <p:blipFill rotWithShape="1">
-          <a:blip r:embed="rId6">
-            <a:clrChange>
-              <a:clrFrom>
-                <a:srgbClr val="FFFFFF"/>
-              </a:clrFrom>
-              <a:clrTo>
-                <a:srgbClr val="FFFFFF">
-                  <a:alpha val="0"/>
-                </a:srgbClr>
-              </a:clrTo>
-            </a:clrChange>
-          </a:blip>
-          <a:srcRect t="829" r="31045" b="83810"/>
-          <a:stretch/>
-        </p:blipFill>
-        <p:spPr>
-          <a:xfrm>
-            <a:off x="1446949" y="1969246"/>
-            <a:ext cx="1727304" cy="645459"/>
-          </a:xfrm>
-          <a:prstGeom prst="rect">
-            <a:avLst/>
-          </a:prstGeom>
-        </p:spPr>
-      </p:pic>
-      <p:pic>
-        <p:nvPicPr>
-          <p:cNvPr id="30" name="Image 29">
-            <a:extLst>
-              <a:ext uri="{FF2B5EF4-FFF2-40B4-BE49-F238E27FC236}">
-                <a16:creationId xmlns:a16="http://schemas.microsoft.com/office/drawing/2014/main" id="{FB7CF2BB-0F17-44EF-B912-66D06CE39C5A}"/>
-              </a:ext>
-            </a:extLst>
-          </p:cNvPr>
-          <p:cNvPicPr>
-            <a:picLocks noChangeAspect="1"/>
-          </p:cNvPicPr>
-          <p:nvPr/>
-        </p:nvPicPr>
-        <p:blipFill rotWithShape="1">
-          <a:blip r:embed="rId7">
-            <a:clrChange>
-              <a:clrFrom>
-                <a:srgbClr val="FFFFFF"/>
-              </a:clrFrom>
-              <a:clrTo>
-                <a:srgbClr val="FFFFFF">
-                  <a:alpha val="0"/>
-                </a:srgbClr>
-              </a:clrTo>
-            </a:clrChange>
-            <a:extLst>
-              <a:ext uri="{28A0092B-C50C-407E-A947-70E740481C1C}">
-                <a14:useLocalDpi xmlns:a14="http://schemas.microsoft.com/office/drawing/2010/main" val="0"/>
-              </a:ext>
-            </a:extLst>
-          </a:blip>
-          <a:srcRect l="1872" t="17210" r="55268" b="51678"/>
-          <a:stretch/>
-        </p:blipFill>
-        <p:spPr>
-          <a:xfrm>
-            <a:off x="1503231" y="4307863"/>
-            <a:ext cx="1224801" cy="616834"/>
-          </a:xfrm>
-          <a:prstGeom prst="rect">
-            <a:avLst/>
-          </a:prstGeom>
-        </p:spPr>
-      </p:pic>
-      <p:pic>
-        <p:nvPicPr>
-          <p:cNvPr id="31" name="Image 30">
-            <a:extLst>
-              <a:ext uri="{FF2B5EF4-FFF2-40B4-BE49-F238E27FC236}">
-                <a16:creationId xmlns:a16="http://schemas.microsoft.com/office/drawing/2014/main" id="{61C2D7B0-7C95-4A0B-92B0-819D73639EAB}"/>
-              </a:ext>
-            </a:extLst>
-          </p:cNvPr>
-          <p:cNvPicPr>
-            <a:picLocks noChangeAspect="1"/>
-          </p:cNvPicPr>
-          <p:nvPr/>
-        </p:nvPicPr>
-        <p:blipFill rotWithShape="1">
-          <a:blip r:embed="rId7">
-            <a:extLst>
-              <a:ext uri="{28A0092B-C50C-407E-A947-70E740481C1C}">
-                <a14:useLocalDpi xmlns:a14="http://schemas.microsoft.com/office/drawing/2010/main" val="0"/>
-              </a:ext>
-            </a:extLst>
-          </a:blip>
-          <a:srcRect l="54311" t="59983" r="20541" b="16710"/>
-          <a:stretch/>
-        </p:blipFill>
-        <p:spPr>
-          <a:xfrm>
-            <a:off x="2514450" y="4444962"/>
-            <a:ext cx="685650" cy="440888"/>
-          </a:xfrm>
-          <a:prstGeom prst="rect">
-            <a:avLst/>
-          </a:prstGeom>
-        </p:spPr>
-      </p:pic>
-      <p:sp>
-        <p:nvSpPr>
-          <p:cNvPr id="32" name="ZoneTexte 31">
-            <a:extLst>
-              <a:ext uri="{FF2B5EF4-FFF2-40B4-BE49-F238E27FC236}">
-                <a16:creationId xmlns:a16="http://schemas.microsoft.com/office/drawing/2014/main" id="{4C4CAF6E-8419-43BA-B821-3BCC8D816E2A}"/>
-              </a:ext>
-            </a:extLst>
-          </p:cNvPr>
-          <p:cNvSpPr txBox="1"/>
-          <p:nvPr/>
-        </p:nvSpPr>
-        <p:spPr>
-          <a:xfrm>
-            <a:off x="1106621" y="5033146"/>
-            <a:ext cx="2537382" cy="276999"/>
-          </a:xfrm>
-          <a:prstGeom prst="rect">
-            <a:avLst/>
-          </a:prstGeom>
-          <a:noFill/>
-        </p:spPr>
-        <p:txBody>
-          <a:bodyPr wrap="square" rtlCol="0">
-            <a:spAutoFit/>
-          </a:bodyPr>
-          <a:lstStyle/>
-          <a:p>
-            <a:r>
-              <a:rPr lang="en-GB" sz="1200" dirty="0">
-                <a:latin typeface="Arial" panose="020B0604020202020204" pitchFamily="34" charset="0"/>
-                <a:cs typeface="Arial" panose="020B0604020202020204" pitchFamily="34" charset="0"/>
-              </a:rPr>
-              <a:t>Direct RNA nanopore sequencing</a:t>
-            </a:r>
-          </a:p>
-        </p:txBody>
-      </p:sp>
-      <p:cxnSp>
-        <p:nvCxnSpPr>
-          <p:cNvPr id="33" name="Connecteur droit avec flèche 32">
-            <a:extLst>
-              <a:ext uri="{FF2B5EF4-FFF2-40B4-BE49-F238E27FC236}">
-                <a16:creationId xmlns:a16="http://schemas.microsoft.com/office/drawing/2014/main" id="{57AA206E-976D-41C3-8F14-498E42F624DC}"/>
-              </a:ext>
-            </a:extLst>
-          </p:cNvPr>
-          <p:cNvCxnSpPr/>
-          <p:nvPr/>
-        </p:nvCxnSpPr>
-        <p:spPr>
-          <a:xfrm>
-            <a:off x="2079662" y="3858333"/>
-            <a:ext cx="0" cy="381000"/>
-          </a:xfrm>
-          <a:prstGeom prst="straightConnector1">
-            <a:avLst/>
-          </a:prstGeom>
-          <a:ln>
-            <a:solidFill>
-              <a:schemeClr val="tx1"/>
-            </a:solidFill>
-            <a:tailEnd type="triangle"/>
-          </a:ln>
-        </p:spPr>
-        <p:style>
-          <a:lnRef idx="1">
-            <a:schemeClr val="accent1"/>
-          </a:lnRef>
-          <a:fillRef idx="0">
-            <a:schemeClr val="accent1"/>
-          </a:fillRef>
-          <a:effectRef idx="0">
-            <a:schemeClr val="accent1"/>
-          </a:effectRef>
-          <a:fontRef idx="minor">
-            <a:schemeClr val="tx1"/>
-          </a:fontRef>
-        </p:style>
-      </p:cxnSp>
-      <p:sp>
-        <p:nvSpPr>
-          <p:cNvPr id="34" name="Rectangle 33">
-            <a:extLst>
-              <a:ext uri="{FF2B5EF4-FFF2-40B4-BE49-F238E27FC236}">
-                <a16:creationId xmlns:a16="http://schemas.microsoft.com/office/drawing/2014/main" id="{366DA2C0-B8F5-4C51-A3D6-71E98C98F76F}"/>
-              </a:ext>
-            </a:extLst>
-          </p:cNvPr>
-          <p:cNvSpPr/>
-          <p:nvPr/>
-        </p:nvSpPr>
-        <p:spPr>
-          <a:xfrm>
-            <a:off x="5214620" y="5593801"/>
-            <a:ext cx="1888751" cy="492443"/>
-          </a:xfrm>
-          <a:prstGeom prst="rect">
-            <a:avLst/>
-          </a:prstGeom>
-        </p:spPr>
-        <p:txBody>
-          <a:bodyPr wrap="square">
-            <a:spAutoFit/>
-          </a:bodyPr>
-          <a:lstStyle/>
-          <a:p>
-            <a:pPr algn="ctr"/>
-            <a:r>
-              <a:rPr lang="en-GB" sz="1300" dirty="0">
-                <a:latin typeface="Arial" panose="020B0604020202020204" pitchFamily="34" charset="0"/>
-                <a:cs typeface="Arial" panose="020B0604020202020204" pitchFamily="34" charset="0"/>
-              </a:rPr>
-              <a:t>Transcriptome</a:t>
-            </a:r>
-          </a:p>
-          <a:p>
-            <a:pPr algn="ctr"/>
-            <a:r>
-              <a:rPr lang="en-GB" sz="1300" dirty="0">
-                <a:latin typeface="Arial" panose="020B0604020202020204" pitchFamily="34" charset="0"/>
-                <a:cs typeface="Arial" panose="020B0604020202020204" pitchFamily="34" charset="0"/>
-              </a:rPr>
-              <a:t>Alternative Splicing</a:t>
-            </a:r>
-          </a:p>
-        </p:txBody>
-      </p:sp>
-      <p:pic>
-        <p:nvPicPr>
-          <p:cNvPr id="35" name="Image 34">
-            <a:extLst>
-              <a:ext uri="{FF2B5EF4-FFF2-40B4-BE49-F238E27FC236}">
-                <a16:creationId xmlns:a16="http://schemas.microsoft.com/office/drawing/2014/main" id="{F4D8645B-582E-4965-83EC-57B450F76826}"/>
-              </a:ext>
-            </a:extLst>
-          </p:cNvPr>
-          <p:cNvPicPr>
-            <a:picLocks noChangeAspect="1"/>
-          </p:cNvPicPr>
-          <p:nvPr/>
-        </p:nvPicPr>
-        <p:blipFill>
-          <a:blip r:embed="rId8">
-            <a:clrChange>
-              <a:clrFrom>
-                <a:srgbClr val="FFFFFF"/>
-              </a:clrFrom>
-              <a:clrTo>
-                <a:srgbClr val="FFFFFF">
-                  <a:alpha val="0"/>
-                </a:srgbClr>
-              </a:clrTo>
-            </a:clrChange>
-            <a:extLst>
-              <a:ext uri="{28A0092B-C50C-407E-A947-70E740481C1C}">
-                <a14:useLocalDpi xmlns:a14="http://schemas.microsoft.com/office/drawing/2010/main" val="0"/>
-              </a:ext>
-            </a:extLst>
-          </a:blip>
-          <a:stretch>
-            <a:fillRect/>
-          </a:stretch>
-        </p:blipFill>
-        <p:spPr>
-          <a:xfrm>
-            <a:off x="1893049" y="3224339"/>
-            <a:ext cx="481016" cy="337039"/>
-          </a:xfrm>
-          <a:prstGeom prst="rect">
-            <a:avLst/>
-          </a:prstGeom>
-        </p:spPr>
-      </p:pic>
-      <p:pic>
-        <p:nvPicPr>
-          <p:cNvPr id="36" name="Image 35">
-            <a:extLst>
-              <a:ext uri="{FF2B5EF4-FFF2-40B4-BE49-F238E27FC236}">
-                <a16:creationId xmlns:a16="http://schemas.microsoft.com/office/drawing/2014/main" id="{67DAADBF-225C-4FE1-A796-7ED1821F641F}"/>
-              </a:ext>
-            </a:extLst>
-          </p:cNvPr>
-          <p:cNvPicPr>
-            <a:picLocks noChangeAspect="1"/>
-          </p:cNvPicPr>
-          <p:nvPr/>
-        </p:nvPicPr>
-        <p:blipFill rotWithShape="1">
-          <a:blip r:embed="rId9"/>
-          <a:srcRect l="10825" t="4084" r="15044" b="90721"/>
-          <a:stretch/>
-        </p:blipFill>
-        <p:spPr>
-          <a:xfrm>
-            <a:off x="879291" y="2625463"/>
-            <a:ext cx="2452744" cy="279700"/>
-          </a:xfrm>
-          <a:prstGeom prst="rect">
-            <a:avLst/>
-          </a:prstGeom>
-        </p:spPr>
-      </p:pic>
-      <p:sp>
-        <p:nvSpPr>
-          <p:cNvPr id="37" name="ZoneTexte 36">
-            <a:extLst>
-              <a:ext uri="{FF2B5EF4-FFF2-40B4-BE49-F238E27FC236}">
-                <a16:creationId xmlns:a16="http://schemas.microsoft.com/office/drawing/2014/main" id="{E3C1AF75-5B5D-4251-A9B9-98BE330B8607}"/>
-              </a:ext>
-            </a:extLst>
-          </p:cNvPr>
-          <p:cNvSpPr txBox="1"/>
-          <p:nvPr/>
-        </p:nvSpPr>
-        <p:spPr>
-          <a:xfrm>
-            <a:off x="1449444" y="3496832"/>
-            <a:ext cx="1237129" cy="276999"/>
-          </a:xfrm>
-          <a:prstGeom prst="rect">
-            <a:avLst/>
-          </a:prstGeom>
-          <a:noFill/>
-        </p:spPr>
-        <p:txBody>
-          <a:bodyPr wrap="square" rtlCol="0">
-            <a:spAutoFit/>
-          </a:bodyPr>
-          <a:lstStyle/>
-          <a:p>
-            <a:pPr algn="ctr"/>
-            <a:r>
-              <a:rPr lang="en-GB" sz="1200" dirty="0">
-                <a:solidFill>
-                  <a:schemeClr val="bg2">
-                    <a:lumMod val="50000"/>
-                  </a:schemeClr>
-                </a:solidFill>
-                <a:latin typeface="Arial" panose="020B0604020202020204" pitchFamily="34" charset="0"/>
-                <a:cs typeface="Arial" panose="020B0604020202020204" pitchFamily="34" charset="0"/>
-              </a:rPr>
-              <a:t>RNA (</a:t>
-            </a:r>
-            <a:r>
-              <a:rPr lang="en-GB" sz="1200" dirty="0" err="1">
-                <a:solidFill>
-                  <a:schemeClr val="bg2">
-                    <a:lumMod val="50000"/>
-                  </a:schemeClr>
-                </a:solidFill>
-                <a:latin typeface="Arial" panose="020B0604020202020204" pitchFamily="34" charset="0"/>
-                <a:cs typeface="Arial" panose="020B0604020202020204" pitchFamily="34" charset="0"/>
-              </a:rPr>
-              <a:t>polyA</a:t>
-            </a:r>
-            <a:r>
-              <a:rPr lang="en-GB" sz="1200" dirty="0">
-                <a:solidFill>
-                  <a:schemeClr val="bg2">
-                    <a:lumMod val="50000"/>
-                  </a:schemeClr>
-                </a:solidFill>
-                <a:latin typeface="Arial" panose="020B0604020202020204" pitchFamily="34" charset="0"/>
-                <a:cs typeface="Arial" panose="020B0604020202020204" pitchFamily="34" charset="0"/>
-              </a:rPr>
-              <a:t>)</a:t>
-            </a:r>
-          </a:p>
-        </p:txBody>
-      </p:sp>
-      <p:sp>
-        <p:nvSpPr>
-          <p:cNvPr id="38" name="ZoneTexte 37">
-            <a:extLst>
-              <a:ext uri="{FF2B5EF4-FFF2-40B4-BE49-F238E27FC236}">
-                <a16:creationId xmlns:a16="http://schemas.microsoft.com/office/drawing/2014/main" id="{9C720885-15C3-4DFE-910D-459A65D02359}"/>
-              </a:ext>
-            </a:extLst>
-          </p:cNvPr>
-          <p:cNvSpPr txBox="1"/>
-          <p:nvPr/>
-        </p:nvSpPr>
-        <p:spPr>
-          <a:xfrm>
-            <a:off x="914400" y="1409700"/>
+            <a:off x="863060" y="395504"/>
             <a:ext cx="3009900" cy="307777"/>
           </a:xfrm>
           <a:prstGeom prst="rect">
@@ -9243,731 +9053,6 @@
   <p:clrMapOvr>
     <a:masterClrMapping/>
   </p:clrMapOvr>
-  <p:timing>
-    <p:tnLst>
-      <p:par>
-        <p:cTn id="1" dur="indefinite" restart="never" nodeType="tmRoot">
-          <p:childTnLst>
-            <p:seq concurrent="1" nextAc="seek">
-              <p:cTn id="2" dur="indefinite" nodeType="mainSeq">
-                <p:childTnLst>
-                  <p:par>
-                    <p:cTn id="3" fill="hold">
-                      <p:stCondLst>
-                        <p:cond delay="indefinite"/>
-                      </p:stCondLst>
-                      <p:childTnLst>
-                        <p:par>
-                          <p:cTn id="4" fill="hold">
-                            <p:stCondLst>
-                              <p:cond delay="0"/>
-                            </p:stCondLst>
-                            <p:childTnLst>
-                              <p:par>
-                                <p:cTn id="5" presetID="1" presetClass="entr" presetSubtype="0" fill="hold" grpId="0" nodeType="clickEffect">
-                                  <p:stCondLst>
-                                    <p:cond delay="0"/>
-                                  </p:stCondLst>
-                                  <p:childTnLst>
-                                    <p:set>
-                                      <p:cBhvr>
-                                        <p:cTn id="6" dur="1" fill="hold">
-                                          <p:stCondLst>
-                                            <p:cond delay="0"/>
-                                          </p:stCondLst>
-                                        </p:cTn>
-                                        <p:tgtEl>
-                                          <p:spTgt spid="27"/>
-                                        </p:tgtEl>
-                                        <p:attrNameLst>
-                                          <p:attrName>style.visibility</p:attrName>
-                                        </p:attrNameLst>
-                                      </p:cBhvr>
-                                      <p:to>
-                                        <p:strVal val="visible"/>
-                                      </p:to>
-                                    </p:set>
-                                  </p:childTnLst>
-                                </p:cTn>
-                              </p:par>
-                              <p:par>
-                                <p:cTn id="7" presetID="1" presetClass="entr" presetSubtype="0" fill="hold" nodeType="withEffect">
-                                  <p:stCondLst>
-                                    <p:cond delay="0"/>
-                                  </p:stCondLst>
-                                  <p:childTnLst>
-                                    <p:set>
-                                      <p:cBhvr>
-                                        <p:cTn id="8" dur="1" fill="hold">
-                                          <p:stCondLst>
-                                            <p:cond delay="0"/>
-                                          </p:stCondLst>
-                                        </p:cTn>
-                                        <p:tgtEl>
-                                          <p:spTgt spid="21"/>
-                                        </p:tgtEl>
-                                        <p:attrNameLst>
-                                          <p:attrName>style.visibility</p:attrName>
-                                        </p:attrNameLst>
-                                      </p:cBhvr>
-                                      <p:to>
-                                        <p:strVal val="visible"/>
-                                      </p:to>
-                                    </p:set>
-                                  </p:childTnLst>
-                                </p:cTn>
-                              </p:par>
-                              <p:par>
-                                <p:cTn id="9" presetID="1" presetClass="entr" presetSubtype="0" fill="hold" nodeType="withEffect">
-                                  <p:stCondLst>
-                                    <p:cond delay="0"/>
-                                  </p:stCondLst>
-                                  <p:childTnLst>
-                                    <p:set>
-                                      <p:cBhvr>
-                                        <p:cTn id="10" dur="1" fill="hold">
-                                          <p:stCondLst>
-                                            <p:cond delay="0"/>
-                                          </p:stCondLst>
-                                        </p:cTn>
-                                        <p:tgtEl>
-                                          <p:spTgt spid="25"/>
-                                        </p:tgtEl>
-                                        <p:attrNameLst>
-                                          <p:attrName>style.visibility</p:attrName>
-                                        </p:attrNameLst>
-                                      </p:cBhvr>
-                                      <p:to>
-                                        <p:strVal val="visible"/>
-                                      </p:to>
-                                    </p:set>
-                                  </p:childTnLst>
-                                </p:cTn>
-                              </p:par>
-                              <p:par>
-                                <p:cTn id="11" presetID="1" presetClass="entr" presetSubtype="0" fill="hold" nodeType="withEffect">
-                                  <p:stCondLst>
-                                    <p:cond delay="0"/>
-                                  </p:stCondLst>
-                                  <p:childTnLst>
-                                    <p:set>
-                                      <p:cBhvr>
-                                        <p:cTn id="12" dur="1" fill="hold">
-                                          <p:stCondLst>
-                                            <p:cond delay="0"/>
-                                          </p:stCondLst>
-                                        </p:cTn>
-                                        <p:tgtEl>
-                                          <p:spTgt spid="26"/>
-                                        </p:tgtEl>
-                                        <p:attrNameLst>
-                                          <p:attrName>style.visibility</p:attrName>
-                                        </p:attrNameLst>
-                                      </p:cBhvr>
-                                      <p:to>
-                                        <p:strVal val="visible"/>
-                                      </p:to>
-                                    </p:set>
-                                  </p:childTnLst>
-                                </p:cTn>
-                              </p:par>
-                              <p:par>
-                                <p:cTn id="13" presetID="1" presetClass="entr" presetSubtype="0" fill="hold" nodeType="withEffect">
-                                  <p:stCondLst>
-                                    <p:cond delay="0"/>
-                                  </p:stCondLst>
-                                  <p:childTnLst>
-                                    <p:set>
-                                      <p:cBhvr>
-                                        <p:cTn id="14" dur="1" fill="hold">
-                                          <p:stCondLst>
-                                            <p:cond delay="0"/>
-                                          </p:stCondLst>
-                                        </p:cTn>
-                                        <p:tgtEl>
-                                          <p:spTgt spid="17"/>
-                                        </p:tgtEl>
-                                        <p:attrNameLst>
-                                          <p:attrName>style.visibility</p:attrName>
-                                        </p:attrNameLst>
-                                      </p:cBhvr>
-                                      <p:to>
-                                        <p:strVal val="visible"/>
-                                      </p:to>
-                                    </p:set>
-                                  </p:childTnLst>
-                                </p:cTn>
-                              </p:par>
-                              <p:par>
-                                <p:cTn id="15" presetID="1" presetClass="entr" presetSubtype="0" fill="hold" grpId="0" nodeType="withEffect">
-                                  <p:stCondLst>
-                                    <p:cond delay="0"/>
-                                  </p:stCondLst>
-                                  <p:childTnLst>
-                                    <p:set>
-                                      <p:cBhvr>
-                                        <p:cTn id="16" dur="1" fill="hold">
-                                          <p:stCondLst>
-                                            <p:cond delay="0"/>
-                                          </p:stCondLst>
-                                        </p:cTn>
-                                        <p:tgtEl>
-                                          <p:spTgt spid="11"/>
-                                        </p:tgtEl>
-                                        <p:attrNameLst>
-                                          <p:attrName>style.visibility</p:attrName>
-                                        </p:attrNameLst>
-                                      </p:cBhvr>
-                                      <p:to>
-                                        <p:strVal val="visible"/>
-                                      </p:to>
-                                    </p:set>
-                                  </p:childTnLst>
-                                </p:cTn>
-                              </p:par>
-                            </p:childTnLst>
-                          </p:cTn>
-                        </p:par>
-                      </p:childTnLst>
-                    </p:cTn>
-                  </p:par>
-                  <p:par>
-                    <p:cTn id="17" fill="hold">
-                      <p:stCondLst>
-                        <p:cond delay="indefinite"/>
-                      </p:stCondLst>
-                      <p:childTnLst>
-                        <p:par>
-                          <p:cTn id="18" fill="hold">
-                            <p:stCondLst>
-                              <p:cond delay="0"/>
-                            </p:stCondLst>
-                            <p:childTnLst>
-                              <p:par>
-                                <p:cTn id="19" presetID="1" presetClass="entr" presetSubtype="0" fill="hold" nodeType="clickEffect">
-                                  <p:stCondLst>
-                                    <p:cond delay="0"/>
-                                  </p:stCondLst>
-                                  <p:childTnLst>
-                                    <p:set>
-                                      <p:cBhvr>
-                                        <p:cTn id="20" dur="1" fill="hold">
-                                          <p:stCondLst>
-                                            <p:cond delay="0"/>
-                                          </p:stCondLst>
-                                        </p:cTn>
-                                        <p:tgtEl>
-                                          <p:spTgt spid="12"/>
-                                        </p:tgtEl>
-                                        <p:attrNameLst>
-                                          <p:attrName>style.visibility</p:attrName>
-                                        </p:attrNameLst>
-                                      </p:cBhvr>
-                                      <p:to>
-                                        <p:strVal val="visible"/>
-                                      </p:to>
-                                    </p:set>
-                                  </p:childTnLst>
-                                </p:cTn>
-                              </p:par>
-                              <p:par>
-                                <p:cTn id="21" presetID="1" presetClass="entr" presetSubtype="0" fill="hold" grpId="0" nodeType="withEffect">
-                                  <p:stCondLst>
-                                    <p:cond delay="0"/>
-                                  </p:stCondLst>
-                                  <p:childTnLst>
-                                    <p:set>
-                                      <p:cBhvr>
-                                        <p:cTn id="22" dur="1" fill="hold">
-                                          <p:stCondLst>
-                                            <p:cond delay="0"/>
-                                          </p:stCondLst>
-                                        </p:cTn>
-                                        <p:tgtEl>
-                                          <p:spTgt spid="6"/>
-                                        </p:tgtEl>
-                                        <p:attrNameLst>
-                                          <p:attrName>style.visibility</p:attrName>
-                                        </p:attrNameLst>
-                                      </p:cBhvr>
-                                      <p:to>
-                                        <p:strVal val="visible"/>
-                                      </p:to>
-                                    </p:set>
-                                  </p:childTnLst>
-                                </p:cTn>
-                              </p:par>
-                              <p:par>
-                                <p:cTn id="23" presetID="1" presetClass="entr" presetSubtype="0" fill="hold" nodeType="withEffect">
-                                  <p:stCondLst>
-                                    <p:cond delay="0"/>
-                                  </p:stCondLst>
-                                  <p:childTnLst>
-                                    <p:set>
-                                      <p:cBhvr>
-                                        <p:cTn id="24" dur="1" fill="hold">
-                                          <p:stCondLst>
-                                            <p:cond delay="0"/>
-                                          </p:stCondLst>
-                                        </p:cTn>
-                                        <p:tgtEl>
-                                          <p:spTgt spid="7"/>
-                                        </p:tgtEl>
-                                        <p:attrNameLst>
-                                          <p:attrName>style.visibility</p:attrName>
-                                        </p:attrNameLst>
-                                      </p:cBhvr>
-                                      <p:to>
-                                        <p:strVal val="visible"/>
-                                      </p:to>
-                                    </p:set>
-                                  </p:childTnLst>
-                                </p:cTn>
-                              </p:par>
-                              <p:par>
-                                <p:cTn id="25" presetID="1" presetClass="entr" presetSubtype="0" fill="hold" grpId="0" nodeType="withEffect">
-                                  <p:stCondLst>
-                                    <p:cond delay="0"/>
-                                  </p:stCondLst>
-                                  <p:childTnLst>
-                                    <p:set>
-                                      <p:cBhvr>
-                                        <p:cTn id="26" dur="1" fill="hold">
-                                          <p:stCondLst>
-                                            <p:cond delay="0"/>
-                                          </p:stCondLst>
-                                        </p:cTn>
-                                        <p:tgtEl>
-                                          <p:spTgt spid="8"/>
-                                        </p:tgtEl>
-                                        <p:attrNameLst>
-                                          <p:attrName>style.visibility</p:attrName>
-                                        </p:attrNameLst>
-                                      </p:cBhvr>
-                                      <p:to>
-                                        <p:strVal val="visible"/>
-                                      </p:to>
-                                    </p:set>
-                                  </p:childTnLst>
-                                </p:cTn>
-                              </p:par>
-                            </p:childTnLst>
-                          </p:cTn>
-                        </p:par>
-                      </p:childTnLst>
-                    </p:cTn>
-                  </p:par>
-                  <p:par>
-                    <p:cTn id="27" fill="hold">
-                      <p:stCondLst>
-                        <p:cond delay="indefinite"/>
-                      </p:stCondLst>
-                      <p:childTnLst>
-                        <p:par>
-                          <p:cTn id="28" fill="hold">
-                            <p:stCondLst>
-                              <p:cond delay="0"/>
-                            </p:stCondLst>
-                            <p:childTnLst>
-                              <p:par>
-                                <p:cTn id="29" presetID="1" presetClass="entr" presetSubtype="0" fill="hold" nodeType="clickEffect">
-                                  <p:stCondLst>
-                                    <p:cond delay="0"/>
-                                  </p:stCondLst>
-                                  <p:childTnLst>
-                                    <p:set>
-                                      <p:cBhvr>
-                                        <p:cTn id="30" dur="1" fill="hold">
-                                          <p:stCondLst>
-                                            <p:cond delay="0"/>
-                                          </p:stCondLst>
-                                        </p:cTn>
-                                        <p:tgtEl>
-                                          <p:spTgt spid="9"/>
-                                        </p:tgtEl>
-                                        <p:attrNameLst>
-                                          <p:attrName>style.visibility</p:attrName>
-                                        </p:attrNameLst>
-                                      </p:cBhvr>
-                                      <p:to>
-                                        <p:strVal val="visible"/>
-                                      </p:to>
-                                    </p:set>
-                                  </p:childTnLst>
-                                </p:cTn>
-                              </p:par>
-                              <p:par>
-                                <p:cTn id="31" presetID="1" presetClass="entr" presetSubtype="0" fill="hold" grpId="0" nodeType="withEffect">
-                                  <p:stCondLst>
-                                    <p:cond delay="0"/>
-                                  </p:stCondLst>
-                                  <p:childTnLst>
-                                    <p:set>
-                                      <p:cBhvr>
-                                        <p:cTn id="32" dur="1" fill="hold">
-                                          <p:stCondLst>
-                                            <p:cond delay="0"/>
-                                          </p:stCondLst>
-                                        </p:cTn>
-                                        <p:tgtEl>
-                                          <p:spTgt spid="28"/>
-                                        </p:tgtEl>
-                                        <p:attrNameLst>
-                                          <p:attrName>style.visibility</p:attrName>
-                                        </p:attrNameLst>
-                                      </p:cBhvr>
-                                      <p:to>
-                                        <p:strVal val="visible"/>
-                                      </p:to>
-                                    </p:set>
-                                  </p:childTnLst>
-                                </p:cTn>
-                              </p:par>
-                            </p:childTnLst>
-                          </p:cTn>
-                        </p:par>
-                      </p:childTnLst>
-                    </p:cTn>
-                  </p:par>
-                  <p:par>
-                    <p:cTn id="33" fill="hold">
-                      <p:stCondLst>
-                        <p:cond delay="indefinite"/>
-                      </p:stCondLst>
-                      <p:childTnLst>
-                        <p:par>
-                          <p:cTn id="34" fill="hold">
-                            <p:stCondLst>
-                              <p:cond delay="0"/>
-                            </p:stCondLst>
-                            <p:childTnLst>
-                              <p:par>
-                                <p:cTn id="35" presetID="1" presetClass="entr" presetSubtype="0" fill="hold" grpId="0" nodeType="clickEffect">
-                                  <p:stCondLst>
-                                    <p:cond delay="0"/>
-                                  </p:stCondLst>
-                                  <p:childTnLst>
-                                    <p:set>
-                                      <p:cBhvr>
-                                        <p:cTn id="36" dur="1" fill="hold">
-                                          <p:stCondLst>
-                                            <p:cond delay="0"/>
-                                          </p:stCondLst>
-                                        </p:cTn>
-                                        <p:tgtEl>
-                                          <p:spTgt spid="5"/>
-                                        </p:tgtEl>
-                                        <p:attrNameLst>
-                                          <p:attrName>style.visibility</p:attrName>
-                                        </p:attrNameLst>
-                                      </p:cBhvr>
-                                      <p:to>
-                                        <p:strVal val="visible"/>
-                                      </p:to>
-                                    </p:set>
-                                  </p:childTnLst>
-                                </p:cTn>
-                              </p:par>
-                              <p:par>
-                                <p:cTn id="37" presetID="1" presetClass="entr" presetSubtype="0" fill="hold" nodeType="withEffect">
-                                  <p:stCondLst>
-                                    <p:cond delay="0"/>
-                                  </p:stCondLst>
-                                  <p:childTnLst>
-                                    <p:set>
-                                      <p:cBhvr>
-                                        <p:cTn id="38" dur="1" fill="hold">
-                                          <p:stCondLst>
-                                            <p:cond delay="0"/>
-                                          </p:stCondLst>
-                                        </p:cTn>
-                                        <p:tgtEl>
-                                          <p:spTgt spid="13"/>
-                                        </p:tgtEl>
-                                        <p:attrNameLst>
-                                          <p:attrName>style.visibility</p:attrName>
-                                        </p:attrNameLst>
-                                      </p:cBhvr>
-                                      <p:to>
-                                        <p:strVal val="visible"/>
-                                      </p:to>
-                                    </p:set>
-                                  </p:childTnLst>
-                                </p:cTn>
-                              </p:par>
-                              <p:par>
-                                <p:cTn id="39" presetID="1" presetClass="entr" presetSubtype="0" fill="hold" nodeType="withEffect">
-                                  <p:stCondLst>
-                                    <p:cond delay="0"/>
-                                  </p:stCondLst>
-                                  <p:childTnLst>
-                                    <p:set>
-                                      <p:cBhvr>
-                                        <p:cTn id="40" dur="1" fill="hold">
-                                          <p:stCondLst>
-                                            <p:cond delay="0"/>
-                                          </p:stCondLst>
-                                        </p:cTn>
-                                        <p:tgtEl>
-                                          <p:spTgt spid="19"/>
-                                        </p:tgtEl>
-                                        <p:attrNameLst>
-                                          <p:attrName>style.visibility</p:attrName>
-                                        </p:attrNameLst>
-                                      </p:cBhvr>
-                                      <p:to>
-                                        <p:strVal val="visible"/>
-                                      </p:to>
-                                    </p:set>
-                                  </p:childTnLst>
-                                </p:cTn>
-                              </p:par>
-                              <p:par>
-                                <p:cTn id="41" presetID="1" presetClass="entr" presetSubtype="0" fill="hold" grpId="0" nodeType="withEffect">
-                                  <p:stCondLst>
-                                    <p:cond delay="0"/>
-                                  </p:stCondLst>
-                                  <p:childTnLst>
-                                    <p:set>
-                                      <p:cBhvr>
-                                        <p:cTn id="42" dur="1" fill="hold">
-                                          <p:stCondLst>
-                                            <p:cond delay="0"/>
-                                          </p:stCondLst>
-                                        </p:cTn>
-                                        <p:tgtEl>
-                                          <p:spTgt spid="20"/>
-                                        </p:tgtEl>
-                                        <p:attrNameLst>
-                                          <p:attrName>style.visibility</p:attrName>
-                                        </p:attrNameLst>
-                                      </p:cBhvr>
-                                      <p:to>
-                                        <p:strVal val="visible"/>
-                                      </p:to>
-                                    </p:set>
-                                  </p:childTnLst>
-                                </p:cTn>
-                              </p:par>
-                              <p:par>
-                                <p:cTn id="43" presetID="1" presetClass="entr" presetSubtype="0" fill="hold" nodeType="withEffect">
-                                  <p:stCondLst>
-                                    <p:cond delay="0"/>
-                                  </p:stCondLst>
-                                  <p:childTnLst>
-                                    <p:set>
-                                      <p:cBhvr>
-                                        <p:cTn id="44" dur="1" fill="hold">
-                                          <p:stCondLst>
-                                            <p:cond delay="0"/>
-                                          </p:stCondLst>
-                                        </p:cTn>
-                                        <p:tgtEl>
-                                          <p:spTgt spid="18"/>
-                                        </p:tgtEl>
-                                        <p:attrNameLst>
-                                          <p:attrName>style.visibility</p:attrName>
-                                        </p:attrNameLst>
-                                      </p:cBhvr>
-                                      <p:to>
-                                        <p:strVal val="visible"/>
-                                      </p:to>
-                                    </p:set>
-                                  </p:childTnLst>
-                                </p:cTn>
-                              </p:par>
-                            </p:childTnLst>
-                          </p:cTn>
-                        </p:par>
-                      </p:childTnLst>
-                    </p:cTn>
-                  </p:par>
-                  <p:par>
-                    <p:cTn id="45" fill="hold">
-                      <p:stCondLst>
-                        <p:cond delay="indefinite"/>
-                      </p:stCondLst>
-                      <p:childTnLst>
-                        <p:par>
-                          <p:cTn id="46" fill="hold">
-                            <p:stCondLst>
-                              <p:cond delay="0"/>
-                            </p:stCondLst>
-                            <p:childTnLst>
-                              <p:par>
-                                <p:cTn id="47" presetID="1" presetClass="entr" presetSubtype="0" fill="hold" grpId="0" nodeType="clickEffect">
-                                  <p:stCondLst>
-                                    <p:cond delay="0"/>
-                                  </p:stCondLst>
-                                  <p:childTnLst>
-                                    <p:set>
-                                      <p:cBhvr>
-                                        <p:cTn id="48" dur="1" fill="hold">
-                                          <p:stCondLst>
-                                            <p:cond delay="0"/>
-                                          </p:stCondLst>
-                                        </p:cTn>
-                                        <p:tgtEl>
-                                          <p:spTgt spid="10"/>
-                                        </p:tgtEl>
-                                        <p:attrNameLst>
-                                          <p:attrName>style.visibility</p:attrName>
-                                        </p:attrNameLst>
-                                      </p:cBhvr>
-                                      <p:to>
-                                        <p:strVal val="visible"/>
-                                      </p:to>
-                                    </p:set>
-                                  </p:childTnLst>
-                                </p:cTn>
-                              </p:par>
-                              <p:par>
-                                <p:cTn id="49" presetID="1" presetClass="entr" presetSubtype="0" fill="hold" grpId="0" nodeType="withEffect">
-                                  <p:stCondLst>
-                                    <p:cond delay="0"/>
-                                  </p:stCondLst>
-                                  <p:childTnLst>
-                                    <p:set>
-                                      <p:cBhvr>
-                                        <p:cTn id="50" dur="1" fill="hold">
-                                          <p:stCondLst>
-                                            <p:cond delay="0"/>
-                                          </p:stCondLst>
-                                        </p:cTn>
-                                        <p:tgtEl>
-                                          <p:spTgt spid="34"/>
-                                        </p:tgtEl>
-                                        <p:attrNameLst>
-                                          <p:attrName>style.visibility</p:attrName>
-                                        </p:attrNameLst>
-                                      </p:cBhvr>
-                                      <p:to>
-                                        <p:strVal val="visible"/>
-                                      </p:to>
-                                    </p:set>
-                                  </p:childTnLst>
-                                </p:cTn>
-                              </p:par>
-                              <p:par>
-                                <p:cTn id="51" presetID="1" presetClass="entr" presetSubtype="0" fill="hold" nodeType="withEffect">
-                                  <p:stCondLst>
-                                    <p:cond delay="0"/>
-                                  </p:stCondLst>
-                                  <p:childTnLst>
-                                    <p:set>
-                                      <p:cBhvr>
-                                        <p:cTn id="52" dur="1" fill="hold">
-                                          <p:stCondLst>
-                                            <p:cond delay="0"/>
-                                          </p:stCondLst>
-                                        </p:cTn>
-                                        <p:tgtEl>
-                                          <p:spTgt spid="14"/>
-                                        </p:tgtEl>
-                                        <p:attrNameLst>
-                                          <p:attrName>style.visibility</p:attrName>
-                                        </p:attrNameLst>
-                                      </p:cBhvr>
-                                      <p:to>
-                                        <p:strVal val="visible"/>
-                                      </p:to>
-                                    </p:set>
-                                  </p:childTnLst>
-                                </p:cTn>
-                              </p:par>
-                              <p:par>
-                                <p:cTn id="53" presetID="1" presetClass="entr" presetSubtype="0" fill="hold" nodeType="withEffect">
-                                  <p:stCondLst>
-                                    <p:cond delay="0"/>
-                                  </p:stCondLst>
-                                  <p:childTnLst>
-                                    <p:set>
-                                      <p:cBhvr>
-                                        <p:cTn id="54" dur="1" fill="hold">
-                                          <p:stCondLst>
-                                            <p:cond delay="0"/>
-                                          </p:stCondLst>
-                                        </p:cTn>
-                                        <p:tgtEl>
-                                          <p:spTgt spid="15"/>
-                                        </p:tgtEl>
-                                        <p:attrNameLst>
-                                          <p:attrName>style.visibility</p:attrName>
-                                        </p:attrNameLst>
-                                      </p:cBhvr>
-                                      <p:to>
-                                        <p:strVal val="visible"/>
-                                      </p:to>
-                                    </p:set>
-                                  </p:childTnLst>
-                                </p:cTn>
-                              </p:par>
-                              <p:par>
-                                <p:cTn id="55" presetID="1" presetClass="entr" presetSubtype="0" fill="hold" nodeType="withEffect">
-                                  <p:stCondLst>
-                                    <p:cond delay="0"/>
-                                  </p:stCondLst>
-                                  <p:childTnLst>
-                                    <p:set>
-                                      <p:cBhvr>
-                                        <p:cTn id="56" dur="1" fill="hold">
-                                          <p:stCondLst>
-                                            <p:cond delay="0"/>
-                                          </p:stCondLst>
-                                        </p:cTn>
-                                        <p:tgtEl>
-                                          <p:spTgt spid="16"/>
-                                        </p:tgtEl>
-                                        <p:attrNameLst>
-                                          <p:attrName>style.visibility</p:attrName>
-                                        </p:attrNameLst>
-                                      </p:cBhvr>
-                                      <p:to>
-                                        <p:strVal val="visible"/>
-                                      </p:to>
-                                    </p:set>
-                                  </p:childTnLst>
-                                </p:cTn>
-                              </p:par>
-                            </p:childTnLst>
-                          </p:cTn>
-                        </p:par>
-                      </p:childTnLst>
-                    </p:cTn>
-                  </p:par>
-                </p:childTnLst>
-              </p:cTn>
-              <p:prevCondLst>
-                <p:cond evt="onPrev" delay="0">
-                  <p:tgtEl>
-                    <p:sldTgt/>
-                  </p:tgtEl>
-                </p:cond>
-              </p:prevCondLst>
-              <p:nextCondLst>
-                <p:cond evt="onNext" delay="0">
-                  <p:tgtEl>
-                    <p:sldTgt/>
-                  </p:tgtEl>
-                </p:cond>
-              </p:nextCondLst>
-            </p:seq>
-          </p:childTnLst>
-        </p:cTn>
-      </p:par>
-    </p:tnLst>
-    <p:bldLst>
-      <p:bldP spid="5" grpId="0"/>
-      <p:bldP spid="6" grpId="0"/>
-      <p:bldP spid="8" grpId="0"/>
-      <p:bldP spid="10" grpId="0"/>
-      <p:bldP spid="11" grpId="0"/>
-      <p:bldP spid="20" grpId="0"/>
-      <p:bldP spid="27" grpId="0" animBg="1"/>
-      <p:bldP spid="28" grpId="0"/>
-      <p:bldP spid="34" grpId="0"/>
-    </p:bldLst>
-  </p:timing>
 </p:sld>
 </file>
 
